--- a/01 - Documents and Preparation/Debunk Myths About CTE.pptx
+++ b/01 - Documents and Preparation/Debunk Myths About CTE.pptx
@@ -5,7 +5,7 @@
     <p:sldMasterId id="2147483689" r:id="rId1"/>
   </p:sldMasterIdLst>
   <p:notesMasterIdLst>
-    <p:notesMasterId r:id="rId27"/>
+    <p:notesMasterId r:id="rId31"/>
   </p:notesMasterIdLst>
   <p:sldIdLst>
     <p:sldId id="334" r:id="rId2"/>
@@ -22,22 +22,26 @@
     <p:sldId id="433" r:id="rId13"/>
     <p:sldId id="434" r:id="rId14"/>
     <p:sldId id="435" r:id="rId15"/>
-    <p:sldId id="436" r:id="rId16"/>
+    <p:sldId id="423" r:id="rId16"/>
     <p:sldId id="337" r:id="rId17"/>
-    <p:sldId id="423" r:id="rId18"/>
-    <p:sldId id="341" r:id="rId19"/>
-    <p:sldId id="427" r:id="rId20"/>
-    <p:sldId id="404" r:id="rId21"/>
-    <p:sldId id="345" r:id="rId22"/>
-    <p:sldId id="347" r:id="rId23"/>
-    <p:sldId id="348" r:id="rId24"/>
-    <p:sldId id="349" r:id="rId25"/>
-    <p:sldId id="346" r:id="rId26"/>
+    <p:sldId id="440" r:id="rId18"/>
+    <p:sldId id="441" r:id="rId19"/>
+    <p:sldId id="341" r:id="rId20"/>
+    <p:sldId id="427" r:id="rId21"/>
+    <p:sldId id="404" r:id="rId22"/>
+    <p:sldId id="345" r:id="rId23"/>
+    <p:sldId id="347" r:id="rId24"/>
+    <p:sldId id="438" r:id="rId25"/>
+    <p:sldId id="439" r:id="rId26"/>
+    <p:sldId id="348" r:id="rId27"/>
+    <p:sldId id="349" r:id="rId28"/>
+    <p:sldId id="346" r:id="rId29"/>
+    <p:sldId id="426" r:id="rId30"/>
   </p:sldIdLst>
   <p:sldSz cx="12192000" cy="6858000"/>
   <p:notesSz cx="6858000" cy="9144000"/>
   <p:custDataLst>
-    <p:tags r:id="rId28"/>
+    <p:tags r:id="rId32"/>
   </p:custDataLst>
   <p:defaultTextStyle>
     <a:defPPr>
@@ -145,7 +149,7 @@
 <file path=ppt/revisionInfo.xml><?xml version="1.0" encoding="utf-8"?>
 <p1510:revInfo xmlns:a="http://schemas.openxmlformats.org/drawingml/2006/main" xmlns:r="http://schemas.openxmlformats.org/officeDocument/2006/relationships" xmlns:p1510="http://schemas.microsoft.com/office/powerpoint/2015/10/main">
   <p1510:revLst>
-    <p1510:client id="{11957C16-3A1B-44F4-8A08-B96057A0666D}" v="833" dt="2025-11-25T07:35:14.482"/>
+    <p1510:client id="{11957C16-3A1B-44F4-8A08-B96057A0666D}" v="259" dt="2025-11-27T10:37:39.355"/>
   </p1510:revLst>
 </p1510:revInfo>
 </file>
@@ -155,7 +159,7 @@
   <pc:docChgLst>
     <pc:chgData name="Uwe Ricken" userId="f02567aecbed924b" providerId="LiveId" clId="{E77B627B-1F43-41A9-9F24-D4BB31BF6050}"/>
     <pc:docChg chg="undo custSel addSld delSld modSld sldOrd modMainMaster">
-      <pc:chgData name="Uwe Ricken" userId="f02567aecbed924b" providerId="LiveId" clId="{E77B627B-1F43-41A9-9F24-D4BB31BF6050}" dt="2025-11-25T07:45:39.031" v="5106" actId="14100"/>
+      <pc:chgData name="Uwe Ricken" userId="f02567aecbed924b" providerId="LiveId" clId="{E77B627B-1F43-41A9-9F24-D4BB31BF6050}" dt="2025-11-27T10:37:42.339" v="5693" actId="478"/>
       <pc:docMkLst>
         <pc:docMk/>
       </pc:docMkLst>
@@ -489,8 +493,8 @@
           <pc:sldMk cId="920116788" sldId="422"/>
         </pc:sldMkLst>
       </pc:sldChg>
-      <pc:sldChg chg="addSp delSp modSp new mod modClrScheme chgLayout">
-        <pc:chgData name="Uwe Ricken" userId="f02567aecbed924b" providerId="LiveId" clId="{E77B627B-1F43-41A9-9F24-D4BB31BF6050}" dt="2025-11-18T12:46:55.691" v="3365" actId="20577"/>
+      <pc:sldChg chg="addSp delSp modSp new mod ord modClrScheme chgLayout">
+        <pc:chgData name="Uwe Ricken" userId="f02567aecbed924b" providerId="LiveId" clId="{E77B627B-1F43-41A9-9F24-D4BB31BF6050}" dt="2025-11-27T07:49:58.884" v="5170"/>
         <pc:sldMkLst>
           <pc:docMk/>
           <pc:sldMk cId="3727805395" sldId="423"/>
@@ -512,12 +516,35 @@
           </ac:graphicFrameMkLst>
         </pc:graphicFrameChg>
       </pc:sldChg>
+      <pc:sldChg chg="delSp add mod">
+        <pc:chgData name="Uwe Ricken" userId="f02567aecbed924b" providerId="LiveId" clId="{E77B627B-1F43-41A9-9F24-D4BB31BF6050}" dt="2025-11-27T10:37:42.339" v="5693" actId="478"/>
+        <pc:sldMkLst>
+          <pc:docMk/>
+          <pc:sldMk cId="216906354" sldId="426"/>
+        </pc:sldMkLst>
+        <pc:picChg chg="del">
+          <ac:chgData name="Uwe Ricken" userId="f02567aecbed924b" providerId="LiveId" clId="{E77B627B-1F43-41A9-9F24-D4BB31BF6050}" dt="2025-11-27T10:37:42.339" v="5693" actId="478"/>
+          <ac:picMkLst>
+            <pc:docMk/>
+            <pc:sldMk cId="216906354" sldId="426"/>
+            <ac:picMk id="4" creationId="{1623D023-1BCC-DD04-88FA-6AEA0309D749}"/>
+          </ac:picMkLst>
+        </pc:picChg>
+      </pc:sldChg>
       <pc:sldChg chg="addSp delSp modSp new mod modClrScheme chgLayout">
-        <pc:chgData name="Uwe Ricken" userId="f02567aecbed924b" providerId="LiveId" clId="{E77B627B-1F43-41A9-9F24-D4BB31BF6050}" dt="2025-11-18T16:05:34.331" v="3744" actId="20577"/>
+        <pc:chgData name="Uwe Ricken" userId="f02567aecbed924b" providerId="LiveId" clId="{E77B627B-1F43-41A9-9F24-D4BB31BF6050}" dt="2025-11-27T08:10:14.845" v="5690" actId="20577"/>
         <pc:sldMkLst>
           <pc:docMk/>
           <pc:sldMk cId="1678448268" sldId="427"/>
         </pc:sldMkLst>
+        <pc:spChg chg="add">
+          <ac:chgData name="Uwe Ricken" userId="f02567aecbed924b" providerId="LiveId" clId="{E77B627B-1F43-41A9-9F24-D4BB31BF6050}" dt="2025-11-27T08:09:41.986" v="5686"/>
+          <ac:spMkLst>
+            <pc:docMk/>
+            <pc:sldMk cId="1678448268" sldId="427"/>
+            <ac:spMk id="2" creationId="{B643665E-0CCE-5C99-CE39-8D3CD5871D49}"/>
+          </ac:spMkLst>
+        </pc:spChg>
         <pc:spChg chg="add mod ord">
           <ac:chgData name="Uwe Ricken" userId="f02567aecbed924b" providerId="LiveId" clId="{E77B627B-1F43-41A9-9F24-D4BB31BF6050}" dt="2025-11-18T15:59:59.690" v="3643" actId="6264"/>
           <ac:spMkLst>
@@ -527,7 +554,7 @@
           </ac:spMkLst>
         </pc:spChg>
         <pc:spChg chg="add mod ord">
-          <ac:chgData name="Uwe Ricken" userId="f02567aecbed924b" providerId="LiveId" clId="{E77B627B-1F43-41A9-9F24-D4BB31BF6050}" dt="2025-11-18T16:05:34.331" v="3744" actId="20577"/>
+          <ac:chgData name="Uwe Ricken" userId="f02567aecbed924b" providerId="LiveId" clId="{E77B627B-1F43-41A9-9F24-D4BB31BF6050}" dt="2025-11-27T08:10:14.845" v="5690" actId="20577"/>
           <ac:spMkLst>
             <pc:docMk/>
             <pc:sldMk cId="1678448268" sldId="427"/>
@@ -759,12 +786,135 @@
           </ac:picMkLst>
         </pc:picChg>
       </pc:sldChg>
-      <pc:sldChg chg="new">
-        <pc:chgData name="Uwe Ricken" userId="f02567aecbed924b" providerId="LiveId" clId="{E77B627B-1F43-41A9-9F24-D4BB31BF6050}" dt="2025-11-22T17:42:53.469" v="5008" actId="680"/>
+      <pc:sldChg chg="new del">
+        <pc:chgData name="Uwe Ricken" userId="f02567aecbed924b" providerId="LiveId" clId="{E77B627B-1F43-41A9-9F24-D4BB31BF6050}" dt="2025-11-27T07:49:44.831" v="5168" actId="2696"/>
         <pc:sldMkLst>
           <pc:docMk/>
           <pc:sldMk cId="2924377165" sldId="436"/>
         </pc:sldMkLst>
+      </pc:sldChg>
+      <pc:sldChg chg="addSp delSp new del mod ord modClrScheme chgLayout">
+        <pc:chgData name="Uwe Ricken" userId="f02567aecbed924b" providerId="LiveId" clId="{E77B627B-1F43-41A9-9F24-D4BB31BF6050}" dt="2025-11-27T10:34:25.048" v="5691" actId="47"/>
+        <pc:sldMkLst>
+          <pc:docMk/>
+          <pc:sldMk cId="369738376" sldId="437"/>
+        </pc:sldMkLst>
+      </pc:sldChg>
+      <pc:sldChg chg="addSp delSp modSp new mod modClrScheme addAnim delAnim modAnim chgLayout">
+        <pc:chgData name="Uwe Ricken" userId="f02567aecbed924b" providerId="LiveId" clId="{E77B627B-1F43-41A9-9F24-D4BB31BF6050}" dt="2025-11-27T06:17:13.361" v="5138" actId="14100"/>
+        <pc:sldMkLst>
+          <pc:docMk/>
+          <pc:sldMk cId="1087205414" sldId="438"/>
+        </pc:sldMkLst>
+        <pc:spChg chg="del mod ord">
+          <ac:chgData name="Uwe Ricken" userId="f02567aecbed924b" providerId="LiveId" clId="{E77B627B-1F43-41A9-9F24-D4BB31BF6050}" dt="2025-11-27T06:10:30.964" v="5111" actId="700"/>
+          <ac:spMkLst>
+            <pc:docMk/>
+            <pc:sldMk cId="1087205414" sldId="438"/>
+            <ac:spMk id="2" creationId="{DE6E6CA6-0F04-0FF9-FF1C-D3445D3E18A2}"/>
+          </ac:spMkLst>
+        </pc:spChg>
+        <pc:spChg chg="del">
+          <ac:chgData name="Uwe Ricken" userId="f02567aecbed924b" providerId="LiveId" clId="{E77B627B-1F43-41A9-9F24-D4BB31BF6050}" dt="2025-11-27T06:10:30.964" v="5111" actId="700"/>
+          <ac:spMkLst>
+            <pc:docMk/>
+            <pc:sldMk cId="1087205414" sldId="438"/>
+            <ac:spMk id="3" creationId="{F1580A73-6A46-7123-278E-1078ED9DAC84}"/>
+          </ac:spMkLst>
+        </pc:spChg>
+        <pc:spChg chg="add mod ord">
+          <ac:chgData name="Uwe Ricken" userId="f02567aecbed924b" providerId="LiveId" clId="{E77B627B-1F43-41A9-9F24-D4BB31BF6050}" dt="2025-11-27T06:11:00.043" v="5113"/>
+          <ac:spMkLst>
+            <pc:docMk/>
+            <pc:sldMk cId="1087205414" sldId="438"/>
+            <ac:spMk id="4" creationId="{4462BD52-CAA9-3B9C-C68C-ED96D326FCED}"/>
+          </ac:spMkLst>
+        </pc:spChg>
+        <pc:picChg chg="add mod">
+          <ac:chgData name="Uwe Ricken" userId="f02567aecbed924b" providerId="LiveId" clId="{E77B627B-1F43-41A9-9F24-D4BB31BF6050}" dt="2025-11-27T06:16:06.558" v="5131" actId="554"/>
+          <ac:picMkLst>
+            <pc:docMk/>
+            <pc:sldMk cId="1087205414" sldId="438"/>
+            <ac:picMk id="6" creationId="{35C40EF7-E4AB-C6F4-7FEC-ABF309954515}"/>
+          </ac:picMkLst>
+        </pc:picChg>
+        <pc:picChg chg="add mod">
+          <ac:chgData name="Uwe Ricken" userId="f02567aecbed924b" providerId="LiveId" clId="{E77B627B-1F43-41A9-9F24-D4BB31BF6050}" dt="2025-11-27T06:17:13.361" v="5138" actId="14100"/>
+          <ac:picMkLst>
+            <pc:docMk/>
+            <pc:sldMk cId="1087205414" sldId="438"/>
+            <ac:picMk id="8" creationId="{152C85D4-7375-C582-B3E4-96E46FC025AF}"/>
+          </ac:picMkLst>
+        </pc:picChg>
+        <pc:picChg chg="add mod">
+          <ac:chgData name="Uwe Ricken" userId="f02567aecbed924b" providerId="LiveId" clId="{E77B627B-1F43-41A9-9F24-D4BB31BF6050}" dt="2025-11-27T06:16:49.165" v="5134" actId="14100"/>
+          <ac:picMkLst>
+            <pc:docMk/>
+            <pc:sldMk cId="1087205414" sldId="438"/>
+            <ac:picMk id="10" creationId="{DC0361DE-C6B4-D23F-7FBB-1BF6946D89E0}"/>
+          </ac:picMkLst>
+        </pc:picChg>
+      </pc:sldChg>
+      <pc:sldChg chg="modSp add mod">
+        <pc:chgData name="Uwe Ricken" userId="f02567aecbed924b" providerId="LiveId" clId="{E77B627B-1F43-41A9-9F24-D4BB31BF6050}" dt="2025-11-27T06:18:23.345" v="5165" actId="20577"/>
+        <pc:sldMkLst>
+          <pc:docMk/>
+          <pc:sldMk cId="811244060" sldId="439"/>
+        </pc:sldMkLst>
+        <pc:spChg chg="mod">
+          <ac:chgData name="Uwe Ricken" userId="f02567aecbed924b" providerId="LiveId" clId="{E77B627B-1F43-41A9-9F24-D4BB31BF6050}" dt="2025-11-27T06:18:23.345" v="5165" actId="20577"/>
+          <ac:spMkLst>
+            <pc:docMk/>
+            <pc:sldMk cId="811244060" sldId="439"/>
+            <ac:spMk id="6" creationId="{DD63B2ED-6C91-56DE-537B-00DB65F2A86C}"/>
+          </ac:spMkLst>
+        </pc:spChg>
+      </pc:sldChg>
+      <pc:sldChg chg="modSp new mod addAnim delAnim modAnim">
+        <pc:chgData name="Uwe Ricken" userId="f02567aecbed924b" providerId="LiveId" clId="{E77B627B-1F43-41A9-9F24-D4BB31BF6050}" dt="2025-11-27T08:07:01.785" v="5676" actId="113"/>
+        <pc:sldMkLst>
+          <pc:docMk/>
+          <pc:sldMk cId="1311797304" sldId="440"/>
+        </pc:sldMkLst>
+        <pc:spChg chg="mod">
+          <ac:chgData name="Uwe Ricken" userId="f02567aecbed924b" providerId="LiveId" clId="{E77B627B-1F43-41A9-9F24-D4BB31BF6050}" dt="2025-11-27T07:59:57.771" v="5443" actId="20577"/>
+          <ac:spMkLst>
+            <pc:docMk/>
+            <pc:sldMk cId="1311797304" sldId="440"/>
+            <ac:spMk id="2" creationId="{9590CDAB-5059-2BDD-E037-1EAA91E2E3F9}"/>
+          </ac:spMkLst>
+        </pc:spChg>
+        <pc:spChg chg="mod">
+          <ac:chgData name="Uwe Ricken" userId="f02567aecbed924b" providerId="LiveId" clId="{E77B627B-1F43-41A9-9F24-D4BB31BF6050}" dt="2025-11-27T08:07:01.785" v="5676" actId="113"/>
+          <ac:spMkLst>
+            <pc:docMk/>
+            <pc:sldMk cId="1311797304" sldId="440"/>
+            <ac:spMk id="3" creationId="{299A1D5E-7DFC-DB8A-59AF-6BFB4D80C8CA}"/>
+          </ac:spMkLst>
+        </pc:spChg>
+      </pc:sldChg>
+      <pc:sldChg chg="modSp new mod addAnim delAnim modAnim">
+        <pc:chgData name="Uwe Ricken" userId="f02567aecbed924b" providerId="LiveId" clId="{E77B627B-1F43-41A9-9F24-D4BB31BF6050}" dt="2025-11-27T08:07:53.349" v="5682" actId="207"/>
+        <pc:sldMkLst>
+          <pc:docMk/>
+          <pc:sldMk cId="1197025866" sldId="441"/>
+        </pc:sldMkLst>
+        <pc:spChg chg="mod">
+          <ac:chgData name="Uwe Ricken" userId="f02567aecbed924b" providerId="LiveId" clId="{E77B627B-1F43-41A9-9F24-D4BB31BF6050}" dt="2025-11-27T08:00:08.090" v="5466" actId="20577"/>
+          <ac:spMkLst>
+            <pc:docMk/>
+            <pc:sldMk cId="1197025866" sldId="441"/>
+            <ac:spMk id="2" creationId="{D75EE4B2-9928-8838-B018-3D4DD8127569}"/>
+          </ac:spMkLst>
+        </pc:spChg>
+        <pc:spChg chg="mod">
+          <ac:chgData name="Uwe Ricken" userId="f02567aecbed924b" providerId="LiveId" clId="{E77B627B-1F43-41A9-9F24-D4BB31BF6050}" dt="2025-11-27T08:07:53.349" v="5682" actId="207"/>
+          <ac:spMkLst>
+            <pc:docMk/>
+            <pc:sldMk cId="1197025866" sldId="441"/>
+            <ac:spMk id="3" creationId="{7BAA677E-42B7-2E1E-B748-D9648204214C}"/>
+          </ac:spMkLst>
+        </pc:spChg>
       </pc:sldChg>
       <pc:sldMasterChg chg="mod modSldLayout">
         <pc:chgData name="Uwe Ricken" userId="f02567aecbed924b" providerId="LiveId" clId="{E77B627B-1F43-41A9-9F24-D4BB31BF6050}" dt="2025-10-30T14:07:27.447" v="1678" actId="113"/>
@@ -6475,280 +6625,6 @@
           <p:cNvPr id="2" name="Titel 1">
             <a:extLst>
               <a:ext uri="{FF2B5EF4-FFF2-40B4-BE49-F238E27FC236}">
-                <a16:creationId xmlns:a16="http://schemas.microsoft.com/office/drawing/2014/main" id="{37AF0B7A-0D94-9372-9427-CDA05F313DA1}"/>
-              </a:ext>
-            </a:extLst>
-          </p:cNvPr>
-          <p:cNvSpPr>
-            <a:spLocks noGrp="1"/>
-          </p:cNvSpPr>
-          <p:nvPr>
-            <p:ph type="title"/>
-          </p:nvPr>
-        </p:nvSpPr>
-        <p:spPr/>
-        <p:txBody>
-          <a:bodyPr/>
-          <a:lstStyle/>
-          <a:p>
-            <a:endParaRPr lang="en-US"/>
-          </a:p>
-        </p:txBody>
-      </p:sp>
-      <p:sp>
-        <p:nvSpPr>
-          <p:cNvPr id="3" name="Inhaltsplatzhalter 2">
-            <a:extLst>
-              <a:ext uri="{FF2B5EF4-FFF2-40B4-BE49-F238E27FC236}">
-                <a16:creationId xmlns:a16="http://schemas.microsoft.com/office/drawing/2014/main" id="{D346DCF5-784F-4B4B-AA8E-A8E5645BF6D8}"/>
-              </a:ext>
-            </a:extLst>
-          </p:cNvPr>
-          <p:cNvSpPr>
-            <a:spLocks noGrp="1"/>
-          </p:cNvSpPr>
-          <p:nvPr>
-            <p:ph sz="half" idx="1"/>
-          </p:nvPr>
-        </p:nvSpPr>
-        <p:spPr/>
-        <p:txBody>
-          <a:bodyPr/>
-          <a:lstStyle/>
-          <a:p>
-            <a:endParaRPr lang="en-US"/>
-          </a:p>
-        </p:txBody>
-      </p:sp>
-      <p:sp>
-        <p:nvSpPr>
-          <p:cNvPr id="4" name="Inhaltsplatzhalter 3">
-            <a:extLst>
-              <a:ext uri="{FF2B5EF4-FFF2-40B4-BE49-F238E27FC236}">
-                <a16:creationId xmlns:a16="http://schemas.microsoft.com/office/drawing/2014/main" id="{3BB50098-133A-C63F-77FE-10928152A436}"/>
-              </a:ext>
-            </a:extLst>
-          </p:cNvPr>
-          <p:cNvSpPr>
-            <a:spLocks noGrp="1"/>
-          </p:cNvSpPr>
-          <p:nvPr>
-            <p:ph sz="half" idx="2"/>
-          </p:nvPr>
-        </p:nvSpPr>
-        <p:spPr/>
-        <p:txBody>
-          <a:bodyPr/>
-          <a:lstStyle/>
-          <a:p>
-            <a:endParaRPr lang="en-US"/>
-          </a:p>
-        </p:txBody>
-      </p:sp>
-    </p:spTree>
-    <p:extLst>
-      <p:ext uri="{BB962C8B-B14F-4D97-AF65-F5344CB8AC3E}">
-        <p14:creationId xmlns:p14="http://schemas.microsoft.com/office/powerpoint/2010/main" val="2924377165"/>
-      </p:ext>
-    </p:extLst>
-  </p:cSld>
-  <p:clrMapOvr>
-    <a:masterClrMapping/>
-  </p:clrMapOvr>
-</p:sld>
-</file>
-
-<file path=ppt/slides/slide16.xml><?xml version="1.0" encoding="utf-8"?>
-<p:sld xmlns:a="http://schemas.openxmlformats.org/drawingml/2006/main" xmlns:r="http://schemas.openxmlformats.org/officeDocument/2006/relationships" xmlns:p="http://schemas.openxmlformats.org/presentationml/2006/main">
-  <p:cSld>
-    <p:spTree>
-      <p:nvGrpSpPr>
-        <p:cNvPr id="1" name=""/>
-        <p:cNvGrpSpPr/>
-        <p:nvPr/>
-      </p:nvGrpSpPr>
-      <p:grpSpPr>
-        <a:xfrm>
-          <a:off x="0" y="0"/>
-          <a:ext cx="0" cy="0"/>
-          <a:chOff x="0" y="0"/>
-          <a:chExt cx="0" cy="0"/>
-        </a:xfrm>
-      </p:grpSpPr>
-      <p:sp>
-        <p:nvSpPr>
-          <p:cNvPr id="2" name="Titel 1">
-            <a:extLst>
-              <a:ext uri="{FF2B5EF4-FFF2-40B4-BE49-F238E27FC236}">
-                <a16:creationId xmlns:a16="http://schemas.microsoft.com/office/drawing/2014/main" id="{7B025324-E6FF-E14E-7B36-8C9215F06421}"/>
-              </a:ext>
-            </a:extLst>
-          </p:cNvPr>
-          <p:cNvSpPr>
-            <a:spLocks noGrp="1"/>
-          </p:cNvSpPr>
-          <p:nvPr>
-            <p:ph type="title"/>
-          </p:nvPr>
-        </p:nvSpPr>
-        <p:spPr/>
-        <p:txBody>
-          <a:bodyPr/>
-          <a:lstStyle/>
-          <a:p>
-            <a:r>
-              <a:rPr lang="en-US" dirty="0"/>
-              <a:t>What is a CTE (Common Table Expression)</a:t>
-            </a:r>
-          </a:p>
-        </p:txBody>
-      </p:sp>
-      <p:sp>
-        <p:nvSpPr>
-          <p:cNvPr id="3" name="Inhaltsplatzhalter 2">
-            <a:extLst>
-              <a:ext uri="{FF2B5EF4-FFF2-40B4-BE49-F238E27FC236}">
-                <a16:creationId xmlns:a16="http://schemas.microsoft.com/office/drawing/2014/main" id="{832E0063-724B-3C66-A1DB-5BE8E446017F}"/>
-              </a:ext>
-            </a:extLst>
-          </p:cNvPr>
-          <p:cNvSpPr>
-            <a:spLocks noGrp="1"/>
-          </p:cNvSpPr>
-          <p:nvPr>
-            <p:ph idx="1"/>
-          </p:nvPr>
-        </p:nvSpPr>
-        <p:spPr/>
-        <p:txBody>
-          <a:bodyPr/>
-          <a:lstStyle/>
-          <a:p>
-            <a:r>
-              <a:rPr lang="en-US" dirty="0"/>
-              <a:t>CTE stands for Common Table Expression</a:t>
-            </a:r>
-          </a:p>
-          <a:p>
-            <a:r>
-              <a:rPr lang="en-US" dirty="0"/>
-              <a:t>Introduced in SQL Server 2005</a:t>
-            </a:r>
-          </a:p>
-          <a:p>
-            <a:r>
-              <a:rPr lang="en-US" dirty="0"/>
-              <a:t>Acts as a </a:t>
-            </a:r>
-            <a:r>
-              <a:rPr lang="en-US" b="1" dirty="0"/>
-              <a:t>temporary </a:t>
-            </a:r>
-            <a:r>
-              <a:rPr lang="en-US" dirty="0"/>
-              <a:t>named </a:t>
-            </a:r>
-            <a:r>
-              <a:rPr lang="en-US" b="1" dirty="0"/>
-              <a:t>result </a:t>
-            </a:r>
-            <a:r>
-              <a:rPr lang="en-US" b="1" dirty="0">
-                <a:solidFill>
-                  <a:srgbClr val="FF0000"/>
-                </a:solidFill>
-              </a:rPr>
-              <a:t>set</a:t>
-            </a:r>
-            <a:r>
-              <a:rPr lang="en-US" dirty="0"/>
-              <a:t>!</a:t>
-            </a:r>
-          </a:p>
-          <a:p>
-            <a:r>
-              <a:rPr lang="en-US" dirty="0"/>
-              <a:t>Improves readability and modularity of complex queries</a:t>
-            </a:r>
-          </a:p>
-          <a:p>
-            <a:r>
-              <a:rPr lang="en-US" dirty="0"/>
-              <a:t>Can be recursive or non-recursive</a:t>
-            </a:r>
-          </a:p>
-          <a:p>
-            <a:r>
-              <a:rPr lang="en-US" dirty="0"/>
-              <a:t>Often used for</a:t>
-            </a:r>
-          </a:p>
-          <a:p>
-            <a:pPr lvl="1"/>
-            <a:r>
-              <a:rPr lang="en-US" dirty="0"/>
-              <a:t>Simplifying nested queries</a:t>
-            </a:r>
-          </a:p>
-          <a:p>
-            <a:pPr lvl="1"/>
-            <a:r>
-              <a:rPr lang="en-US" dirty="0"/>
-              <a:t>Breaking down logic into </a:t>
-            </a:r>
-            <a:r>
-              <a:rPr lang="en-US" b="1" dirty="0"/>
-              <a:t>logical</a:t>
-            </a:r>
-            <a:r>
-              <a:rPr lang="en-US" dirty="0"/>
-              <a:t> steps</a:t>
-            </a:r>
-          </a:p>
-          <a:p>
-            <a:pPr lvl="1"/>
-            <a:r>
-              <a:rPr lang="en-US" dirty="0"/>
-              <a:t>Because of recursion it is often used for hierarchical data</a:t>
-            </a:r>
-          </a:p>
-        </p:txBody>
-      </p:sp>
-    </p:spTree>
-    <p:extLst>
-      <p:ext uri="{BB962C8B-B14F-4D97-AF65-F5344CB8AC3E}">
-        <p14:creationId xmlns:p14="http://schemas.microsoft.com/office/powerpoint/2010/main" val="2837694704"/>
-      </p:ext>
-    </p:extLst>
-  </p:cSld>
-  <p:clrMapOvr>
-    <a:masterClrMapping/>
-  </p:clrMapOvr>
-</p:sld>
-</file>
-
-<file path=ppt/slides/slide17.xml><?xml version="1.0" encoding="utf-8"?>
-<p:sld xmlns:a="http://schemas.openxmlformats.org/drawingml/2006/main" xmlns:r="http://schemas.openxmlformats.org/officeDocument/2006/relationships" xmlns:p="http://schemas.openxmlformats.org/presentationml/2006/main">
-  <p:cSld>
-    <p:spTree>
-      <p:nvGrpSpPr>
-        <p:cNvPr id="1" name=""/>
-        <p:cNvGrpSpPr/>
-        <p:nvPr/>
-      </p:nvGrpSpPr>
-      <p:grpSpPr>
-        <a:xfrm>
-          <a:off x="0" y="0"/>
-          <a:ext cx="0" cy="0"/>
-          <a:chOff x="0" y="0"/>
-          <a:chExt cx="0" cy="0"/>
-        </a:xfrm>
-      </p:grpSpPr>
-      <p:sp>
-        <p:nvSpPr>
-          <p:cNvPr id="2" name="Titel 1">
-            <a:extLst>
-              <a:ext uri="{FF2B5EF4-FFF2-40B4-BE49-F238E27FC236}">
                 <a16:creationId xmlns:a16="http://schemas.microsoft.com/office/drawing/2014/main" id="{E4BA750D-A303-034C-74A2-254A54DAB82B}"/>
               </a:ext>
             </a:extLst>
@@ -10978,7 +10854,4116 @@
 </p:sld>
 </file>
 
+<file path=ppt/slides/slide16.xml><?xml version="1.0" encoding="utf-8"?>
+<p:sld xmlns:a="http://schemas.openxmlformats.org/drawingml/2006/main" xmlns:r="http://schemas.openxmlformats.org/officeDocument/2006/relationships" xmlns:p="http://schemas.openxmlformats.org/presentationml/2006/main">
+  <p:cSld>
+    <p:spTree>
+      <p:nvGrpSpPr>
+        <p:cNvPr id="1" name=""/>
+        <p:cNvGrpSpPr/>
+        <p:nvPr/>
+      </p:nvGrpSpPr>
+      <p:grpSpPr>
+        <a:xfrm>
+          <a:off x="0" y="0"/>
+          <a:ext cx="0" cy="0"/>
+          <a:chOff x="0" y="0"/>
+          <a:chExt cx="0" cy="0"/>
+        </a:xfrm>
+      </p:grpSpPr>
+      <p:sp>
+        <p:nvSpPr>
+          <p:cNvPr id="2" name="Titel 1">
+            <a:extLst>
+              <a:ext uri="{FF2B5EF4-FFF2-40B4-BE49-F238E27FC236}">
+                <a16:creationId xmlns:a16="http://schemas.microsoft.com/office/drawing/2014/main" id="{7B025324-E6FF-E14E-7B36-8C9215F06421}"/>
+              </a:ext>
+            </a:extLst>
+          </p:cNvPr>
+          <p:cNvSpPr>
+            <a:spLocks noGrp="1"/>
+          </p:cNvSpPr>
+          <p:nvPr>
+            <p:ph type="title"/>
+          </p:nvPr>
+        </p:nvSpPr>
+        <p:spPr/>
+        <p:txBody>
+          <a:bodyPr/>
+          <a:lstStyle/>
+          <a:p>
+            <a:r>
+              <a:rPr lang="en-US" dirty="0"/>
+              <a:t>What is a CTE (Common Table Expression)</a:t>
+            </a:r>
+          </a:p>
+        </p:txBody>
+      </p:sp>
+      <p:sp>
+        <p:nvSpPr>
+          <p:cNvPr id="3" name="Inhaltsplatzhalter 2">
+            <a:extLst>
+              <a:ext uri="{FF2B5EF4-FFF2-40B4-BE49-F238E27FC236}">
+                <a16:creationId xmlns:a16="http://schemas.microsoft.com/office/drawing/2014/main" id="{832E0063-724B-3C66-A1DB-5BE8E446017F}"/>
+              </a:ext>
+            </a:extLst>
+          </p:cNvPr>
+          <p:cNvSpPr>
+            <a:spLocks noGrp="1"/>
+          </p:cNvSpPr>
+          <p:nvPr>
+            <p:ph idx="1"/>
+          </p:nvPr>
+        </p:nvSpPr>
+        <p:spPr/>
+        <p:txBody>
+          <a:bodyPr/>
+          <a:lstStyle/>
+          <a:p>
+            <a:r>
+              <a:rPr lang="en-US" dirty="0"/>
+              <a:t>CTE stands for Common Table Expression</a:t>
+            </a:r>
+          </a:p>
+          <a:p>
+            <a:r>
+              <a:rPr lang="en-US" dirty="0"/>
+              <a:t>Introduced in SQL Server 2005</a:t>
+            </a:r>
+          </a:p>
+          <a:p>
+            <a:r>
+              <a:rPr lang="en-US" dirty="0"/>
+              <a:t>Acts as a </a:t>
+            </a:r>
+            <a:r>
+              <a:rPr lang="en-US" b="1" dirty="0"/>
+              <a:t>temporary </a:t>
+            </a:r>
+            <a:r>
+              <a:rPr lang="en-US" dirty="0"/>
+              <a:t>named </a:t>
+            </a:r>
+            <a:r>
+              <a:rPr lang="en-US" b="1" dirty="0"/>
+              <a:t>result </a:t>
+            </a:r>
+            <a:r>
+              <a:rPr lang="en-US" b="1" dirty="0">
+                <a:solidFill>
+                  <a:srgbClr val="FF0000"/>
+                </a:solidFill>
+              </a:rPr>
+              <a:t>set</a:t>
+            </a:r>
+            <a:r>
+              <a:rPr lang="en-US" dirty="0"/>
+              <a:t>!</a:t>
+            </a:r>
+          </a:p>
+          <a:p>
+            <a:r>
+              <a:rPr lang="en-US" dirty="0"/>
+              <a:t>Improves readability and modularity of complex queries</a:t>
+            </a:r>
+          </a:p>
+          <a:p>
+            <a:r>
+              <a:rPr lang="en-US" dirty="0"/>
+              <a:t>Can be recursive or non-recursive</a:t>
+            </a:r>
+          </a:p>
+          <a:p>
+            <a:r>
+              <a:rPr lang="en-US" dirty="0"/>
+              <a:t>Often used for</a:t>
+            </a:r>
+          </a:p>
+          <a:p>
+            <a:pPr lvl="1"/>
+            <a:r>
+              <a:rPr lang="en-US" dirty="0"/>
+              <a:t>Simplifying nested queries</a:t>
+            </a:r>
+          </a:p>
+          <a:p>
+            <a:pPr lvl="1"/>
+            <a:r>
+              <a:rPr lang="en-US" dirty="0"/>
+              <a:t>Breaking down logic into </a:t>
+            </a:r>
+            <a:r>
+              <a:rPr lang="en-US" b="1" dirty="0"/>
+              <a:t>logical</a:t>
+            </a:r>
+            <a:r>
+              <a:rPr lang="en-US" dirty="0"/>
+              <a:t> steps</a:t>
+            </a:r>
+          </a:p>
+          <a:p>
+            <a:pPr lvl="1"/>
+            <a:r>
+              <a:rPr lang="en-US" dirty="0"/>
+              <a:t>Because of recursion it is often used for hierarchical data</a:t>
+            </a:r>
+          </a:p>
+        </p:txBody>
+      </p:sp>
+    </p:spTree>
+    <p:extLst>
+      <p:ext uri="{BB962C8B-B14F-4D97-AF65-F5344CB8AC3E}">
+        <p14:creationId xmlns:p14="http://schemas.microsoft.com/office/powerpoint/2010/main" val="2837694704"/>
+      </p:ext>
+    </p:extLst>
+  </p:cSld>
+  <p:clrMapOvr>
+    <a:masterClrMapping/>
+  </p:clrMapOvr>
+</p:sld>
+</file>
+
+<file path=ppt/slides/slide17.xml><?xml version="1.0" encoding="utf-8"?>
+<p:sld xmlns:a="http://schemas.openxmlformats.org/drawingml/2006/main" xmlns:r="http://schemas.openxmlformats.org/officeDocument/2006/relationships" xmlns:p="http://schemas.openxmlformats.org/presentationml/2006/main">
+  <p:cSld>
+    <p:spTree>
+      <p:nvGrpSpPr>
+        <p:cNvPr id="1" name=""/>
+        <p:cNvGrpSpPr/>
+        <p:nvPr/>
+      </p:nvGrpSpPr>
+      <p:grpSpPr>
+        <a:xfrm>
+          <a:off x="0" y="0"/>
+          <a:ext cx="0" cy="0"/>
+          <a:chOff x="0" y="0"/>
+          <a:chExt cx="0" cy="0"/>
+        </a:xfrm>
+      </p:grpSpPr>
+      <p:sp>
+        <p:nvSpPr>
+          <p:cNvPr id="2" name="Titel 1">
+            <a:extLst>
+              <a:ext uri="{FF2B5EF4-FFF2-40B4-BE49-F238E27FC236}">
+                <a16:creationId xmlns:a16="http://schemas.microsoft.com/office/drawing/2014/main" id="{9590CDAB-5059-2BDD-E037-1EAA91E2E3F9}"/>
+              </a:ext>
+            </a:extLst>
+          </p:cNvPr>
+          <p:cNvSpPr>
+            <a:spLocks noGrp="1"/>
+          </p:cNvSpPr>
+          <p:nvPr>
+            <p:ph type="title"/>
+          </p:nvPr>
+        </p:nvSpPr>
+        <p:spPr/>
+        <p:txBody>
+          <a:bodyPr/>
+          <a:lstStyle/>
+          <a:p>
+            <a:r>
+              <a:rPr lang="en-US" dirty="0"/>
+              <a:t>How regular CTEs work</a:t>
+            </a:r>
+          </a:p>
+        </p:txBody>
+      </p:sp>
+      <p:sp>
+        <p:nvSpPr>
+          <p:cNvPr id="3" name="Inhaltsplatzhalter 2">
+            <a:extLst>
+              <a:ext uri="{FF2B5EF4-FFF2-40B4-BE49-F238E27FC236}">
+                <a16:creationId xmlns:a16="http://schemas.microsoft.com/office/drawing/2014/main" id="{299A1D5E-7DFC-DB8A-59AF-6BFB4D80C8CA}"/>
+              </a:ext>
+            </a:extLst>
+          </p:cNvPr>
+          <p:cNvSpPr>
+            <a:spLocks noGrp="1"/>
+          </p:cNvSpPr>
+          <p:nvPr>
+            <p:ph idx="1"/>
+          </p:nvPr>
+        </p:nvSpPr>
+        <p:spPr/>
+        <p:txBody>
+          <a:bodyPr>
+            <a:normAutofit/>
+          </a:bodyPr>
+          <a:lstStyle/>
+          <a:p>
+            <a:pPr marL="0" indent="0">
+              <a:buNone/>
+            </a:pPr>
+            <a:r>
+              <a:rPr lang="en-US" sz="1400" dirty="0">
+                <a:solidFill>
+                  <a:srgbClr val="808080"/>
+                </a:solidFill>
+                <a:highlight>
+                  <a:srgbClr val="FFFFFF"/>
+                </a:highlight>
+                <a:latin typeface="Cascadia Mono" panose="020B0609020000020004" pitchFamily="49" charset="0"/>
+              </a:rPr>
+              <a:t>;</a:t>
+            </a:r>
+            <a:r>
+              <a:rPr lang="en-US" sz="1400" dirty="0">
+                <a:solidFill>
+                  <a:srgbClr val="0000FF"/>
+                </a:solidFill>
+                <a:highlight>
+                  <a:srgbClr val="FFFFFF"/>
+                </a:highlight>
+                <a:latin typeface="Cascadia Mono" panose="020B0609020000020004" pitchFamily="49" charset="0"/>
+              </a:rPr>
+              <a:t>WITH</a:t>
+            </a:r>
+            <a:r>
+              <a:rPr lang="en-US" sz="1400" dirty="0">
+                <a:solidFill>
+                  <a:srgbClr val="000000"/>
+                </a:solidFill>
+                <a:highlight>
+                  <a:srgbClr val="FFFFFF"/>
+                </a:highlight>
+                <a:latin typeface="Cascadia Mono" panose="020B0609020000020004" pitchFamily="49" charset="0"/>
+              </a:rPr>
+              <a:t> o </a:t>
+            </a:r>
+            <a:r>
+              <a:rPr lang="en-US" sz="1400" b="1" dirty="0">
+                <a:solidFill>
+                  <a:schemeClr val="accent6">
+                    <a:lumMod val="75000"/>
+                  </a:schemeClr>
+                </a:solidFill>
+                <a:highlight>
+                  <a:srgbClr val="FFFFFF"/>
+                </a:highlight>
+                <a:latin typeface="Cascadia Mono" panose="020B0609020000020004" pitchFamily="49" charset="0"/>
+              </a:rPr>
+              <a:t>/* beginning the definition with the name of the CTE */</a:t>
+            </a:r>
+          </a:p>
+          <a:p>
+            <a:pPr marL="0" indent="0">
+              <a:buNone/>
+            </a:pPr>
+            <a:r>
+              <a:rPr lang="en-US" sz="1400" dirty="0">
+                <a:solidFill>
+                  <a:srgbClr val="0000FF"/>
+                </a:solidFill>
+                <a:highlight>
+                  <a:srgbClr val="FFFFFF"/>
+                </a:highlight>
+                <a:latin typeface="Cascadia Mono" panose="020B0609020000020004" pitchFamily="49" charset="0"/>
+              </a:rPr>
+              <a:t>AS</a:t>
+            </a:r>
+            <a:endParaRPr lang="en-US" sz="1400" dirty="0">
+              <a:solidFill>
+                <a:srgbClr val="000000"/>
+              </a:solidFill>
+              <a:highlight>
+                <a:srgbClr val="FFFFFF"/>
+              </a:highlight>
+              <a:latin typeface="Cascadia Mono" panose="020B0609020000020004" pitchFamily="49" charset="0"/>
+            </a:endParaRPr>
+          </a:p>
+          <a:p>
+            <a:pPr marL="0" indent="0">
+              <a:buNone/>
+            </a:pPr>
+            <a:r>
+              <a:rPr lang="en-US" sz="1400" dirty="0">
+                <a:solidFill>
+                  <a:srgbClr val="808080"/>
+                </a:solidFill>
+                <a:highlight>
+                  <a:srgbClr val="FFFFFF"/>
+                </a:highlight>
+                <a:latin typeface="Cascadia Mono" panose="020B0609020000020004" pitchFamily="49" charset="0"/>
+              </a:rPr>
+              <a:t>(</a:t>
+            </a:r>
+            <a:endParaRPr lang="en-US" sz="1400" dirty="0">
+              <a:solidFill>
+                <a:srgbClr val="000000"/>
+              </a:solidFill>
+              <a:highlight>
+                <a:srgbClr val="FFFFFF"/>
+              </a:highlight>
+              <a:latin typeface="Cascadia Mono" panose="020B0609020000020004" pitchFamily="49" charset="0"/>
+            </a:endParaRPr>
+          </a:p>
+          <a:p>
+            <a:pPr marL="0" indent="0">
+              <a:buNone/>
+            </a:pPr>
+            <a:r>
+              <a:rPr lang="en-US" sz="1400" dirty="0">
+                <a:solidFill>
+                  <a:srgbClr val="0000FF"/>
+                </a:solidFill>
+                <a:highlight>
+                  <a:srgbClr val="FFFFFF"/>
+                </a:highlight>
+                <a:latin typeface="Cascadia Mono" panose="020B0609020000020004" pitchFamily="49" charset="0"/>
+              </a:rPr>
+              <a:t>    SELECT </a:t>
+            </a:r>
+            <a:r>
+              <a:rPr lang="en-US" sz="1400" dirty="0" err="1">
+                <a:solidFill>
+                  <a:srgbClr val="000000"/>
+                </a:solidFill>
+                <a:highlight>
+                  <a:srgbClr val="FFFFFF"/>
+                </a:highlight>
+                <a:latin typeface="Cascadia Mono" panose="020B0609020000020004" pitchFamily="49" charset="0"/>
+              </a:rPr>
+              <a:t>l</a:t>
+            </a:r>
+            <a:r>
+              <a:rPr lang="en-US" sz="1400" dirty="0" err="1">
+                <a:solidFill>
+                  <a:srgbClr val="808080"/>
+                </a:solidFill>
+                <a:highlight>
+                  <a:srgbClr val="FFFFFF"/>
+                </a:highlight>
+                <a:latin typeface="Cascadia Mono" panose="020B0609020000020004" pitchFamily="49" charset="0"/>
+              </a:rPr>
+              <a:t>.</a:t>
+            </a:r>
+            <a:r>
+              <a:rPr lang="en-US" sz="1400" dirty="0" err="1">
+                <a:solidFill>
+                  <a:srgbClr val="000000"/>
+                </a:solidFill>
+                <a:highlight>
+                  <a:srgbClr val="FFFFFF"/>
+                </a:highlight>
+                <a:latin typeface="Cascadia Mono" panose="020B0609020000020004" pitchFamily="49" charset="0"/>
+              </a:rPr>
+              <a:t>l_partkey</a:t>
+            </a:r>
+            <a:endParaRPr lang="en-US" sz="1400" dirty="0">
+              <a:solidFill>
+                <a:srgbClr val="000000"/>
+              </a:solidFill>
+              <a:highlight>
+                <a:srgbClr val="FFFFFF"/>
+              </a:highlight>
+              <a:latin typeface="Cascadia Mono" panose="020B0609020000020004" pitchFamily="49" charset="0"/>
+            </a:endParaRPr>
+          </a:p>
+          <a:p>
+            <a:pPr marL="0" indent="0">
+              <a:buNone/>
+            </a:pPr>
+            <a:r>
+              <a:rPr lang="en-US" sz="1400" dirty="0">
+                <a:solidFill>
+                  <a:srgbClr val="0000FF"/>
+                </a:solidFill>
+                <a:highlight>
+                  <a:srgbClr val="FFFFFF"/>
+                </a:highlight>
+                <a:latin typeface="Cascadia Mono" panose="020B0609020000020004" pitchFamily="49" charset="0"/>
+              </a:rPr>
+              <a:t>    FROM   </a:t>
+            </a:r>
+            <a:r>
+              <a:rPr lang="en-US" sz="1400" dirty="0" err="1">
+                <a:solidFill>
+                  <a:srgbClr val="000000"/>
+                </a:solidFill>
+                <a:highlight>
+                  <a:srgbClr val="FFFFFF"/>
+                </a:highlight>
+                <a:latin typeface="Cascadia Mono" panose="020B0609020000020004" pitchFamily="49" charset="0"/>
+              </a:rPr>
+              <a:t>dbo</a:t>
+            </a:r>
+            <a:r>
+              <a:rPr lang="en-US" sz="1400" dirty="0" err="1">
+                <a:solidFill>
+                  <a:srgbClr val="808080"/>
+                </a:solidFill>
+                <a:highlight>
+                  <a:srgbClr val="FFFFFF"/>
+                </a:highlight>
+                <a:latin typeface="Cascadia Mono" panose="020B0609020000020004" pitchFamily="49" charset="0"/>
+              </a:rPr>
+              <a:t>.</a:t>
+            </a:r>
+            <a:r>
+              <a:rPr lang="en-US" sz="1400" dirty="0" err="1">
+                <a:solidFill>
+                  <a:srgbClr val="000000"/>
+                </a:solidFill>
+                <a:highlight>
+                  <a:srgbClr val="FFFFFF"/>
+                </a:highlight>
+                <a:latin typeface="Cascadia Mono" panose="020B0609020000020004" pitchFamily="49" charset="0"/>
+              </a:rPr>
+              <a:t>orders</a:t>
+            </a:r>
+            <a:r>
+              <a:rPr lang="en-US" sz="1400" dirty="0">
+                <a:solidFill>
+                  <a:srgbClr val="000000"/>
+                </a:solidFill>
+                <a:highlight>
+                  <a:srgbClr val="FFFFFF"/>
+                </a:highlight>
+                <a:latin typeface="Cascadia Mono" panose="020B0609020000020004" pitchFamily="49" charset="0"/>
+              </a:rPr>
+              <a:t> </a:t>
+            </a:r>
+            <a:r>
+              <a:rPr lang="en-US" sz="1400" dirty="0">
+                <a:solidFill>
+                  <a:srgbClr val="0000FF"/>
+                </a:solidFill>
+                <a:highlight>
+                  <a:srgbClr val="FFFFFF"/>
+                </a:highlight>
+                <a:latin typeface="Cascadia Mono" panose="020B0609020000020004" pitchFamily="49" charset="0"/>
+              </a:rPr>
+              <a:t>AS</a:t>
+            </a:r>
+            <a:r>
+              <a:rPr lang="en-US" sz="1400" dirty="0">
+                <a:solidFill>
+                  <a:srgbClr val="000000"/>
+                </a:solidFill>
+                <a:highlight>
+                  <a:srgbClr val="FFFFFF"/>
+                </a:highlight>
+                <a:latin typeface="Cascadia Mono" panose="020B0609020000020004" pitchFamily="49" charset="0"/>
+              </a:rPr>
+              <a:t> o</a:t>
+            </a:r>
+          </a:p>
+          <a:p>
+            <a:pPr marL="0" indent="0">
+              <a:buNone/>
+            </a:pPr>
+            <a:r>
+              <a:rPr lang="en-US" sz="1400" dirty="0">
+                <a:solidFill>
+                  <a:srgbClr val="808080"/>
+                </a:solidFill>
+                <a:highlight>
+                  <a:srgbClr val="FFFFFF"/>
+                </a:highlight>
+                <a:latin typeface="Cascadia Mono" panose="020B0609020000020004" pitchFamily="49" charset="0"/>
+              </a:rPr>
+              <a:t>           INNER</a:t>
+            </a:r>
+            <a:r>
+              <a:rPr lang="en-US" sz="1400" dirty="0">
+                <a:solidFill>
+                  <a:srgbClr val="000000"/>
+                </a:solidFill>
+                <a:highlight>
+                  <a:srgbClr val="FFFFFF"/>
+                </a:highlight>
+                <a:latin typeface="Cascadia Mono" panose="020B0609020000020004" pitchFamily="49" charset="0"/>
+              </a:rPr>
+              <a:t> </a:t>
+            </a:r>
+            <a:r>
+              <a:rPr lang="en-US" sz="1400" dirty="0">
+                <a:solidFill>
+                  <a:srgbClr val="808080"/>
+                </a:solidFill>
+                <a:highlight>
+                  <a:srgbClr val="FFFFFF"/>
+                </a:highlight>
+                <a:latin typeface="Cascadia Mono" panose="020B0609020000020004" pitchFamily="49" charset="0"/>
+              </a:rPr>
+              <a:t>JOIN</a:t>
+            </a:r>
+            <a:r>
+              <a:rPr lang="en-US" sz="1400" dirty="0">
+                <a:solidFill>
+                  <a:srgbClr val="000000"/>
+                </a:solidFill>
+                <a:highlight>
+                  <a:srgbClr val="FFFFFF"/>
+                </a:highlight>
+                <a:latin typeface="Cascadia Mono" panose="020B0609020000020004" pitchFamily="49" charset="0"/>
+              </a:rPr>
+              <a:t> </a:t>
+            </a:r>
+            <a:r>
+              <a:rPr lang="en-US" sz="1400" dirty="0" err="1">
+                <a:solidFill>
+                  <a:srgbClr val="000000"/>
+                </a:solidFill>
+                <a:highlight>
+                  <a:srgbClr val="FFFFFF"/>
+                </a:highlight>
+                <a:latin typeface="Cascadia Mono" panose="020B0609020000020004" pitchFamily="49" charset="0"/>
+              </a:rPr>
+              <a:t>dbo</a:t>
+            </a:r>
+            <a:r>
+              <a:rPr lang="en-US" sz="1400" dirty="0" err="1">
+                <a:solidFill>
+                  <a:srgbClr val="808080"/>
+                </a:solidFill>
+                <a:highlight>
+                  <a:srgbClr val="FFFFFF"/>
+                </a:highlight>
+                <a:latin typeface="Cascadia Mono" panose="020B0609020000020004" pitchFamily="49" charset="0"/>
+              </a:rPr>
+              <a:t>.</a:t>
+            </a:r>
+            <a:r>
+              <a:rPr lang="en-US" sz="1400" dirty="0" err="1">
+                <a:solidFill>
+                  <a:srgbClr val="000000"/>
+                </a:solidFill>
+                <a:highlight>
+                  <a:srgbClr val="FFFFFF"/>
+                </a:highlight>
+                <a:latin typeface="Cascadia Mono" panose="020B0609020000020004" pitchFamily="49" charset="0"/>
+              </a:rPr>
+              <a:t>lineitems</a:t>
+            </a:r>
+            <a:r>
+              <a:rPr lang="en-US" sz="1400" dirty="0">
+                <a:solidFill>
+                  <a:srgbClr val="000000"/>
+                </a:solidFill>
+                <a:highlight>
+                  <a:srgbClr val="FFFFFF"/>
+                </a:highlight>
+                <a:latin typeface="Cascadia Mono" panose="020B0609020000020004" pitchFamily="49" charset="0"/>
+              </a:rPr>
+              <a:t> </a:t>
+            </a:r>
+            <a:r>
+              <a:rPr lang="en-US" sz="1400" dirty="0">
+                <a:solidFill>
+                  <a:srgbClr val="0000FF"/>
+                </a:solidFill>
+                <a:highlight>
+                  <a:srgbClr val="FFFFFF"/>
+                </a:highlight>
+                <a:latin typeface="Cascadia Mono" panose="020B0609020000020004" pitchFamily="49" charset="0"/>
+              </a:rPr>
+              <a:t>AS</a:t>
+            </a:r>
+            <a:r>
+              <a:rPr lang="en-US" sz="1400" dirty="0">
+                <a:solidFill>
+                  <a:srgbClr val="000000"/>
+                </a:solidFill>
+                <a:highlight>
+                  <a:srgbClr val="FFFFFF"/>
+                </a:highlight>
+                <a:latin typeface="Cascadia Mono" panose="020B0609020000020004" pitchFamily="49" charset="0"/>
+              </a:rPr>
+              <a:t> l</a:t>
+            </a:r>
+          </a:p>
+          <a:p>
+            <a:pPr marL="0" indent="0">
+              <a:buNone/>
+            </a:pPr>
+            <a:r>
+              <a:rPr lang="en-US" sz="1400" dirty="0">
+                <a:solidFill>
+                  <a:srgbClr val="0000FF"/>
+                </a:solidFill>
+                <a:highlight>
+                  <a:srgbClr val="FFFFFF"/>
+                </a:highlight>
+                <a:latin typeface="Cascadia Mono" panose="020B0609020000020004" pitchFamily="49" charset="0"/>
+              </a:rPr>
+              <a:t>           ON </a:t>
+            </a:r>
+            <a:r>
+              <a:rPr lang="en-US" sz="1400" dirty="0">
+                <a:solidFill>
+                  <a:srgbClr val="808080"/>
+                </a:solidFill>
+                <a:highlight>
+                  <a:srgbClr val="FFFFFF"/>
+                </a:highlight>
+                <a:latin typeface="Cascadia Mono" panose="020B0609020000020004" pitchFamily="49" charset="0"/>
+              </a:rPr>
+              <a:t>(</a:t>
+            </a:r>
+            <a:r>
+              <a:rPr lang="en-US" sz="1400" dirty="0" err="1">
+                <a:solidFill>
+                  <a:srgbClr val="000000"/>
+                </a:solidFill>
+                <a:highlight>
+                  <a:srgbClr val="FFFFFF"/>
+                </a:highlight>
+                <a:latin typeface="Cascadia Mono" panose="020B0609020000020004" pitchFamily="49" charset="0"/>
+              </a:rPr>
+              <a:t>o</a:t>
+            </a:r>
+            <a:r>
+              <a:rPr lang="en-US" sz="1400" dirty="0" err="1">
+                <a:solidFill>
+                  <a:srgbClr val="808080"/>
+                </a:solidFill>
+                <a:highlight>
+                  <a:srgbClr val="FFFFFF"/>
+                </a:highlight>
+                <a:latin typeface="Cascadia Mono" panose="020B0609020000020004" pitchFamily="49" charset="0"/>
+              </a:rPr>
+              <a:t>.</a:t>
+            </a:r>
+            <a:r>
+              <a:rPr lang="en-US" sz="1400" dirty="0" err="1">
+                <a:solidFill>
+                  <a:srgbClr val="000000"/>
+                </a:solidFill>
+                <a:highlight>
+                  <a:srgbClr val="FFFFFF"/>
+                </a:highlight>
+                <a:latin typeface="Cascadia Mono" panose="020B0609020000020004" pitchFamily="49" charset="0"/>
+              </a:rPr>
+              <a:t>o_orderkey</a:t>
+            </a:r>
+            <a:r>
+              <a:rPr lang="en-US" sz="1400" dirty="0">
+                <a:solidFill>
+                  <a:srgbClr val="000000"/>
+                </a:solidFill>
+                <a:highlight>
+                  <a:srgbClr val="FFFFFF"/>
+                </a:highlight>
+                <a:latin typeface="Cascadia Mono" panose="020B0609020000020004" pitchFamily="49" charset="0"/>
+              </a:rPr>
+              <a:t> </a:t>
+            </a:r>
+            <a:r>
+              <a:rPr lang="en-US" sz="1400" dirty="0">
+                <a:solidFill>
+                  <a:srgbClr val="808080"/>
+                </a:solidFill>
+                <a:highlight>
+                  <a:srgbClr val="FFFFFF"/>
+                </a:highlight>
+                <a:latin typeface="Cascadia Mono" panose="020B0609020000020004" pitchFamily="49" charset="0"/>
+              </a:rPr>
+              <a:t>=</a:t>
+            </a:r>
+            <a:r>
+              <a:rPr lang="en-US" sz="1400" dirty="0">
+                <a:solidFill>
+                  <a:srgbClr val="000000"/>
+                </a:solidFill>
+                <a:highlight>
+                  <a:srgbClr val="FFFFFF"/>
+                </a:highlight>
+                <a:latin typeface="Cascadia Mono" panose="020B0609020000020004" pitchFamily="49" charset="0"/>
+              </a:rPr>
+              <a:t> </a:t>
+            </a:r>
+            <a:r>
+              <a:rPr lang="en-US" sz="1400" dirty="0" err="1">
+                <a:solidFill>
+                  <a:srgbClr val="000000"/>
+                </a:solidFill>
+                <a:highlight>
+                  <a:srgbClr val="FFFFFF"/>
+                </a:highlight>
+                <a:latin typeface="Cascadia Mono" panose="020B0609020000020004" pitchFamily="49" charset="0"/>
+              </a:rPr>
+              <a:t>l</a:t>
+            </a:r>
+            <a:r>
+              <a:rPr lang="en-US" sz="1400" dirty="0" err="1">
+                <a:solidFill>
+                  <a:srgbClr val="808080"/>
+                </a:solidFill>
+                <a:highlight>
+                  <a:srgbClr val="FFFFFF"/>
+                </a:highlight>
+                <a:latin typeface="Cascadia Mono" panose="020B0609020000020004" pitchFamily="49" charset="0"/>
+              </a:rPr>
+              <a:t>.</a:t>
+            </a:r>
+            <a:r>
+              <a:rPr lang="en-US" sz="1400" dirty="0" err="1">
+                <a:solidFill>
+                  <a:srgbClr val="000000"/>
+                </a:solidFill>
+                <a:highlight>
+                  <a:srgbClr val="FFFFFF"/>
+                </a:highlight>
+                <a:latin typeface="Cascadia Mono" panose="020B0609020000020004" pitchFamily="49" charset="0"/>
+              </a:rPr>
+              <a:t>l_orderkey</a:t>
+            </a:r>
+            <a:r>
+              <a:rPr lang="en-US" sz="1400" dirty="0">
+                <a:solidFill>
+                  <a:srgbClr val="808080"/>
+                </a:solidFill>
+                <a:highlight>
+                  <a:srgbClr val="FFFFFF"/>
+                </a:highlight>
+                <a:latin typeface="Cascadia Mono" panose="020B0609020000020004" pitchFamily="49" charset="0"/>
+              </a:rPr>
+              <a:t>)</a:t>
+            </a:r>
+            <a:endParaRPr lang="en-US" sz="1400" dirty="0">
+              <a:solidFill>
+                <a:srgbClr val="000000"/>
+              </a:solidFill>
+              <a:highlight>
+                <a:srgbClr val="FFFFFF"/>
+              </a:highlight>
+              <a:latin typeface="Cascadia Mono" panose="020B0609020000020004" pitchFamily="49" charset="0"/>
+            </a:endParaRPr>
+          </a:p>
+          <a:p>
+            <a:pPr marL="0" indent="0">
+              <a:buNone/>
+            </a:pPr>
+            <a:r>
+              <a:rPr lang="en-US" sz="1400" dirty="0">
+                <a:solidFill>
+                  <a:srgbClr val="0000FF"/>
+                </a:solidFill>
+                <a:highlight>
+                  <a:srgbClr val="FFFFFF"/>
+                </a:highlight>
+                <a:latin typeface="Cascadia Mono" panose="020B0609020000020004" pitchFamily="49" charset="0"/>
+              </a:rPr>
+              <a:t>    WHERE  </a:t>
+            </a:r>
+            <a:r>
+              <a:rPr lang="en-US" sz="1400" dirty="0" err="1">
+                <a:solidFill>
+                  <a:srgbClr val="000000"/>
+                </a:solidFill>
+                <a:highlight>
+                  <a:srgbClr val="FFFFFF"/>
+                </a:highlight>
+                <a:latin typeface="Cascadia Mono" panose="020B0609020000020004" pitchFamily="49" charset="0"/>
+              </a:rPr>
+              <a:t>o_orderdate</a:t>
+            </a:r>
+            <a:r>
+              <a:rPr lang="en-US" sz="1400" dirty="0">
+                <a:solidFill>
+                  <a:srgbClr val="000000"/>
+                </a:solidFill>
+                <a:highlight>
+                  <a:srgbClr val="FFFFFF"/>
+                </a:highlight>
+                <a:latin typeface="Cascadia Mono" panose="020B0609020000020004" pitchFamily="49" charset="0"/>
+              </a:rPr>
+              <a:t> </a:t>
+            </a:r>
+            <a:r>
+              <a:rPr lang="en-US" sz="1400" dirty="0">
+                <a:solidFill>
+                  <a:srgbClr val="808080"/>
+                </a:solidFill>
+                <a:highlight>
+                  <a:srgbClr val="FFFFFF"/>
+                </a:highlight>
+                <a:latin typeface="Cascadia Mono" panose="020B0609020000020004" pitchFamily="49" charset="0"/>
+              </a:rPr>
+              <a:t>&gt;=</a:t>
+            </a:r>
+            <a:r>
+              <a:rPr lang="en-US" sz="1400" dirty="0">
+                <a:solidFill>
+                  <a:srgbClr val="000000"/>
+                </a:solidFill>
+                <a:highlight>
+                  <a:srgbClr val="FFFFFF"/>
+                </a:highlight>
+                <a:latin typeface="Cascadia Mono" panose="020B0609020000020004" pitchFamily="49" charset="0"/>
+              </a:rPr>
+              <a:t> </a:t>
+            </a:r>
+            <a:r>
+              <a:rPr lang="en-US" sz="1400" dirty="0">
+                <a:solidFill>
+                  <a:srgbClr val="FF0000"/>
+                </a:solidFill>
+                <a:highlight>
+                  <a:srgbClr val="FFFFFF"/>
+                </a:highlight>
+                <a:latin typeface="Cascadia Mono" panose="020B0609020000020004" pitchFamily="49" charset="0"/>
+              </a:rPr>
+              <a:t>'2019-01-01’</a:t>
+            </a:r>
+            <a:endParaRPr lang="en-US" sz="1400" dirty="0">
+              <a:solidFill>
+                <a:srgbClr val="000000"/>
+              </a:solidFill>
+              <a:highlight>
+                <a:srgbClr val="FFFFFF"/>
+              </a:highlight>
+              <a:latin typeface="Cascadia Mono" panose="020B0609020000020004" pitchFamily="49" charset="0"/>
+            </a:endParaRPr>
+          </a:p>
+          <a:p>
+            <a:pPr marL="0" indent="0">
+              <a:buNone/>
+            </a:pPr>
+            <a:r>
+              <a:rPr lang="en-US" sz="1400" dirty="0">
+                <a:solidFill>
+                  <a:srgbClr val="808080"/>
+                </a:solidFill>
+                <a:highlight>
+                  <a:srgbClr val="FFFFFF"/>
+                </a:highlight>
+                <a:latin typeface="Cascadia Mono" panose="020B0609020000020004" pitchFamily="49" charset="0"/>
+              </a:rPr>
+              <a:t>           AND</a:t>
+            </a:r>
+            <a:r>
+              <a:rPr lang="en-US" sz="1400" dirty="0">
+                <a:solidFill>
+                  <a:srgbClr val="000000"/>
+                </a:solidFill>
+                <a:highlight>
+                  <a:srgbClr val="FFFFFF"/>
+                </a:highlight>
+                <a:latin typeface="Cascadia Mono" panose="020B0609020000020004" pitchFamily="49" charset="0"/>
+              </a:rPr>
+              <a:t> </a:t>
+            </a:r>
+            <a:r>
+              <a:rPr lang="en-US" sz="1400" dirty="0" err="1">
+                <a:solidFill>
+                  <a:srgbClr val="000000"/>
+                </a:solidFill>
+                <a:highlight>
+                  <a:srgbClr val="FFFFFF"/>
+                </a:highlight>
+                <a:latin typeface="Cascadia Mono" panose="020B0609020000020004" pitchFamily="49" charset="0"/>
+              </a:rPr>
+              <a:t>o_orderdate</a:t>
+            </a:r>
+            <a:r>
+              <a:rPr lang="en-US" sz="1400" dirty="0">
+                <a:solidFill>
+                  <a:srgbClr val="000000"/>
+                </a:solidFill>
+                <a:highlight>
+                  <a:srgbClr val="FFFFFF"/>
+                </a:highlight>
+                <a:latin typeface="Cascadia Mono" panose="020B0609020000020004" pitchFamily="49" charset="0"/>
+              </a:rPr>
+              <a:t> </a:t>
+            </a:r>
+            <a:r>
+              <a:rPr lang="en-US" sz="1400" dirty="0">
+                <a:solidFill>
+                  <a:srgbClr val="808080"/>
+                </a:solidFill>
+                <a:highlight>
+                  <a:srgbClr val="FFFFFF"/>
+                </a:highlight>
+                <a:latin typeface="Cascadia Mono" panose="020B0609020000020004" pitchFamily="49" charset="0"/>
+              </a:rPr>
+              <a:t>&lt;</a:t>
+            </a:r>
+            <a:r>
+              <a:rPr lang="en-US" sz="1400" dirty="0">
+                <a:solidFill>
+                  <a:srgbClr val="000000"/>
+                </a:solidFill>
+                <a:highlight>
+                  <a:srgbClr val="FFFFFF"/>
+                </a:highlight>
+                <a:latin typeface="Cascadia Mono" panose="020B0609020000020004" pitchFamily="49" charset="0"/>
+              </a:rPr>
+              <a:t> </a:t>
+            </a:r>
+            <a:r>
+              <a:rPr lang="en-US" sz="1400" dirty="0">
+                <a:solidFill>
+                  <a:srgbClr val="FF0000"/>
+                </a:solidFill>
+                <a:highlight>
+                  <a:srgbClr val="FFFFFF"/>
+                </a:highlight>
+                <a:latin typeface="Cascadia Mono" panose="020B0609020000020004" pitchFamily="49" charset="0"/>
+              </a:rPr>
+              <a:t>'2020-01-01'</a:t>
+            </a:r>
+            <a:endParaRPr lang="en-US" sz="1400" dirty="0">
+              <a:solidFill>
+                <a:srgbClr val="000000"/>
+              </a:solidFill>
+              <a:highlight>
+                <a:srgbClr val="FFFFFF"/>
+              </a:highlight>
+              <a:latin typeface="Cascadia Mono" panose="020B0609020000020004" pitchFamily="49" charset="0"/>
+            </a:endParaRPr>
+          </a:p>
+          <a:p>
+            <a:pPr marL="0" indent="0">
+              <a:buNone/>
+            </a:pPr>
+            <a:r>
+              <a:rPr lang="en-US" sz="1400" dirty="0">
+                <a:solidFill>
+                  <a:srgbClr val="808080"/>
+                </a:solidFill>
+                <a:highlight>
+                  <a:srgbClr val="FFFFFF"/>
+                </a:highlight>
+                <a:latin typeface="Cascadia Mono" panose="020B0609020000020004" pitchFamily="49" charset="0"/>
+              </a:rPr>
+              <a:t>)</a:t>
+            </a:r>
+            <a:endParaRPr lang="en-US" sz="1400" dirty="0">
+              <a:solidFill>
+                <a:srgbClr val="000000"/>
+              </a:solidFill>
+              <a:highlight>
+                <a:srgbClr val="FFFFFF"/>
+              </a:highlight>
+              <a:latin typeface="Cascadia Mono" panose="020B0609020000020004" pitchFamily="49" charset="0"/>
+            </a:endParaRPr>
+          </a:p>
+          <a:p>
+            <a:pPr marL="0" indent="0">
+              <a:buNone/>
+            </a:pPr>
+            <a:r>
+              <a:rPr lang="en-US" sz="1400" dirty="0">
+                <a:solidFill>
+                  <a:srgbClr val="0000FF"/>
+                </a:solidFill>
+                <a:highlight>
+                  <a:srgbClr val="FFFFFF"/>
+                </a:highlight>
+                <a:latin typeface="Cascadia Mono" panose="020B0609020000020004" pitchFamily="49" charset="0"/>
+              </a:rPr>
+              <a:t>SELECT </a:t>
+            </a:r>
+            <a:r>
+              <a:rPr lang="en-US" sz="1400" dirty="0">
+                <a:solidFill>
+                  <a:srgbClr val="FF00FF"/>
+                </a:solidFill>
+                <a:highlight>
+                  <a:srgbClr val="FFFFFF"/>
+                </a:highlight>
+                <a:latin typeface="Cascadia Mono" panose="020B0609020000020004" pitchFamily="49" charset="0"/>
+              </a:rPr>
+              <a:t>COUNT_BIG</a:t>
+            </a:r>
+            <a:r>
+              <a:rPr lang="en-US" sz="1400" dirty="0">
+                <a:solidFill>
+                  <a:srgbClr val="808080"/>
+                </a:solidFill>
+                <a:highlight>
+                  <a:srgbClr val="FFFFFF"/>
+                </a:highlight>
+                <a:latin typeface="Cascadia Mono" panose="020B0609020000020004" pitchFamily="49" charset="0"/>
+              </a:rPr>
+              <a:t>(*) </a:t>
+            </a:r>
+            <a:r>
+              <a:rPr lang="en-US" sz="1400" dirty="0">
+                <a:solidFill>
+                  <a:srgbClr val="0000FF"/>
+                </a:solidFill>
+                <a:highlight>
+                  <a:srgbClr val="FFFFFF"/>
+                </a:highlight>
+                <a:latin typeface="Cascadia Mono" panose="020B0609020000020004" pitchFamily="49" charset="0"/>
+              </a:rPr>
+              <a:t>AS </a:t>
+            </a:r>
+            <a:r>
+              <a:rPr lang="en-US" sz="1400" dirty="0" err="1">
+                <a:solidFill>
+                  <a:srgbClr val="000000"/>
+                </a:solidFill>
+                <a:highlight>
+                  <a:srgbClr val="FFFFFF"/>
+                </a:highlight>
+                <a:latin typeface="Cascadia Mono" panose="020B0609020000020004" pitchFamily="49" charset="0"/>
+              </a:rPr>
+              <a:t>total_order_count</a:t>
+            </a:r>
+            <a:endParaRPr lang="en-US" sz="1400" dirty="0">
+              <a:solidFill>
+                <a:srgbClr val="000000"/>
+              </a:solidFill>
+              <a:highlight>
+                <a:srgbClr val="FFFFFF"/>
+              </a:highlight>
+              <a:latin typeface="Cascadia Mono" panose="020B0609020000020004" pitchFamily="49" charset="0"/>
+            </a:endParaRPr>
+          </a:p>
+          <a:p>
+            <a:pPr marL="0" indent="0">
+              <a:buNone/>
+            </a:pPr>
+            <a:r>
+              <a:rPr lang="en-US" sz="1400" dirty="0">
+                <a:solidFill>
+                  <a:srgbClr val="0000FF"/>
+                </a:solidFill>
+                <a:highlight>
+                  <a:srgbClr val="FFFFFF"/>
+                </a:highlight>
+                <a:latin typeface="Cascadia Mono" panose="020B0609020000020004" pitchFamily="49" charset="0"/>
+              </a:rPr>
+              <a:t>FROM   </a:t>
+            </a:r>
+            <a:r>
+              <a:rPr lang="en-US" sz="1400" dirty="0">
+                <a:solidFill>
+                  <a:srgbClr val="000000"/>
+                </a:solidFill>
+                <a:highlight>
+                  <a:srgbClr val="FFFFFF"/>
+                </a:highlight>
+                <a:latin typeface="Cascadia Mono" panose="020B0609020000020004" pitchFamily="49" charset="0"/>
+              </a:rPr>
+              <a:t>o </a:t>
+            </a:r>
+            <a:r>
+              <a:rPr lang="en-US" sz="1400" dirty="0">
+                <a:solidFill>
+                  <a:srgbClr val="808080"/>
+                </a:solidFill>
+                <a:highlight>
+                  <a:srgbClr val="FFFFFF"/>
+                </a:highlight>
+                <a:latin typeface="Cascadia Mono" panose="020B0609020000020004" pitchFamily="49" charset="0"/>
+              </a:rPr>
+              <a:t>INNER</a:t>
+            </a:r>
+            <a:r>
+              <a:rPr lang="en-US" sz="1400" dirty="0">
+                <a:solidFill>
+                  <a:srgbClr val="000000"/>
+                </a:solidFill>
+                <a:highlight>
+                  <a:srgbClr val="FFFFFF"/>
+                </a:highlight>
+                <a:latin typeface="Cascadia Mono" panose="020B0609020000020004" pitchFamily="49" charset="0"/>
+              </a:rPr>
+              <a:t> </a:t>
+            </a:r>
+            <a:r>
+              <a:rPr lang="en-US" sz="1400" dirty="0">
+                <a:solidFill>
+                  <a:srgbClr val="808080"/>
+                </a:solidFill>
+                <a:highlight>
+                  <a:srgbClr val="FFFFFF"/>
+                </a:highlight>
+                <a:latin typeface="Cascadia Mono" panose="020B0609020000020004" pitchFamily="49" charset="0"/>
+              </a:rPr>
+              <a:t>JOIN</a:t>
+            </a:r>
+            <a:r>
+              <a:rPr lang="en-US" sz="1400" dirty="0">
+                <a:solidFill>
+                  <a:srgbClr val="000000"/>
+                </a:solidFill>
+                <a:highlight>
+                  <a:srgbClr val="FFFFFF"/>
+                </a:highlight>
+                <a:latin typeface="Cascadia Mono" panose="020B0609020000020004" pitchFamily="49" charset="0"/>
+              </a:rPr>
+              <a:t> </a:t>
+            </a:r>
+            <a:r>
+              <a:rPr lang="en-US" sz="1400" dirty="0" err="1">
+                <a:solidFill>
+                  <a:srgbClr val="000000"/>
+                </a:solidFill>
+                <a:highlight>
+                  <a:srgbClr val="FFFFFF"/>
+                </a:highlight>
+                <a:latin typeface="Cascadia Mono" panose="020B0609020000020004" pitchFamily="49" charset="0"/>
+              </a:rPr>
+              <a:t>dbo</a:t>
+            </a:r>
+            <a:r>
+              <a:rPr lang="en-US" sz="1400" dirty="0" err="1">
+                <a:solidFill>
+                  <a:srgbClr val="808080"/>
+                </a:solidFill>
+                <a:highlight>
+                  <a:srgbClr val="FFFFFF"/>
+                </a:highlight>
+                <a:latin typeface="Cascadia Mono" panose="020B0609020000020004" pitchFamily="49" charset="0"/>
+              </a:rPr>
+              <a:t>.</a:t>
+            </a:r>
+            <a:r>
+              <a:rPr lang="en-US" sz="1400" dirty="0" err="1">
+                <a:solidFill>
+                  <a:srgbClr val="000000"/>
+                </a:solidFill>
+                <a:highlight>
+                  <a:srgbClr val="FFFFFF"/>
+                </a:highlight>
+                <a:latin typeface="Cascadia Mono" panose="020B0609020000020004" pitchFamily="49" charset="0"/>
+              </a:rPr>
+              <a:t>parts</a:t>
+            </a:r>
+            <a:r>
+              <a:rPr lang="en-US" sz="1400" dirty="0">
+                <a:solidFill>
+                  <a:srgbClr val="000000"/>
+                </a:solidFill>
+                <a:highlight>
+                  <a:srgbClr val="FFFFFF"/>
+                </a:highlight>
+                <a:latin typeface="Cascadia Mono" panose="020B0609020000020004" pitchFamily="49" charset="0"/>
+              </a:rPr>
+              <a:t> </a:t>
+            </a:r>
+            <a:r>
+              <a:rPr lang="en-US" sz="1400" dirty="0">
+                <a:solidFill>
+                  <a:srgbClr val="0000FF"/>
+                </a:solidFill>
+                <a:highlight>
+                  <a:srgbClr val="FFFFFF"/>
+                </a:highlight>
+                <a:latin typeface="Cascadia Mono" panose="020B0609020000020004" pitchFamily="49" charset="0"/>
+              </a:rPr>
+              <a:t>AS</a:t>
+            </a:r>
+            <a:r>
+              <a:rPr lang="en-US" sz="1400" dirty="0">
+                <a:solidFill>
+                  <a:srgbClr val="000000"/>
+                </a:solidFill>
+                <a:highlight>
+                  <a:srgbClr val="FFFFFF"/>
+                </a:highlight>
+                <a:latin typeface="Cascadia Mono" panose="020B0609020000020004" pitchFamily="49" charset="0"/>
+              </a:rPr>
+              <a:t> p</a:t>
+            </a:r>
+          </a:p>
+          <a:p>
+            <a:pPr marL="0" indent="0">
+              <a:buNone/>
+            </a:pPr>
+            <a:r>
+              <a:rPr lang="en-US" sz="1400" dirty="0">
+                <a:solidFill>
+                  <a:srgbClr val="0000FF"/>
+                </a:solidFill>
+                <a:highlight>
+                  <a:srgbClr val="FFFFFF"/>
+                </a:highlight>
+                <a:latin typeface="Cascadia Mono" panose="020B0609020000020004" pitchFamily="49" charset="0"/>
+              </a:rPr>
+              <a:t>       ON </a:t>
+            </a:r>
+            <a:r>
+              <a:rPr lang="en-US" sz="1400" dirty="0">
+                <a:solidFill>
+                  <a:srgbClr val="808080"/>
+                </a:solidFill>
+                <a:highlight>
+                  <a:srgbClr val="FFFFFF"/>
+                </a:highlight>
+                <a:latin typeface="Cascadia Mono" panose="020B0609020000020004" pitchFamily="49" charset="0"/>
+              </a:rPr>
+              <a:t>(</a:t>
+            </a:r>
+            <a:r>
+              <a:rPr lang="en-US" sz="1400" dirty="0" err="1">
+                <a:solidFill>
+                  <a:srgbClr val="000000"/>
+                </a:solidFill>
+                <a:highlight>
+                  <a:srgbClr val="FFFFFF"/>
+                </a:highlight>
+                <a:latin typeface="Cascadia Mono" panose="020B0609020000020004" pitchFamily="49" charset="0"/>
+              </a:rPr>
+              <a:t>o</a:t>
+            </a:r>
+            <a:r>
+              <a:rPr lang="en-US" sz="1400" dirty="0" err="1">
+                <a:solidFill>
+                  <a:srgbClr val="808080"/>
+                </a:solidFill>
+                <a:highlight>
+                  <a:srgbClr val="FFFFFF"/>
+                </a:highlight>
+                <a:latin typeface="Cascadia Mono" panose="020B0609020000020004" pitchFamily="49" charset="0"/>
+              </a:rPr>
+              <a:t>.</a:t>
+            </a:r>
+            <a:r>
+              <a:rPr lang="en-US" sz="1400" dirty="0" err="1">
+                <a:solidFill>
+                  <a:srgbClr val="000000"/>
+                </a:solidFill>
+                <a:highlight>
+                  <a:srgbClr val="FFFFFF"/>
+                </a:highlight>
+                <a:latin typeface="Cascadia Mono" panose="020B0609020000020004" pitchFamily="49" charset="0"/>
+              </a:rPr>
+              <a:t>l_partkey</a:t>
+            </a:r>
+            <a:r>
+              <a:rPr lang="en-US" sz="1400" dirty="0">
+                <a:solidFill>
+                  <a:srgbClr val="000000"/>
+                </a:solidFill>
+                <a:highlight>
+                  <a:srgbClr val="FFFFFF"/>
+                </a:highlight>
+                <a:latin typeface="Cascadia Mono" panose="020B0609020000020004" pitchFamily="49" charset="0"/>
+              </a:rPr>
+              <a:t> </a:t>
+            </a:r>
+            <a:r>
+              <a:rPr lang="en-US" sz="1400" dirty="0">
+                <a:solidFill>
+                  <a:srgbClr val="808080"/>
+                </a:solidFill>
+                <a:highlight>
+                  <a:srgbClr val="FFFFFF"/>
+                </a:highlight>
+                <a:latin typeface="Cascadia Mono" panose="020B0609020000020004" pitchFamily="49" charset="0"/>
+              </a:rPr>
+              <a:t>=</a:t>
+            </a:r>
+            <a:r>
+              <a:rPr lang="en-US" sz="1400" dirty="0">
+                <a:solidFill>
+                  <a:srgbClr val="000000"/>
+                </a:solidFill>
+                <a:highlight>
+                  <a:srgbClr val="FFFFFF"/>
+                </a:highlight>
+                <a:latin typeface="Cascadia Mono" panose="020B0609020000020004" pitchFamily="49" charset="0"/>
+              </a:rPr>
+              <a:t> </a:t>
+            </a:r>
+            <a:r>
+              <a:rPr lang="en-US" sz="1400" dirty="0" err="1">
+                <a:solidFill>
+                  <a:srgbClr val="000000"/>
+                </a:solidFill>
+                <a:highlight>
+                  <a:srgbClr val="FFFFFF"/>
+                </a:highlight>
+                <a:latin typeface="Cascadia Mono" panose="020B0609020000020004" pitchFamily="49" charset="0"/>
+              </a:rPr>
+              <a:t>p</a:t>
+            </a:r>
+            <a:r>
+              <a:rPr lang="en-US" sz="1400" dirty="0" err="1">
+                <a:solidFill>
+                  <a:srgbClr val="808080"/>
+                </a:solidFill>
+                <a:highlight>
+                  <a:srgbClr val="FFFFFF"/>
+                </a:highlight>
+                <a:latin typeface="Cascadia Mono" panose="020B0609020000020004" pitchFamily="49" charset="0"/>
+              </a:rPr>
+              <a:t>.</a:t>
+            </a:r>
+            <a:r>
+              <a:rPr lang="en-US" sz="1400" dirty="0" err="1">
+                <a:solidFill>
+                  <a:srgbClr val="000000"/>
+                </a:solidFill>
+                <a:highlight>
+                  <a:srgbClr val="FFFFFF"/>
+                </a:highlight>
+                <a:latin typeface="Cascadia Mono" panose="020B0609020000020004" pitchFamily="49" charset="0"/>
+              </a:rPr>
+              <a:t>p_partkey</a:t>
+            </a:r>
+            <a:r>
+              <a:rPr lang="en-US" sz="1400" dirty="0">
+                <a:solidFill>
+                  <a:srgbClr val="808080"/>
+                </a:solidFill>
+                <a:highlight>
+                  <a:srgbClr val="FFFFFF"/>
+                </a:highlight>
+                <a:latin typeface="Cascadia Mono" panose="020B0609020000020004" pitchFamily="49" charset="0"/>
+              </a:rPr>
+              <a:t>)</a:t>
+            </a:r>
+            <a:endParaRPr lang="en-US" sz="1400" dirty="0">
+              <a:solidFill>
+                <a:srgbClr val="000000"/>
+              </a:solidFill>
+              <a:highlight>
+                <a:srgbClr val="FFFFFF"/>
+              </a:highlight>
+              <a:latin typeface="Cascadia Mono" panose="020B0609020000020004" pitchFamily="49" charset="0"/>
+            </a:endParaRPr>
+          </a:p>
+          <a:p>
+            <a:pPr marL="0" indent="0">
+              <a:buNone/>
+            </a:pPr>
+            <a:r>
+              <a:rPr lang="en-US" sz="1400" dirty="0">
+                <a:solidFill>
+                  <a:srgbClr val="0000FF"/>
+                </a:solidFill>
+                <a:highlight>
+                  <a:srgbClr val="FFFFFF"/>
+                </a:highlight>
+                <a:latin typeface="Cascadia Mono" panose="020B0609020000020004" pitchFamily="49" charset="0"/>
+              </a:rPr>
+              <a:t>WHERE  </a:t>
+            </a:r>
+            <a:r>
+              <a:rPr lang="en-US" sz="1400" dirty="0" err="1">
+                <a:solidFill>
+                  <a:srgbClr val="000000"/>
+                </a:solidFill>
+                <a:highlight>
+                  <a:srgbClr val="FFFFFF"/>
+                </a:highlight>
+                <a:latin typeface="Cascadia Mono" panose="020B0609020000020004" pitchFamily="49" charset="0"/>
+              </a:rPr>
+              <a:t>p</a:t>
+            </a:r>
+            <a:r>
+              <a:rPr lang="en-US" sz="1400" dirty="0" err="1">
+                <a:solidFill>
+                  <a:srgbClr val="808080"/>
+                </a:solidFill>
+                <a:highlight>
+                  <a:srgbClr val="FFFFFF"/>
+                </a:highlight>
+                <a:latin typeface="Cascadia Mono" panose="020B0609020000020004" pitchFamily="49" charset="0"/>
+              </a:rPr>
+              <a:t>.</a:t>
+            </a:r>
+            <a:r>
+              <a:rPr lang="en-US" sz="1400" dirty="0" err="1">
+                <a:solidFill>
+                  <a:srgbClr val="000000"/>
+                </a:solidFill>
+                <a:highlight>
+                  <a:srgbClr val="FFFFFF"/>
+                </a:highlight>
+                <a:latin typeface="Cascadia Mono" panose="020B0609020000020004" pitchFamily="49" charset="0"/>
+              </a:rPr>
+              <a:t>p_brand</a:t>
+            </a:r>
+            <a:r>
+              <a:rPr lang="en-US" sz="1400" dirty="0">
+                <a:solidFill>
+                  <a:srgbClr val="000000"/>
+                </a:solidFill>
+                <a:highlight>
+                  <a:srgbClr val="FFFFFF"/>
+                </a:highlight>
+                <a:latin typeface="Cascadia Mono" panose="020B0609020000020004" pitchFamily="49" charset="0"/>
+              </a:rPr>
+              <a:t> </a:t>
+            </a:r>
+            <a:r>
+              <a:rPr lang="en-US" sz="1400" dirty="0">
+                <a:solidFill>
+                  <a:srgbClr val="808080"/>
+                </a:solidFill>
+                <a:highlight>
+                  <a:srgbClr val="FFFFFF"/>
+                </a:highlight>
+                <a:latin typeface="Cascadia Mono" panose="020B0609020000020004" pitchFamily="49" charset="0"/>
+              </a:rPr>
+              <a:t>=</a:t>
+            </a:r>
+            <a:r>
+              <a:rPr lang="en-US" sz="1400" dirty="0">
+                <a:solidFill>
+                  <a:srgbClr val="000000"/>
+                </a:solidFill>
+                <a:highlight>
+                  <a:srgbClr val="FFFFFF"/>
+                </a:highlight>
+                <a:latin typeface="Cascadia Mono" panose="020B0609020000020004" pitchFamily="49" charset="0"/>
+              </a:rPr>
+              <a:t> </a:t>
+            </a:r>
+            <a:r>
+              <a:rPr lang="en-US" sz="1400" dirty="0">
+                <a:solidFill>
+                  <a:srgbClr val="FF0000"/>
+                </a:solidFill>
+                <a:highlight>
+                  <a:srgbClr val="FFFFFF"/>
+                </a:highlight>
+                <a:latin typeface="Cascadia Mono" panose="020B0609020000020004" pitchFamily="49" charset="0"/>
+              </a:rPr>
+              <a:t>'Brand#23'</a:t>
+            </a:r>
+            <a:r>
+              <a:rPr lang="en-US" sz="1400" dirty="0">
+                <a:solidFill>
+                  <a:srgbClr val="808080"/>
+                </a:solidFill>
+                <a:highlight>
+                  <a:srgbClr val="FFFFFF"/>
+                </a:highlight>
+                <a:latin typeface="Cascadia Mono" panose="020B0609020000020004" pitchFamily="49" charset="0"/>
+              </a:rPr>
+              <a:t>;</a:t>
+            </a:r>
+            <a:endParaRPr lang="en-US" sz="1400" dirty="0">
+              <a:solidFill>
+                <a:srgbClr val="000000"/>
+              </a:solidFill>
+              <a:highlight>
+                <a:srgbClr val="FFFFFF"/>
+              </a:highlight>
+              <a:latin typeface="Cascadia Mono" panose="020B0609020000020004" pitchFamily="49" charset="0"/>
+            </a:endParaRPr>
+          </a:p>
+          <a:p>
+            <a:pPr marL="0" indent="0">
+              <a:buNone/>
+            </a:pPr>
+            <a:endParaRPr lang="en-US" sz="1400" dirty="0"/>
+          </a:p>
+        </p:txBody>
+      </p:sp>
+    </p:spTree>
+    <p:extLst>
+      <p:ext uri="{BB962C8B-B14F-4D97-AF65-F5344CB8AC3E}">
+        <p14:creationId xmlns:p14="http://schemas.microsoft.com/office/powerpoint/2010/main" val="1311797304"/>
+      </p:ext>
+    </p:extLst>
+  </p:cSld>
+  <p:clrMapOvr>
+    <a:masterClrMapping/>
+  </p:clrMapOvr>
+  <p:timing>
+    <p:tnLst>
+      <p:par>
+        <p:cTn id="1" dur="indefinite" restart="never" nodeType="tmRoot">
+          <p:childTnLst>
+            <p:seq concurrent="1" nextAc="seek">
+              <p:cTn id="2" dur="indefinite" nodeType="mainSeq">
+                <p:childTnLst>
+                  <p:par>
+                    <p:cTn id="3" fill="hold">
+                      <p:stCondLst>
+                        <p:cond delay="indefinite"/>
+                      </p:stCondLst>
+                      <p:childTnLst>
+                        <p:par>
+                          <p:cTn id="4" fill="hold">
+                            <p:stCondLst>
+                              <p:cond delay="0"/>
+                            </p:stCondLst>
+                            <p:childTnLst>
+                              <p:par>
+                                <p:cTn id="5" presetID="1" presetClass="entr" presetSubtype="0" fill="hold" grpId="0" nodeType="clickEffect">
+                                  <p:stCondLst>
+                                    <p:cond delay="0"/>
+                                  </p:stCondLst>
+                                  <p:childTnLst>
+                                    <p:set>
+                                      <p:cBhvr>
+                                        <p:cTn id="6" dur="1" fill="hold">
+                                          <p:stCondLst>
+                                            <p:cond delay="0"/>
+                                          </p:stCondLst>
+                                        </p:cTn>
+                                        <p:tgtEl>
+                                          <p:spTgt spid="3">
+                                            <p:txEl>
+                                              <p:pRg st="0" end="0"/>
+                                            </p:txEl>
+                                          </p:spTgt>
+                                        </p:tgtEl>
+                                        <p:attrNameLst>
+                                          <p:attrName>style.visibility</p:attrName>
+                                        </p:attrNameLst>
+                                      </p:cBhvr>
+                                      <p:to>
+                                        <p:strVal val="visible"/>
+                                      </p:to>
+                                    </p:set>
+                                  </p:childTnLst>
+                                </p:cTn>
+                              </p:par>
+                            </p:childTnLst>
+                          </p:cTn>
+                        </p:par>
+                      </p:childTnLst>
+                    </p:cTn>
+                  </p:par>
+                  <p:par>
+                    <p:cTn id="7" fill="hold">
+                      <p:stCondLst>
+                        <p:cond delay="indefinite"/>
+                      </p:stCondLst>
+                      <p:childTnLst>
+                        <p:par>
+                          <p:cTn id="8" fill="hold">
+                            <p:stCondLst>
+                              <p:cond delay="0"/>
+                            </p:stCondLst>
+                            <p:childTnLst>
+                              <p:par>
+                                <p:cTn id="9" presetID="1" presetClass="entr" presetSubtype="0" fill="hold" grpId="0" nodeType="clickEffect">
+                                  <p:stCondLst>
+                                    <p:cond delay="0"/>
+                                  </p:stCondLst>
+                                  <p:childTnLst>
+                                    <p:set>
+                                      <p:cBhvr>
+                                        <p:cTn id="10" dur="1" fill="hold">
+                                          <p:stCondLst>
+                                            <p:cond delay="0"/>
+                                          </p:stCondLst>
+                                        </p:cTn>
+                                        <p:tgtEl>
+                                          <p:spTgt spid="3">
+                                            <p:txEl>
+                                              <p:pRg st="1" end="1"/>
+                                            </p:txEl>
+                                          </p:spTgt>
+                                        </p:tgtEl>
+                                        <p:attrNameLst>
+                                          <p:attrName>style.visibility</p:attrName>
+                                        </p:attrNameLst>
+                                      </p:cBhvr>
+                                      <p:to>
+                                        <p:strVal val="visible"/>
+                                      </p:to>
+                                    </p:set>
+                                  </p:childTnLst>
+                                </p:cTn>
+                              </p:par>
+                            </p:childTnLst>
+                          </p:cTn>
+                        </p:par>
+                      </p:childTnLst>
+                    </p:cTn>
+                  </p:par>
+                  <p:par>
+                    <p:cTn id="11" fill="hold">
+                      <p:stCondLst>
+                        <p:cond delay="indefinite"/>
+                      </p:stCondLst>
+                      <p:childTnLst>
+                        <p:par>
+                          <p:cTn id="12" fill="hold">
+                            <p:stCondLst>
+                              <p:cond delay="0"/>
+                            </p:stCondLst>
+                            <p:childTnLst>
+                              <p:par>
+                                <p:cTn id="13" presetID="1" presetClass="entr" presetSubtype="0" fill="hold" grpId="0" nodeType="clickEffect">
+                                  <p:stCondLst>
+                                    <p:cond delay="0"/>
+                                  </p:stCondLst>
+                                  <p:childTnLst>
+                                    <p:set>
+                                      <p:cBhvr>
+                                        <p:cTn id="14" dur="1" fill="hold">
+                                          <p:stCondLst>
+                                            <p:cond delay="0"/>
+                                          </p:stCondLst>
+                                        </p:cTn>
+                                        <p:tgtEl>
+                                          <p:spTgt spid="3">
+                                            <p:txEl>
+                                              <p:pRg st="2" end="2"/>
+                                            </p:txEl>
+                                          </p:spTgt>
+                                        </p:tgtEl>
+                                        <p:attrNameLst>
+                                          <p:attrName>style.visibility</p:attrName>
+                                        </p:attrNameLst>
+                                      </p:cBhvr>
+                                      <p:to>
+                                        <p:strVal val="visible"/>
+                                      </p:to>
+                                    </p:set>
+                                  </p:childTnLst>
+                                </p:cTn>
+                              </p:par>
+                              <p:par>
+                                <p:cTn id="15" presetID="1" presetClass="entr" presetSubtype="0" fill="hold" grpId="0" nodeType="withEffect">
+                                  <p:stCondLst>
+                                    <p:cond delay="0"/>
+                                  </p:stCondLst>
+                                  <p:childTnLst>
+                                    <p:set>
+                                      <p:cBhvr>
+                                        <p:cTn id="16" dur="1" fill="hold">
+                                          <p:stCondLst>
+                                            <p:cond delay="0"/>
+                                          </p:stCondLst>
+                                        </p:cTn>
+                                        <p:tgtEl>
+                                          <p:spTgt spid="3">
+                                            <p:txEl>
+                                              <p:pRg st="9" end="9"/>
+                                            </p:txEl>
+                                          </p:spTgt>
+                                        </p:tgtEl>
+                                        <p:attrNameLst>
+                                          <p:attrName>style.visibility</p:attrName>
+                                        </p:attrNameLst>
+                                      </p:cBhvr>
+                                      <p:to>
+                                        <p:strVal val="visible"/>
+                                      </p:to>
+                                    </p:set>
+                                  </p:childTnLst>
+                                </p:cTn>
+                              </p:par>
+                            </p:childTnLst>
+                          </p:cTn>
+                        </p:par>
+                      </p:childTnLst>
+                    </p:cTn>
+                  </p:par>
+                  <p:par>
+                    <p:cTn id="17" fill="hold">
+                      <p:stCondLst>
+                        <p:cond delay="indefinite"/>
+                      </p:stCondLst>
+                      <p:childTnLst>
+                        <p:par>
+                          <p:cTn id="18" fill="hold">
+                            <p:stCondLst>
+                              <p:cond delay="0"/>
+                            </p:stCondLst>
+                            <p:childTnLst>
+                              <p:par>
+                                <p:cTn id="19" presetID="1" presetClass="entr" presetSubtype="0" fill="hold" grpId="0" nodeType="clickEffect">
+                                  <p:stCondLst>
+                                    <p:cond delay="0"/>
+                                  </p:stCondLst>
+                                  <p:iterate type="wd">
+                                    <p:tmAbs val="100"/>
+                                  </p:iterate>
+                                  <p:childTnLst>
+                                    <p:set>
+                                      <p:cBhvr>
+                                        <p:cTn id="20" dur="1" fill="hold">
+                                          <p:stCondLst>
+                                            <p:cond delay="0"/>
+                                          </p:stCondLst>
+                                        </p:cTn>
+                                        <p:tgtEl>
+                                          <p:spTgt spid="3">
+                                            <p:txEl>
+                                              <p:pRg st="3" end="3"/>
+                                            </p:txEl>
+                                          </p:spTgt>
+                                        </p:tgtEl>
+                                        <p:attrNameLst>
+                                          <p:attrName>style.visibility</p:attrName>
+                                        </p:attrNameLst>
+                                      </p:cBhvr>
+                                      <p:to>
+                                        <p:strVal val="visible"/>
+                                      </p:to>
+                                    </p:set>
+                                  </p:childTnLst>
+                                </p:cTn>
+                              </p:par>
+                            </p:childTnLst>
+                          </p:cTn>
+                        </p:par>
+                        <p:par>
+                          <p:cTn id="21" fill="hold">
+                            <p:stCondLst>
+                              <p:cond delay="601"/>
+                            </p:stCondLst>
+                            <p:childTnLst>
+                              <p:par>
+                                <p:cTn id="22" presetID="1" presetClass="entr" presetSubtype="0" fill="hold" grpId="0" nodeType="afterEffect">
+                                  <p:stCondLst>
+                                    <p:cond delay="0"/>
+                                  </p:stCondLst>
+                                  <p:iterate type="wd">
+                                    <p:tmAbs val="100"/>
+                                  </p:iterate>
+                                  <p:childTnLst>
+                                    <p:set>
+                                      <p:cBhvr>
+                                        <p:cTn id="23" dur="1" fill="hold">
+                                          <p:stCondLst>
+                                            <p:cond delay="0"/>
+                                          </p:stCondLst>
+                                        </p:cTn>
+                                        <p:tgtEl>
+                                          <p:spTgt spid="3">
+                                            <p:txEl>
+                                              <p:pRg st="4" end="4"/>
+                                            </p:txEl>
+                                          </p:spTgt>
+                                        </p:tgtEl>
+                                        <p:attrNameLst>
+                                          <p:attrName>style.visibility</p:attrName>
+                                        </p:attrNameLst>
+                                      </p:cBhvr>
+                                      <p:to>
+                                        <p:strVal val="visible"/>
+                                      </p:to>
+                                    </p:set>
+                                  </p:childTnLst>
+                                </p:cTn>
+                              </p:par>
+                            </p:childTnLst>
+                          </p:cTn>
+                        </p:par>
+                        <p:par>
+                          <p:cTn id="24" fill="hold">
+                            <p:stCondLst>
+                              <p:cond delay="1202"/>
+                            </p:stCondLst>
+                            <p:childTnLst>
+                              <p:par>
+                                <p:cTn id="25" presetID="1" presetClass="entr" presetSubtype="0" fill="hold" grpId="0" nodeType="afterEffect">
+                                  <p:stCondLst>
+                                    <p:cond delay="0"/>
+                                  </p:stCondLst>
+                                  <p:iterate type="wd">
+                                    <p:tmAbs val="100"/>
+                                  </p:iterate>
+                                  <p:childTnLst>
+                                    <p:set>
+                                      <p:cBhvr>
+                                        <p:cTn id="26" dur="1" fill="hold">
+                                          <p:stCondLst>
+                                            <p:cond delay="0"/>
+                                          </p:stCondLst>
+                                        </p:cTn>
+                                        <p:tgtEl>
+                                          <p:spTgt spid="3">
+                                            <p:txEl>
+                                              <p:pRg st="5" end="5"/>
+                                            </p:txEl>
+                                          </p:spTgt>
+                                        </p:tgtEl>
+                                        <p:attrNameLst>
+                                          <p:attrName>style.visibility</p:attrName>
+                                        </p:attrNameLst>
+                                      </p:cBhvr>
+                                      <p:to>
+                                        <p:strVal val="visible"/>
+                                      </p:to>
+                                    </p:set>
+                                  </p:childTnLst>
+                                </p:cTn>
+                              </p:par>
+                            </p:childTnLst>
+                          </p:cTn>
+                        </p:par>
+                        <p:par>
+                          <p:cTn id="27" fill="hold">
+                            <p:stCondLst>
+                              <p:cond delay="1903"/>
+                            </p:stCondLst>
+                            <p:childTnLst>
+                              <p:par>
+                                <p:cTn id="28" presetID="1" presetClass="entr" presetSubtype="0" fill="hold" grpId="0" nodeType="afterEffect">
+                                  <p:stCondLst>
+                                    <p:cond delay="0"/>
+                                  </p:stCondLst>
+                                  <p:iterate type="wd">
+                                    <p:tmAbs val="100"/>
+                                  </p:iterate>
+                                  <p:childTnLst>
+                                    <p:set>
+                                      <p:cBhvr>
+                                        <p:cTn id="29" dur="1" fill="hold">
+                                          <p:stCondLst>
+                                            <p:cond delay="0"/>
+                                          </p:stCondLst>
+                                        </p:cTn>
+                                        <p:tgtEl>
+                                          <p:spTgt spid="3">
+                                            <p:txEl>
+                                              <p:pRg st="6" end="6"/>
+                                            </p:txEl>
+                                          </p:spTgt>
+                                        </p:tgtEl>
+                                        <p:attrNameLst>
+                                          <p:attrName>style.visibility</p:attrName>
+                                        </p:attrNameLst>
+                                      </p:cBhvr>
+                                      <p:to>
+                                        <p:strVal val="visible"/>
+                                      </p:to>
+                                    </p:set>
+                                  </p:childTnLst>
+                                </p:cTn>
+                              </p:par>
+                            </p:childTnLst>
+                          </p:cTn>
+                        </p:par>
+                        <p:par>
+                          <p:cTn id="30" fill="hold">
+                            <p:stCondLst>
+                              <p:cond delay="3304"/>
+                            </p:stCondLst>
+                            <p:childTnLst>
+                              <p:par>
+                                <p:cTn id="31" presetID="1" presetClass="entr" presetSubtype="0" fill="hold" grpId="0" nodeType="afterEffect">
+                                  <p:stCondLst>
+                                    <p:cond delay="0"/>
+                                  </p:stCondLst>
+                                  <p:iterate type="wd">
+                                    <p:tmAbs val="100"/>
+                                  </p:iterate>
+                                  <p:childTnLst>
+                                    <p:set>
+                                      <p:cBhvr>
+                                        <p:cTn id="32" dur="1" fill="hold">
+                                          <p:stCondLst>
+                                            <p:cond delay="0"/>
+                                          </p:stCondLst>
+                                        </p:cTn>
+                                        <p:tgtEl>
+                                          <p:spTgt spid="3">
+                                            <p:txEl>
+                                              <p:pRg st="7" end="7"/>
+                                            </p:txEl>
+                                          </p:spTgt>
+                                        </p:tgtEl>
+                                        <p:attrNameLst>
+                                          <p:attrName>style.visibility</p:attrName>
+                                        </p:attrNameLst>
+                                      </p:cBhvr>
+                                      <p:to>
+                                        <p:strVal val="visible"/>
+                                      </p:to>
+                                    </p:set>
+                                  </p:childTnLst>
+                                </p:cTn>
+                              </p:par>
+                            </p:childTnLst>
+                          </p:cTn>
+                        </p:par>
+                        <p:par>
+                          <p:cTn id="33" fill="hold">
+                            <p:stCondLst>
+                              <p:cond delay="4005"/>
+                            </p:stCondLst>
+                            <p:childTnLst>
+                              <p:par>
+                                <p:cTn id="34" presetID="1" presetClass="entr" presetSubtype="0" fill="hold" grpId="0" nodeType="afterEffect">
+                                  <p:stCondLst>
+                                    <p:cond delay="0"/>
+                                  </p:stCondLst>
+                                  <p:iterate type="wd">
+                                    <p:tmAbs val="100"/>
+                                  </p:iterate>
+                                  <p:childTnLst>
+                                    <p:set>
+                                      <p:cBhvr>
+                                        <p:cTn id="35" dur="1" fill="hold">
+                                          <p:stCondLst>
+                                            <p:cond delay="0"/>
+                                          </p:stCondLst>
+                                        </p:cTn>
+                                        <p:tgtEl>
+                                          <p:spTgt spid="3">
+                                            <p:txEl>
+                                              <p:pRg st="8" end="8"/>
+                                            </p:txEl>
+                                          </p:spTgt>
+                                        </p:tgtEl>
+                                        <p:attrNameLst>
+                                          <p:attrName>style.visibility</p:attrName>
+                                        </p:attrNameLst>
+                                      </p:cBhvr>
+                                      <p:to>
+                                        <p:strVal val="visible"/>
+                                      </p:to>
+                                    </p:set>
+                                  </p:childTnLst>
+                                </p:cTn>
+                              </p:par>
+                            </p:childTnLst>
+                          </p:cTn>
+                        </p:par>
+                      </p:childTnLst>
+                    </p:cTn>
+                  </p:par>
+                  <p:par>
+                    <p:cTn id="36" fill="hold">
+                      <p:stCondLst>
+                        <p:cond delay="indefinite"/>
+                      </p:stCondLst>
+                      <p:childTnLst>
+                        <p:par>
+                          <p:cTn id="37" fill="hold">
+                            <p:stCondLst>
+                              <p:cond delay="0"/>
+                            </p:stCondLst>
+                            <p:childTnLst>
+                              <p:par>
+                                <p:cTn id="38" presetID="1" presetClass="entr" presetSubtype="0" fill="hold" grpId="0" nodeType="clickEffect">
+                                  <p:stCondLst>
+                                    <p:cond delay="0"/>
+                                  </p:stCondLst>
+                                  <p:childTnLst>
+                                    <p:set>
+                                      <p:cBhvr>
+                                        <p:cTn id="39" dur="1" fill="hold">
+                                          <p:stCondLst>
+                                            <p:cond delay="0"/>
+                                          </p:stCondLst>
+                                        </p:cTn>
+                                        <p:tgtEl>
+                                          <p:spTgt spid="3">
+                                            <p:txEl>
+                                              <p:pRg st="10" end="10"/>
+                                            </p:txEl>
+                                          </p:spTgt>
+                                        </p:tgtEl>
+                                        <p:attrNameLst>
+                                          <p:attrName>style.visibility</p:attrName>
+                                        </p:attrNameLst>
+                                      </p:cBhvr>
+                                      <p:to>
+                                        <p:strVal val="visible"/>
+                                      </p:to>
+                                    </p:set>
+                                  </p:childTnLst>
+                                </p:cTn>
+                              </p:par>
+                            </p:childTnLst>
+                          </p:cTn>
+                        </p:par>
+                      </p:childTnLst>
+                    </p:cTn>
+                  </p:par>
+                  <p:par>
+                    <p:cTn id="40" fill="hold">
+                      <p:stCondLst>
+                        <p:cond delay="indefinite"/>
+                      </p:stCondLst>
+                      <p:childTnLst>
+                        <p:par>
+                          <p:cTn id="41" fill="hold">
+                            <p:stCondLst>
+                              <p:cond delay="0"/>
+                            </p:stCondLst>
+                            <p:childTnLst>
+                              <p:par>
+                                <p:cTn id="42" presetID="1" presetClass="entr" presetSubtype="0" fill="hold" grpId="0" nodeType="clickEffect">
+                                  <p:stCondLst>
+                                    <p:cond delay="0"/>
+                                  </p:stCondLst>
+                                  <p:childTnLst>
+                                    <p:set>
+                                      <p:cBhvr>
+                                        <p:cTn id="43" dur="1" fill="hold">
+                                          <p:stCondLst>
+                                            <p:cond delay="0"/>
+                                          </p:stCondLst>
+                                        </p:cTn>
+                                        <p:tgtEl>
+                                          <p:spTgt spid="3">
+                                            <p:txEl>
+                                              <p:pRg st="11" end="11"/>
+                                            </p:txEl>
+                                          </p:spTgt>
+                                        </p:tgtEl>
+                                        <p:attrNameLst>
+                                          <p:attrName>style.visibility</p:attrName>
+                                        </p:attrNameLst>
+                                      </p:cBhvr>
+                                      <p:to>
+                                        <p:strVal val="visible"/>
+                                      </p:to>
+                                    </p:set>
+                                  </p:childTnLst>
+                                </p:cTn>
+                              </p:par>
+                            </p:childTnLst>
+                          </p:cTn>
+                        </p:par>
+                      </p:childTnLst>
+                    </p:cTn>
+                  </p:par>
+                  <p:par>
+                    <p:cTn id="44" fill="hold">
+                      <p:stCondLst>
+                        <p:cond delay="indefinite"/>
+                      </p:stCondLst>
+                      <p:childTnLst>
+                        <p:par>
+                          <p:cTn id="45" fill="hold">
+                            <p:stCondLst>
+                              <p:cond delay="0"/>
+                            </p:stCondLst>
+                            <p:childTnLst>
+                              <p:par>
+                                <p:cTn id="46" presetID="1" presetClass="entr" presetSubtype="0" fill="hold" grpId="0" nodeType="clickEffect">
+                                  <p:stCondLst>
+                                    <p:cond delay="0"/>
+                                  </p:stCondLst>
+                                  <p:childTnLst>
+                                    <p:set>
+                                      <p:cBhvr>
+                                        <p:cTn id="47" dur="1" fill="hold">
+                                          <p:stCondLst>
+                                            <p:cond delay="0"/>
+                                          </p:stCondLst>
+                                        </p:cTn>
+                                        <p:tgtEl>
+                                          <p:spTgt spid="3">
+                                            <p:txEl>
+                                              <p:pRg st="12" end="12"/>
+                                            </p:txEl>
+                                          </p:spTgt>
+                                        </p:tgtEl>
+                                        <p:attrNameLst>
+                                          <p:attrName>style.visibility</p:attrName>
+                                        </p:attrNameLst>
+                                      </p:cBhvr>
+                                      <p:to>
+                                        <p:strVal val="visible"/>
+                                      </p:to>
+                                    </p:set>
+                                  </p:childTnLst>
+                                </p:cTn>
+                              </p:par>
+                            </p:childTnLst>
+                          </p:cTn>
+                        </p:par>
+                      </p:childTnLst>
+                    </p:cTn>
+                  </p:par>
+                  <p:par>
+                    <p:cTn id="48" fill="hold">
+                      <p:stCondLst>
+                        <p:cond delay="indefinite"/>
+                      </p:stCondLst>
+                      <p:childTnLst>
+                        <p:par>
+                          <p:cTn id="49" fill="hold">
+                            <p:stCondLst>
+                              <p:cond delay="0"/>
+                            </p:stCondLst>
+                            <p:childTnLst>
+                              <p:par>
+                                <p:cTn id="50" presetID="1" presetClass="entr" presetSubtype="0" fill="hold" grpId="0" nodeType="clickEffect">
+                                  <p:stCondLst>
+                                    <p:cond delay="0"/>
+                                  </p:stCondLst>
+                                  <p:childTnLst>
+                                    <p:set>
+                                      <p:cBhvr>
+                                        <p:cTn id="51" dur="1" fill="hold">
+                                          <p:stCondLst>
+                                            <p:cond delay="0"/>
+                                          </p:stCondLst>
+                                        </p:cTn>
+                                        <p:tgtEl>
+                                          <p:spTgt spid="3">
+                                            <p:txEl>
+                                              <p:pRg st="13" end="13"/>
+                                            </p:txEl>
+                                          </p:spTgt>
+                                        </p:tgtEl>
+                                        <p:attrNameLst>
+                                          <p:attrName>style.visibility</p:attrName>
+                                        </p:attrNameLst>
+                                      </p:cBhvr>
+                                      <p:to>
+                                        <p:strVal val="visible"/>
+                                      </p:to>
+                                    </p:set>
+                                  </p:childTnLst>
+                                </p:cTn>
+                              </p:par>
+                            </p:childTnLst>
+                          </p:cTn>
+                        </p:par>
+                      </p:childTnLst>
+                    </p:cTn>
+                  </p:par>
+                </p:childTnLst>
+              </p:cTn>
+              <p:prevCondLst>
+                <p:cond evt="onPrev" delay="0">
+                  <p:tgtEl>
+                    <p:sldTgt/>
+                  </p:tgtEl>
+                </p:cond>
+              </p:prevCondLst>
+              <p:nextCondLst>
+                <p:cond evt="onNext" delay="0">
+                  <p:tgtEl>
+                    <p:sldTgt/>
+                  </p:tgtEl>
+                </p:cond>
+              </p:nextCondLst>
+            </p:seq>
+          </p:childTnLst>
+        </p:cTn>
+      </p:par>
+    </p:tnLst>
+    <p:bldLst>
+      <p:bldP spid="3" grpId="0" uiExpand="1" build="p"/>
+    </p:bldLst>
+  </p:timing>
+</p:sld>
+</file>
+
 <file path=ppt/slides/slide18.xml><?xml version="1.0" encoding="utf-8"?>
+<p:sld xmlns:a="http://schemas.openxmlformats.org/drawingml/2006/main" xmlns:r="http://schemas.openxmlformats.org/officeDocument/2006/relationships" xmlns:p="http://schemas.openxmlformats.org/presentationml/2006/main">
+  <p:cSld>
+    <p:spTree>
+      <p:nvGrpSpPr>
+        <p:cNvPr id="1" name=""/>
+        <p:cNvGrpSpPr/>
+        <p:nvPr/>
+      </p:nvGrpSpPr>
+      <p:grpSpPr>
+        <a:xfrm>
+          <a:off x="0" y="0"/>
+          <a:ext cx="0" cy="0"/>
+          <a:chOff x="0" y="0"/>
+          <a:chExt cx="0" cy="0"/>
+        </a:xfrm>
+      </p:grpSpPr>
+      <p:sp>
+        <p:nvSpPr>
+          <p:cNvPr id="2" name="Titel 1">
+            <a:extLst>
+              <a:ext uri="{FF2B5EF4-FFF2-40B4-BE49-F238E27FC236}">
+                <a16:creationId xmlns:a16="http://schemas.microsoft.com/office/drawing/2014/main" id="{D75EE4B2-9928-8838-B018-3D4DD8127569}"/>
+              </a:ext>
+            </a:extLst>
+          </p:cNvPr>
+          <p:cNvSpPr>
+            <a:spLocks noGrp="1"/>
+          </p:cNvSpPr>
+          <p:nvPr>
+            <p:ph type="title"/>
+          </p:nvPr>
+        </p:nvSpPr>
+        <p:spPr/>
+        <p:txBody>
+          <a:bodyPr/>
+          <a:lstStyle/>
+          <a:p>
+            <a:r>
+              <a:rPr lang="en-US" dirty="0"/>
+              <a:t>How recursive CTEs work</a:t>
+            </a:r>
+          </a:p>
+        </p:txBody>
+      </p:sp>
+      <p:sp>
+        <p:nvSpPr>
+          <p:cNvPr id="3" name="Inhaltsplatzhalter 2">
+            <a:extLst>
+              <a:ext uri="{FF2B5EF4-FFF2-40B4-BE49-F238E27FC236}">
+                <a16:creationId xmlns:a16="http://schemas.microsoft.com/office/drawing/2014/main" id="{7BAA677E-42B7-2E1E-B748-D9648204214C}"/>
+              </a:ext>
+            </a:extLst>
+          </p:cNvPr>
+          <p:cNvSpPr>
+            <a:spLocks noGrp="1"/>
+          </p:cNvSpPr>
+          <p:nvPr>
+            <p:ph idx="1"/>
+          </p:nvPr>
+        </p:nvSpPr>
+        <p:spPr/>
+        <p:txBody>
+          <a:bodyPr>
+            <a:normAutofit/>
+          </a:bodyPr>
+          <a:lstStyle/>
+          <a:p>
+            <a:pPr marL="0" indent="0">
+              <a:buNone/>
+            </a:pPr>
+            <a:r>
+              <a:rPr lang="en-US" sz="1400" dirty="0">
+                <a:solidFill>
+                  <a:srgbClr val="808080"/>
+                </a:solidFill>
+                <a:highlight>
+                  <a:srgbClr val="FFFFFF"/>
+                </a:highlight>
+                <a:latin typeface="Cascadia Mono" panose="020B0609020000020004" pitchFamily="49" charset="0"/>
+              </a:rPr>
+              <a:t>;</a:t>
+            </a:r>
+            <a:r>
+              <a:rPr lang="en-US" sz="1400" dirty="0">
+                <a:solidFill>
+                  <a:srgbClr val="0000FF"/>
+                </a:solidFill>
+                <a:highlight>
+                  <a:srgbClr val="FFFFFF"/>
+                </a:highlight>
+                <a:latin typeface="Cascadia Mono" panose="020B0609020000020004" pitchFamily="49" charset="0"/>
+              </a:rPr>
+              <a:t>WITH</a:t>
+            </a:r>
+            <a:r>
+              <a:rPr lang="en-US" sz="1400" dirty="0">
+                <a:solidFill>
+                  <a:srgbClr val="000000"/>
+                </a:solidFill>
+                <a:highlight>
+                  <a:srgbClr val="FFFFFF"/>
+                </a:highlight>
+                <a:latin typeface="Cascadia Mono" panose="020B0609020000020004" pitchFamily="49" charset="0"/>
+              </a:rPr>
+              <a:t> d </a:t>
+            </a:r>
+            <a:r>
+              <a:rPr lang="en-US" sz="1400" dirty="0">
+                <a:solidFill>
+                  <a:schemeClr val="accent6">
+                    <a:lumMod val="75000"/>
+                  </a:schemeClr>
+                </a:solidFill>
+                <a:highlight>
+                  <a:srgbClr val="FFFFFF"/>
+                </a:highlight>
+                <a:latin typeface="Cascadia Mono" panose="020B0609020000020004" pitchFamily="49" charset="0"/>
+              </a:rPr>
+              <a:t>/* beginning the definition with the name of the CTE */</a:t>
+            </a:r>
+            <a:endParaRPr lang="en-US" sz="1400" dirty="0">
+              <a:solidFill>
+                <a:srgbClr val="000000"/>
+              </a:solidFill>
+              <a:highlight>
+                <a:srgbClr val="FFFFFF"/>
+              </a:highlight>
+              <a:latin typeface="Cascadia Mono" panose="020B0609020000020004" pitchFamily="49" charset="0"/>
+            </a:endParaRPr>
+          </a:p>
+          <a:p>
+            <a:pPr marL="0" indent="0">
+              <a:buNone/>
+            </a:pPr>
+            <a:r>
+              <a:rPr lang="en-US" sz="1400" dirty="0">
+                <a:solidFill>
+                  <a:srgbClr val="0000FF"/>
+                </a:solidFill>
+                <a:highlight>
+                  <a:srgbClr val="FFFFFF"/>
+                </a:highlight>
+                <a:latin typeface="Cascadia Mono" panose="020B0609020000020004" pitchFamily="49" charset="0"/>
+              </a:rPr>
+              <a:t>AS</a:t>
+            </a:r>
+            <a:endParaRPr lang="en-US" sz="1400" dirty="0">
+              <a:solidFill>
+                <a:srgbClr val="000000"/>
+              </a:solidFill>
+              <a:highlight>
+                <a:srgbClr val="FFFFFF"/>
+              </a:highlight>
+              <a:latin typeface="Cascadia Mono" panose="020B0609020000020004" pitchFamily="49" charset="0"/>
+            </a:endParaRPr>
+          </a:p>
+          <a:p>
+            <a:pPr marL="0" indent="0">
+              <a:buNone/>
+            </a:pPr>
+            <a:r>
+              <a:rPr lang="en-US" sz="1400" dirty="0">
+                <a:solidFill>
+                  <a:srgbClr val="808080"/>
+                </a:solidFill>
+                <a:highlight>
+                  <a:srgbClr val="FFFFFF"/>
+                </a:highlight>
+                <a:latin typeface="Cascadia Mono" panose="020B0609020000020004" pitchFamily="49" charset="0"/>
+              </a:rPr>
+              <a:t>(</a:t>
+            </a:r>
+            <a:endParaRPr lang="en-US" sz="1400" dirty="0">
+              <a:solidFill>
+                <a:srgbClr val="000000"/>
+              </a:solidFill>
+              <a:highlight>
+                <a:srgbClr val="FFFFFF"/>
+              </a:highlight>
+              <a:latin typeface="Cascadia Mono" panose="020B0609020000020004" pitchFamily="49" charset="0"/>
+            </a:endParaRPr>
+          </a:p>
+          <a:p>
+            <a:pPr marL="0" indent="0">
+              <a:buNone/>
+            </a:pPr>
+            <a:r>
+              <a:rPr lang="en-US" sz="1400" dirty="0">
+                <a:solidFill>
+                  <a:srgbClr val="0000FF"/>
+                </a:solidFill>
+                <a:highlight>
+                  <a:srgbClr val="FFFFFF"/>
+                </a:highlight>
+                <a:latin typeface="Cascadia Mono" panose="020B0609020000020004" pitchFamily="49" charset="0"/>
+              </a:rPr>
+              <a:t>    SELECT </a:t>
+            </a:r>
+            <a:r>
+              <a:rPr lang="en-US" sz="1400" dirty="0">
+                <a:solidFill>
+                  <a:srgbClr val="FF00FF"/>
+                </a:solidFill>
+                <a:highlight>
+                  <a:srgbClr val="FFFFFF"/>
+                </a:highlight>
+                <a:latin typeface="Cascadia Mono" panose="020B0609020000020004" pitchFamily="49" charset="0"/>
+              </a:rPr>
+              <a:t>CAST</a:t>
+            </a:r>
+            <a:r>
+              <a:rPr lang="en-US" sz="1400" dirty="0">
+                <a:solidFill>
+                  <a:srgbClr val="808080"/>
+                </a:solidFill>
+                <a:highlight>
+                  <a:srgbClr val="FFFFFF"/>
+                </a:highlight>
+                <a:latin typeface="Cascadia Mono" panose="020B0609020000020004" pitchFamily="49" charset="0"/>
+              </a:rPr>
+              <a:t>(</a:t>
+            </a:r>
+            <a:r>
+              <a:rPr lang="en-US" sz="1400" dirty="0">
+                <a:solidFill>
+                  <a:srgbClr val="FF00FF"/>
+                </a:solidFill>
+                <a:highlight>
+                  <a:srgbClr val="FFFFFF"/>
+                </a:highlight>
+                <a:latin typeface="Cascadia Mono" panose="020B0609020000020004" pitchFamily="49" charset="0"/>
+              </a:rPr>
+              <a:t>GETDATE</a:t>
+            </a:r>
+            <a:r>
+              <a:rPr lang="en-US" sz="1400" dirty="0">
+                <a:solidFill>
+                  <a:srgbClr val="808080"/>
+                </a:solidFill>
+                <a:highlight>
+                  <a:srgbClr val="FFFFFF"/>
+                </a:highlight>
+                <a:latin typeface="Cascadia Mono" panose="020B0609020000020004" pitchFamily="49" charset="0"/>
+              </a:rPr>
+              <a:t>()</a:t>
+            </a:r>
+            <a:r>
+              <a:rPr lang="en-US" sz="1400" dirty="0">
+                <a:solidFill>
+                  <a:srgbClr val="000000"/>
+                </a:solidFill>
+                <a:highlight>
+                  <a:srgbClr val="FFFFFF"/>
+                </a:highlight>
+                <a:latin typeface="Cascadia Mono" panose="020B0609020000020004" pitchFamily="49" charset="0"/>
+              </a:rPr>
+              <a:t> </a:t>
+            </a:r>
+            <a:r>
+              <a:rPr lang="en-US" sz="1400" dirty="0">
+                <a:solidFill>
+                  <a:srgbClr val="0000FF"/>
+                </a:solidFill>
+                <a:highlight>
+                  <a:srgbClr val="FFFFFF"/>
+                </a:highlight>
+                <a:latin typeface="Cascadia Mono" panose="020B0609020000020004" pitchFamily="49" charset="0"/>
+              </a:rPr>
+              <a:t>AS</a:t>
+            </a:r>
+            <a:r>
+              <a:rPr lang="en-US" sz="1400" dirty="0">
+                <a:solidFill>
+                  <a:srgbClr val="000000"/>
+                </a:solidFill>
+                <a:highlight>
+                  <a:srgbClr val="FFFFFF"/>
+                </a:highlight>
+                <a:latin typeface="Cascadia Mono" panose="020B0609020000020004" pitchFamily="49" charset="0"/>
+              </a:rPr>
+              <a:t> </a:t>
+            </a:r>
+            <a:r>
+              <a:rPr lang="en-US" sz="1400" dirty="0">
+                <a:solidFill>
+                  <a:srgbClr val="0000FF"/>
+                </a:solidFill>
+                <a:highlight>
+                  <a:srgbClr val="FFFFFF"/>
+                </a:highlight>
+                <a:latin typeface="Cascadia Mono" panose="020B0609020000020004" pitchFamily="49" charset="0"/>
+              </a:rPr>
+              <a:t>DATE</a:t>
+            </a:r>
+            <a:r>
+              <a:rPr lang="en-US" sz="1400" dirty="0">
+                <a:solidFill>
+                  <a:srgbClr val="808080"/>
+                </a:solidFill>
+                <a:highlight>
+                  <a:srgbClr val="FFFFFF"/>
+                </a:highlight>
+                <a:latin typeface="Cascadia Mono" panose="020B0609020000020004" pitchFamily="49" charset="0"/>
+              </a:rPr>
+              <a:t>) </a:t>
+            </a:r>
+            <a:r>
+              <a:rPr lang="en-US" sz="1400" dirty="0">
+                <a:solidFill>
+                  <a:srgbClr val="0000FF"/>
+                </a:solidFill>
+                <a:highlight>
+                  <a:srgbClr val="FFFFFF"/>
+                </a:highlight>
+                <a:latin typeface="Cascadia Mono" panose="020B0609020000020004" pitchFamily="49" charset="0"/>
+              </a:rPr>
+              <a:t>AS </a:t>
+            </a:r>
+            <a:r>
+              <a:rPr lang="en-US" sz="1400" dirty="0" err="1">
+                <a:solidFill>
+                  <a:srgbClr val="000000"/>
+                </a:solidFill>
+                <a:highlight>
+                  <a:srgbClr val="FFFFFF"/>
+                </a:highlight>
+                <a:latin typeface="Cascadia Mono" panose="020B0609020000020004" pitchFamily="49" charset="0"/>
+              </a:rPr>
+              <a:t>date_col</a:t>
+            </a:r>
+            <a:r>
+              <a:rPr lang="en-US" sz="1400" dirty="0">
+                <a:solidFill>
+                  <a:srgbClr val="000000"/>
+                </a:solidFill>
+                <a:highlight>
+                  <a:srgbClr val="FFFFFF"/>
+                </a:highlight>
+                <a:latin typeface="Cascadia Mono" panose="020B0609020000020004" pitchFamily="49" charset="0"/>
+              </a:rPr>
+              <a:t>	</a:t>
+            </a:r>
+            <a:r>
+              <a:rPr lang="en-US" sz="1400" b="1" dirty="0">
+                <a:solidFill>
+                  <a:schemeClr val="accent6">
+                    <a:lumMod val="75000"/>
+                  </a:schemeClr>
+                </a:solidFill>
+                <a:highlight>
+                  <a:srgbClr val="FFFFFF"/>
+                </a:highlight>
+                <a:latin typeface="Cascadia Mono" panose="020B0609020000020004" pitchFamily="49" charset="0"/>
+              </a:rPr>
+              <a:t>/* Anchor with the first set */</a:t>
+            </a:r>
+          </a:p>
+          <a:p>
+            <a:pPr marL="0" indent="0">
+              <a:buNone/>
+            </a:pPr>
+            <a:r>
+              <a:rPr lang="en-US" sz="1400" dirty="0">
+                <a:solidFill>
+                  <a:srgbClr val="0000FF"/>
+                </a:solidFill>
+                <a:highlight>
+                  <a:srgbClr val="FFFFFF"/>
+                </a:highlight>
+                <a:latin typeface="Cascadia Mono" panose="020B0609020000020004" pitchFamily="49" charset="0"/>
+              </a:rPr>
+              <a:t>    UNION</a:t>
+            </a:r>
+            <a:r>
+              <a:rPr lang="en-US" sz="1400" dirty="0">
+                <a:solidFill>
+                  <a:srgbClr val="000000"/>
+                </a:solidFill>
+                <a:highlight>
+                  <a:srgbClr val="FFFFFF"/>
+                </a:highlight>
+                <a:latin typeface="Cascadia Mono" panose="020B0609020000020004" pitchFamily="49" charset="0"/>
+              </a:rPr>
+              <a:t> </a:t>
+            </a:r>
+            <a:r>
+              <a:rPr lang="en-US" sz="1400" dirty="0">
+                <a:solidFill>
+                  <a:srgbClr val="808080"/>
+                </a:solidFill>
+                <a:highlight>
+                  <a:srgbClr val="FFFFFF"/>
+                </a:highlight>
+                <a:latin typeface="Cascadia Mono" panose="020B0609020000020004" pitchFamily="49" charset="0"/>
+              </a:rPr>
+              <a:t>ALL</a:t>
+            </a:r>
+            <a:endParaRPr lang="en-US" sz="1400" dirty="0">
+              <a:solidFill>
+                <a:srgbClr val="000000"/>
+              </a:solidFill>
+              <a:highlight>
+                <a:srgbClr val="FFFFFF"/>
+              </a:highlight>
+              <a:latin typeface="Cascadia Mono" panose="020B0609020000020004" pitchFamily="49" charset="0"/>
+            </a:endParaRPr>
+          </a:p>
+          <a:p>
+            <a:pPr marL="0" indent="0">
+              <a:buNone/>
+            </a:pPr>
+            <a:r>
+              <a:rPr lang="en-US" sz="1400" dirty="0">
+                <a:solidFill>
+                  <a:srgbClr val="0000FF"/>
+                </a:solidFill>
+                <a:highlight>
+                  <a:srgbClr val="FFFFFF"/>
+                </a:highlight>
+                <a:latin typeface="Cascadia Mono" panose="020B0609020000020004" pitchFamily="49" charset="0"/>
+              </a:rPr>
+              <a:t>    SELECT </a:t>
+            </a:r>
+            <a:r>
+              <a:rPr lang="en-US" sz="1400" dirty="0">
+                <a:solidFill>
+                  <a:srgbClr val="FF00FF"/>
+                </a:solidFill>
+                <a:highlight>
+                  <a:srgbClr val="FFFFFF"/>
+                </a:highlight>
+                <a:latin typeface="Cascadia Mono" panose="020B0609020000020004" pitchFamily="49" charset="0"/>
+              </a:rPr>
+              <a:t>DATEADD</a:t>
+            </a:r>
+            <a:r>
+              <a:rPr lang="en-US" sz="1400" dirty="0">
+                <a:solidFill>
+                  <a:srgbClr val="808080"/>
+                </a:solidFill>
+                <a:highlight>
+                  <a:srgbClr val="FFFFFF"/>
+                </a:highlight>
+                <a:latin typeface="Cascadia Mono" panose="020B0609020000020004" pitchFamily="49" charset="0"/>
+              </a:rPr>
+              <a:t>(</a:t>
+            </a:r>
+            <a:r>
+              <a:rPr lang="en-US" sz="1400" dirty="0">
+                <a:solidFill>
+                  <a:srgbClr val="FF00FF"/>
+                </a:solidFill>
+                <a:highlight>
+                  <a:srgbClr val="FFFFFF"/>
+                </a:highlight>
+                <a:latin typeface="Cascadia Mono" panose="020B0609020000020004" pitchFamily="49" charset="0"/>
+              </a:rPr>
+              <a:t>DAY</a:t>
+            </a:r>
+            <a:r>
+              <a:rPr lang="en-US" sz="1400" dirty="0">
+                <a:solidFill>
+                  <a:srgbClr val="808080"/>
+                </a:solidFill>
+                <a:highlight>
+                  <a:srgbClr val="FFFFFF"/>
+                </a:highlight>
+                <a:latin typeface="Cascadia Mono" panose="020B0609020000020004" pitchFamily="49" charset="0"/>
+              </a:rPr>
+              <a:t>,</a:t>
+            </a:r>
+            <a:r>
+              <a:rPr lang="en-US" sz="1400" dirty="0">
+                <a:solidFill>
+                  <a:srgbClr val="000000"/>
+                </a:solidFill>
+                <a:highlight>
+                  <a:srgbClr val="FFFFFF"/>
+                </a:highlight>
+                <a:latin typeface="Cascadia Mono" panose="020B0609020000020004" pitchFamily="49" charset="0"/>
+              </a:rPr>
+              <a:t> 1</a:t>
+            </a:r>
+            <a:r>
+              <a:rPr lang="en-US" sz="1400" dirty="0">
+                <a:solidFill>
+                  <a:srgbClr val="808080"/>
+                </a:solidFill>
+                <a:highlight>
+                  <a:srgbClr val="FFFFFF"/>
+                </a:highlight>
+                <a:latin typeface="Cascadia Mono" panose="020B0609020000020004" pitchFamily="49" charset="0"/>
+              </a:rPr>
+              <a:t>,</a:t>
+            </a:r>
+            <a:r>
+              <a:rPr lang="en-US" sz="1400" dirty="0">
+                <a:solidFill>
+                  <a:srgbClr val="000000"/>
+                </a:solidFill>
+                <a:highlight>
+                  <a:srgbClr val="FFFFFF"/>
+                </a:highlight>
+                <a:latin typeface="Cascadia Mono" panose="020B0609020000020004" pitchFamily="49" charset="0"/>
+              </a:rPr>
+              <a:t> </a:t>
+            </a:r>
+            <a:r>
+              <a:rPr lang="en-US" sz="1400" dirty="0" err="1">
+                <a:solidFill>
+                  <a:srgbClr val="000000"/>
+                </a:solidFill>
+                <a:highlight>
+                  <a:srgbClr val="FFFFFF"/>
+                </a:highlight>
+                <a:latin typeface="Cascadia Mono" panose="020B0609020000020004" pitchFamily="49" charset="0"/>
+              </a:rPr>
+              <a:t>date_col</a:t>
+            </a:r>
+            <a:r>
+              <a:rPr lang="en-US" sz="1400" dirty="0">
+                <a:solidFill>
+                  <a:srgbClr val="808080"/>
+                </a:solidFill>
+                <a:highlight>
+                  <a:srgbClr val="FFFFFF"/>
+                </a:highlight>
+                <a:latin typeface="Cascadia Mono" panose="020B0609020000020004" pitchFamily="49" charset="0"/>
+              </a:rPr>
+              <a:t>) </a:t>
+            </a:r>
+            <a:r>
+              <a:rPr lang="en-US" sz="1400" dirty="0">
+                <a:solidFill>
+                  <a:srgbClr val="0000FF"/>
+                </a:solidFill>
+                <a:highlight>
+                  <a:srgbClr val="FFFFFF"/>
+                </a:highlight>
+                <a:latin typeface="Cascadia Mono" panose="020B0609020000020004" pitchFamily="49" charset="0"/>
+              </a:rPr>
+              <a:t>AS </a:t>
+            </a:r>
+            <a:r>
+              <a:rPr lang="en-US" sz="1400" dirty="0" err="1">
+                <a:solidFill>
+                  <a:srgbClr val="000000"/>
+                </a:solidFill>
+                <a:highlight>
+                  <a:srgbClr val="FFFFFF"/>
+                </a:highlight>
+                <a:latin typeface="Cascadia Mono" panose="020B0609020000020004" pitchFamily="49" charset="0"/>
+              </a:rPr>
+              <a:t>date_col</a:t>
+            </a:r>
+            <a:r>
+              <a:rPr lang="en-US" sz="1400" dirty="0">
+                <a:solidFill>
+                  <a:srgbClr val="000000"/>
+                </a:solidFill>
+                <a:highlight>
+                  <a:srgbClr val="FFFFFF"/>
+                </a:highlight>
+                <a:latin typeface="Cascadia Mono" panose="020B0609020000020004" pitchFamily="49" charset="0"/>
+              </a:rPr>
+              <a:t>    </a:t>
+            </a:r>
+            <a:r>
+              <a:rPr lang="en-US" sz="1400" b="1" dirty="0">
+                <a:solidFill>
+                  <a:schemeClr val="accent6">
+                    <a:lumMod val="75000"/>
+                  </a:schemeClr>
+                </a:solidFill>
+                <a:highlight>
+                  <a:srgbClr val="FFFFFF"/>
+                </a:highlight>
+                <a:latin typeface="Cascadia Mono" panose="020B0609020000020004" pitchFamily="49" charset="0"/>
+              </a:rPr>
+              <a:t>/* Sub Set referring to previous set */</a:t>
+            </a:r>
+          </a:p>
+          <a:p>
+            <a:pPr marL="0" indent="0">
+              <a:buNone/>
+            </a:pPr>
+            <a:r>
+              <a:rPr lang="en-US" sz="1400" dirty="0">
+                <a:solidFill>
+                  <a:srgbClr val="0000FF"/>
+                </a:solidFill>
+                <a:highlight>
+                  <a:srgbClr val="FFFFFF"/>
+                </a:highlight>
+                <a:latin typeface="Cascadia Mono" panose="020B0609020000020004" pitchFamily="49" charset="0"/>
+              </a:rPr>
+              <a:t>    FROM </a:t>
+            </a:r>
+            <a:r>
+              <a:rPr lang="en-US" sz="1400" dirty="0">
+                <a:solidFill>
+                  <a:srgbClr val="000000"/>
+                </a:solidFill>
+                <a:highlight>
+                  <a:srgbClr val="FFFFFF"/>
+                </a:highlight>
+                <a:latin typeface="Cascadia Mono" panose="020B0609020000020004" pitchFamily="49" charset="0"/>
+              </a:rPr>
+              <a:t>d</a:t>
+            </a:r>
+          </a:p>
+          <a:p>
+            <a:pPr marL="0" indent="0">
+              <a:buNone/>
+            </a:pPr>
+            <a:r>
+              <a:rPr lang="en-US" sz="1400" dirty="0">
+                <a:solidFill>
+                  <a:srgbClr val="000000"/>
+                </a:solidFill>
+                <a:highlight>
+                  <a:srgbClr val="FFFFFF"/>
+                </a:highlight>
+                <a:latin typeface="Cascadia Mono" panose="020B0609020000020004" pitchFamily="49" charset="0"/>
+              </a:rPr>
+              <a:t>    </a:t>
+            </a:r>
+            <a:r>
+              <a:rPr lang="en-US" sz="1400" dirty="0">
+                <a:solidFill>
+                  <a:srgbClr val="0000FF"/>
+                </a:solidFill>
+                <a:highlight>
+                  <a:srgbClr val="FFFFFF"/>
+                </a:highlight>
+                <a:latin typeface="Cascadia Mono" panose="020B0609020000020004" pitchFamily="49" charset="0"/>
+              </a:rPr>
+              <a:t>WHERE</a:t>
+            </a:r>
+            <a:r>
+              <a:rPr lang="en-US" sz="1400" dirty="0">
+                <a:solidFill>
+                  <a:srgbClr val="000000"/>
+                </a:solidFill>
+                <a:highlight>
+                  <a:srgbClr val="FFFFFF"/>
+                </a:highlight>
+                <a:latin typeface="Cascadia Mono" panose="020B0609020000020004" pitchFamily="49" charset="0"/>
+              </a:rPr>
+              <a:t>  </a:t>
+            </a:r>
+            <a:r>
+              <a:rPr lang="en-US" sz="1400" dirty="0" err="1">
+                <a:solidFill>
+                  <a:srgbClr val="000000"/>
+                </a:solidFill>
+                <a:highlight>
+                  <a:srgbClr val="FFFFFF"/>
+                </a:highlight>
+                <a:latin typeface="Cascadia Mono" panose="020B0609020000020004" pitchFamily="49" charset="0"/>
+              </a:rPr>
+              <a:t>d.date_col</a:t>
+            </a:r>
+            <a:r>
+              <a:rPr lang="en-US" sz="1400" dirty="0">
+                <a:solidFill>
+                  <a:srgbClr val="000000"/>
+                </a:solidFill>
+                <a:highlight>
+                  <a:srgbClr val="FFFFFF"/>
+                </a:highlight>
+                <a:latin typeface="Cascadia Mono" panose="020B0609020000020004" pitchFamily="49" charset="0"/>
+              </a:rPr>
+              <a:t> &lt;= </a:t>
+            </a:r>
+            <a:r>
+              <a:rPr lang="en-US" sz="1400" dirty="0">
+                <a:solidFill>
+                  <a:srgbClr val="FF00FF"/>
+                </a:solidFill>
+                <a:highlight>
+                  <a:srgbClr val="FFFFFF"/>
+                </a:highlight>
+                <a:latin typeface="Cascadia Mono" panose="020B0609020000020004" pitchFamily="49" charset="0"/>
+              </a:rPr>
+              <a:t>DATEADD</a:t>
+            </a:r>
+            <a:r>
+              <a:rPr lang="en-US" sz="1400" dirty="0">
+                <a:solidFill>
+                  <a:srgbClr val="808080"/>
+                </a:solidFill>
+                <a:highlight>
+                  <a:srgbClr val="FFFFFF"/>
+                </a:highlight>
+                <a:latin typeface="Cascadia Mono" panose="020B0609020000020004" pitchFamily="49" charset="0"/>
+              </a:rPr>
+              <a:t>(</a:t>
+            </a:r>
+            <a:r>
+              <a:rPr lang="en-US" sz="1400" dirty="0">
+                <a:solidFill>
+                  <a:srgbClr val="FF00FF"/>
+                </a:solidFill>
+                <a:highlight>
+                  <a:srgbClr val="FFFFFF"/>
+                </a:highlight>
+                <a:latin typeface="Cascadia Mono" panose="020B0609020000020004" pitchFamily="49" charset="0"/>
+              </a:rPr>
+              <a:t>DAY</a:t>
+            </a:r>
+            <a:r>
+              <a:rPr lang="en-US" sz="1400" dirty="0">
+                <a:solidFill>
+                  <a:srgbClr val="808080"/>
+                </a:solidFill>
+                <a:highlight>
+                  <a:srgbClr val="FFFFFF"/>
+                </a:highlight>
+                <a:latin typeface="Cascadia Mono" panose="020B0609020000020004" pitchFamily="49" charset="0"/>
+              </a:rPr>
+              <a:t>,</a:t>
+            </a:r>
+            <a:r>
+              <a:rPr lang="en-US" sz="1400" dirty="0">
+                <a:solidFill>
+                  <a:srgbClr val="000000"/>
+                </a:solidFill>
+                <a:highlight>
+                  <a:srgbClr val="FFFFFF"/>
+                </a:highlight>
+                <a:latin typeface="Cascadia Mono" panose="020B0609020000020004" pitchFamily="49" charset="0"/>
+              </a:rPr>
+              <a:t> 7</a:t>
+            </a:r>
+            <a:r>
+              <a:rPr lang="en-US" sz="1400" dirty="0">
+                <a:solidFill>
+                  <a:srgbClr val="808080"/>
+                </a:solidFill>
+                <a:highlight>
+                  <a:srgbClr val="FFFFFF"/>
+                </a:highlight>
+                <a:latin typeface="Cascadia Mono" panose="020B0609020000020004" pitchFamily="49" charset="0"/>
+              </a:rPr>
+              <a:t>,</a:t>
+            </a:r>
+            <a:r>
+              <a:rPr lang="en-US" sz="1400" dirty="0">
+                <a:solidFill>
+                  <a:srgbClr val="000000"/>
+                </a:solidFill>
+                <a:highlight>
+                  <a:srgbClr val="FFFFFF"/>
+                </a:highlight>
+                <a:latin typeface="Cascadia Mono" panose="020B0609020000020004" pitchFamily="49" charset="0"/>
+              </a:rPr>
+              <a:t> </a:t>
+            </a:r>
+            <a:r>
+              <a:rPr lang="en-US" sz="1400" dirty="0">
+                <a:solidFill>
+                  <a:srgbClr val="FF00FF"/>
+                </a:solidFill>
+                <a:highlight>
+                  <a:srgbClr val="FFFFFF"/>
+                </a:highlight>
+                <a:latin typeface="Cascadia Mono" panose="020B0609020000020004" pitchFamily="49" charset="0"/>
+              </a:rPr>
+              <a:t>GETDATE</a:t>
+            </a:r>
+            <a:r>
+              <a:rPr lang="en-US" sz="1400" dirty="0">
+                <a:solidFill>
+                  <a:srgbClr val="808080"/>
+                </a:solidFill>
+                <a:highlight>
+                  <a:srgbClr val="FFFFFF"/>
+                </a:highlight>
+                <a:latin typeface="Cascadia Mono" panose="020B0609020000020004" pitchFamily="49" charset="0"/>
+              </a:rPr>
+              <a:t>()) </a:t>
+            </a:r>
+            <a:r>
+              <a:rPr lang="en-US" sz="1400" b="1" dirty="0">
+                <a:solidFill>
+                  <a:schemeClr val="accent6">
+                    <a:lumMod val="75000"/>
+                  </a:schemeClr>
+                </a:solidFill>
+                <a:highlight>
+                  <a:srgbClr val="FFFFFF"/>
+                </a:highlight>
+                <a:latin typeface="Cascadia Mono" panose="020B0609020000020004" pitchFamily="49" charset="0"/>
+              </a:rPr>
+              <a:t>/* Termination condition */</a:t>
+            </a:r>
+          </a:p>
+          <a:p>
+            <a:pPr marL="0" indent="0">
+              <a:buNone/>
+            </a:pPr>
+            <a:r>
+              <a:rPr lang="en-US" sz="1400" dirty="0">
+                <a:solidFill>
+                  <a:srgbClr val="808080"/>
+                </a:solidFill>
+                <a:highlight>
+                  <a:srgbClr val="FFFFFF"/>
+                </a:highlight>
+                <a:latin typeface="Cascadia Mono" panose="020B0609020000020004" pitchFamily="49" charset="0"/>
+              </a:rPr>
+              <a:t>)</a:t>
+            </a:r>
+            <a:endParaRPr lang="en-US" sz="1400" dirty="0">
+              <a:solidFill>
+                <a:srgbClr val="000000"/>
+              </a:solidFill>
+              <a:highlight>
+                <a:srgbClr val="FFFFFF"/>
+              </a:highlight>
+              <a:latin typeface="Cascadia Mono" panose="020B0609020000020004" pitchFamily="49" charset="0"/>
+            </a:endParaRPr>
+          </a:p>
+          <a:p>
+            <a:pPr marL="0" indent="0">
+              <a:buNone/>
+            </a:pPr>
+            <a:r>
+              <a:rPr lang="en-US" sz="1400" dirty="0">
+                <a:solidFill>
+                  <a:srgbClr val="0000FF"/>
+                </a:solidFill>
+                <a:highlight>
+                  <a:srgbClr val="FFFFFF"/>
+                </a:highlight>
+                <a:latin typeface="Cascadia Mono" panose="020B0609020000020004" pitchFamily="49" charset="0"/>
+              </a:rPr>
+              <a:t>SELECT </a:t>
+            </a:r>
+            <a:r>
+              <a:rPr lang="en-US" sz="1400" dirty="0">
+                <a:solidFill>
+                  <a:srgbClr val="808080"/>
+                </a:solidFill>
+                <a:highlight>
+                  <a:srgbClr val="FFFFFF"/>
+                </a:highlight>
+                <a:latin typeface="Cascadia Mono" panose="020B0609020000020004" pitchFamily="49" charset="0"/>
+              </a:rPr>
+              <a:t>*</a:t>
+            </a:r>
+            <a:endParaRPr lang="en-US" sz="1400" dirty="0">
+              <a:solidFill>
+                <a:srgbClr val="000000"/>
+              </a:solidFill>
+              <a:highlight>
+                <a:srgbClr val="FFFFFF"/>
+              </a:highlight>
+              <a:latin typeface="Cascadia Mono" panose="020B0609020000020004" pitchFamily="49" charset="0"/>
+            </a:endParaRPr>
+          </a:p>
+          <a:p>
+            <a:pPr marL="0" indent="0">
+              <a:buNone/>
+            </a:pPr>
+            <a:r>
+              <a:rPr lang="en-US" sz="1400" dirty="0">
+                <a:solidFill>
+                  <a:srgbClr val="0000FF"/>
+                </a:solidFill>
+                <a:highlight>
+                  <a:srgbClr val="FFFFFF"/>
+                </a:highlight>
+                <a:latin typeface="Cascadia Mono" panose="020B0609020000020004" pitchFamily="49" charset="0"/>
+              </a:rPr>
+              <a:t>FROM   </a:t>
+            </a:r>
+            <a:r>
+              <a:rPr lang="en-US" sz="1400" dirty="0">
+                <a:solidFill>
+                  <a:srgbClr val="000000"/>
+                </a:solidFill>
+                <a:highlight>
+                  <a:srgbClr val="FFFFFF"/>
+                </a:highlight>
+                <a:latin typeface="Cascadia Mono" panose="020B0609020000020004" pitchFamily="49" charset="0"/>
+              </a:rPr>
+              <a:t>d</a:t>
+            </a:r>
+          </a:p>
+          <a:p>
+            <a:pPr marL="0" indent="0">
+              <a:buNone/>
+            </a:pPr>
+            <a:r>
+              <a:rPr lang="en-US" sz="1400" dirty="0">
+                <a:highlight>
+                  <a:srgbClr val="FFFFFF"/>
+                </a:highlight>
+                <a:latin typeface="Cascadia Mono" panose="020B0609020000020004" pitchFamily="49" charset="0"/>
+              </a:rPr>
+              <a:t>[</a:t>
+            </a:r>
+            <a:r>
+              <a:rPr lang="en-US" sz="1400" dirty="0">
+                <a:solidFill>
+                  <a:srgbClr val="0000FF"/>
+                </a:solidFill>
+                <a:highlight>
+                  <a:srgbClr val="FFFFFF"/>
+                </a:highlight>
+                <a:latin typeface="Cascadia Mono" panose="020B0609020000020004" pitchFamily="49" charset="0"/>
+              </a:rPr>
+              <a:t>WHERE  </a:t>
+            </a:r>
+            <a:r>
+              <a:rPr lang="en-US" sz="1400" dirty="0" err="1">
+                <a:solidFill>
+                  <a:srgbClr val="000000"/>
+                </a:solidFill>
+                <a:highlight>
+                  <a:srgbClr val="FFFFFF"/>
+                </a:highlight>
+                <a:latin typeface="Cascadia Mono" panose="020B0609020000020004" pitchFamily="49" charset="0"/>
+              </a:rPr>
+              <a:t>d</a:t>
+            </a:r>
+            <a:r>
+              <a:rPr lang="en-US" sz="1400" dirty="0" err="1">
+                <a:solidFill>
+                  <a:srgbClr val="808080"/>
+                </a:solidFill>
+                <a:highlight>
+                  <a:srgbClr val="FFFFFF"/>
+                </a:highlight>
+                <a:latin typeface="Cascadia Mono" panose="020B0609020000020004" pitchFamily="49" charset="0"/>
+              </a:rPr>
+              <a:t>.</a:t>
+            </a:r>
+            <a:r>
+              <a:rPr lang="en-US" sz="1400" dirty="0" err="1">
+                <a:solidFill>
+                  <a:srgbClr val="000000"/>
+                </a:solidFill>
+                <a:highlight>
+                  <a:srgbClr val="FFFFFF"/>
+                </a:highlight>
+                <a:latin typeface="Cascadia Mono" panose="020B0609020000020004" pitchFamily="49" charset="0"/>
+              </a:rPr>
+              <a:t>date_col</a:t>
+            </a:r>
+            <a:r>
+              <a:rPr lang="en-US" sz="1400" dirty="0">
+                <a:solidFill>
+                  <a:srgbClr val="000000"/>
+                </a:solidFill>
+                <a:highlight>
+                  <a:srgbClr val="FFFFFF"/>
+                </a:highlight>
+                <a:latin typeface="Cascadia Mono" panose="020B0609020000020004" pitchFamily="49" charset="0"/>
+              </a:rPr>
+              <a:t> </a:t>
+            </a:r>
+            <a:r>
+              <a:rPr lang="en-US" sz="1400" dirty="0">
+                <a:solidFill>
+                  <a:srgbClr val="808080"/>
+                </a:solidFill>
+                <a:highlight>
+                  <a:srgbClr val="FFFFFF"/>
+                </a:highlight>
+                <a:latin typeface="Cascadia Mono" panose="020B0609020000020004" pitchFamily="49" charset="0"/>
+              </a:rPr>
+              <a:t>&lt;=</a:t>
+            </a:r>
+            <a:r>
+              <a:rPr lang="en-US" sz="1400" dirty="0">
+                <a:solidFill>
+                  <a:srgbClr val="000000"/>
+                </a:solidFill>
+                <a:highlight>
+                  <a:srgbClr val="FFFFFF"/>
+                </a:highlight>
+                <a:latin typeface="Cascadia Mono" panose="020B0609020000020004" pitchFamily="49" charset="0"/>
+              </a:rPr>
+              <a:t> </a:t>
+            </a:r>
+            <a:r>
+              <a:rPr lang="en-US" sz="1400" dirty="0">
+                <a:solidFill>
+                  <a:srgbClr val="FF00FF"/>
+                </a:solidFill>
+                <a:highlight>
+                  <a:srgbClr val="FFFFFF"/>
+                </a:highlight>
+                <a:latin typeface="Cascadia Mono" panose="020B0609020000020004" pitchFamily="49" charset="0"/>
+              </a:rPr>
+              <a:t>DATEADD</a:t>
+            </a:r>
+            <a:r>
+              <a:rPr lang="en-US" sz="1400" dirty="0">
+                <a:solidFill>
+                  <a:srgbClr val="808080"/>
+                </a:solidFill>
+                <a:highlight>
+                  <a:srgbClr val="FFFFFF"/>
+                </a:highlight>
+                <a:latin typeface="Cascadia Mono" panose="020B0609020000020004" pitchFamily="49" charset="0"/>
+              </a:rPr>
+              <a:t>(</a:t>
+            </a:r>
+            <a:r>
+              <a:rPr lang="en-US" sz="1400" dirty="0">
+                <a:solidFill>
+                  <a:srgbClr val="FF00FF"/>
+                </a:solidFill>
+                <a:highlight>
+                  <a:srgbClr val="FFFFFF"/>
+                </a:highlight>
+                <a:latin typeface="Cascadia Mono" panose="020B0609020000020004" pitchFamily="49" charset="0"/>
+              </a:rPr>
+              <a:t>DAY</a:t>
+            </a:r>
+            <a:r>
+              <a:rPr lang="en-US" sz="1400" dirty="0">
+                <a:solidFill>
+                  <a:srgbClr val="808080"/>
+                </a:solidFill>
+                <a:highlight>
+                  <a:srgbClr val="FFFFFF"/>
+                </a:highlight>
+                <a:latin typeface="Cascadia Mono" panose="020B0609020000020004" pitchFamily="49" charset="0"/>
+              </a:rPr>
+              <a:t>,</a:t>
+            </a:r>
+            <a:r>
+              <a:rPr lang="en-US" sz="1400" dirty="0">
+                <a:solidFill>
+                  <a:srgbClr val="000000"/>
+                </a:solidFill>
+                <a:highlight>
+                  <a:srgbClr val="FFFFFF"/>
+                </a:highlight>
+                <a:latin typeface="Cascadia Mono" panose="020B0609020000020004" pitchFamily="49" charset="0"/>
+              </a:rPr>
+              <a:t> 7</a:t>
+            </a:r>
+            <a:r>
+              <a:rPr lang="en-US" sz="1400" dirty="0">
+                <a:solidFill>
+                  <a:srgbClr val="808080"/>
+                </a:solidFill>
+                <a:highlight>
+                  <a:srgbClr val="FFFFFF"/>
+                </a:highlight>
+                <a:latin typeface="Cascadia Mono" panose="020B0609020000020004" pitchFamily="49" charset="0"/>
+              </a:rPr>
+              <a:t>,</a:t>
+            </a:r>
+            <a:r>
+              <a:rPr lang="en-US" sz="1400" dirty="0">
+                <a:solidFill>
+                  <a:srgbClr val="000000"/>
+                </a:solidFill>
+                <a:highlight>
+                  <a:srgbClr val="FFFFFF"/>
+                </a:highlight>
+                <a:latin typeface="Cascadia Mono" panose="020B0609020000020004" pitchFamily="49" charset="0"/>
+              </a:rPr>
+              <a:t> </a:t>
+            </a:r>
+            <a:r>
+              <a:rPr lang="en-US" sz="1400" dirty="0">
+                <a:solidFill>
+                  <a:srgbClr val="FF00FF"/>
+                </a:solidFill>
+                <a:highlight>
+                  <a:srgbClr val="FFFFFF"/>
+                </a:highlight>
+                <a:latin typeface="Cascadia Mono" panose="020B0609020000020004" pitchFamily="49" charset="0"/>
+              </a:rPr>
+              <a:t>GETDATE</a:t>
+            </a:r>
+            <a:r>
+              <a:rPr lang="en-US" sz="1400" dirty="0">
+                <a:solidFill>
+                  <a:srgbClr val="808080"/>
+                </a:solidFill>
+                <a:highlight>
+                  <a:srgbClr val="FFFFFF"/>
+                </a:highlight>
+                <a:latin typeface="Cascadia Mono" panose="020B0609020000020004" pitchFamily="49" charset="0"/>
+              </a:rPr>
+              <a:t>())</a:t>
+            </a:r>
+            <a:r>
+              <a:rPr lang="en-US" sz="1400" b="1" dirty="0">
+                <a:highlight>
+                  <a:srgbClr val="FFFFFF"/>
+                </a:highlight>
+                <a:latin typeface="Cascadia Mono" panose="020B0609020000020004" pitchFamily="49" charset="0"/>
+              </a:rPr>
+              <a:t>]</a:t>
+            </a:r>
+            <a:r>
+              <a:rPr lang="en-US" sz="1400" dirty="0">
+                <a:solidFill>
+                  <a:srgbClr val="808080"/>
+                </a:solidFill>
+                <a:highlight>
+                  <a:srgbClr val="FFFFFF"/>
+                </a:highlight>
+                <a:latin typeface="Cascadia Mono" panose="020B0609020000020004" pitchFamily="49" charset="0"/>
+              </a:rPr>
+              <a:t>;</a:t>
+            </a:r>
+            <a:endParaRPr lang="en-US" sz="1400" dirty="0">
+              <a:solidFill>
+                <a:srgbClr val="000000"/>
+              </a:solidFill>
+              <a:highlight>
+                <a:srgbClr val="FFFFFF"/>
+              </a:highlight>
+              <a:latin typeface="Cascadia Mono" panose="020B0609020000020004" pitchFamily="49" charset="0"/>
+            </a:endParaRPr>
+          </a:p>
+          <a:p>
+            <a:pPr marL="0" indent="0">
+              <a:buNone/>
+            </a:pPr>
+            <a:r>
+              <a:rPr lang="en-US" sz="1400" dirty="0">
+                <a:solidFill>
+                  <a:srgbClr val="0000FF"/>
+                </a:solidFill>
+                <a:highlight>
+                  <a:srgbClr val="FFFFFF"/>
+                </a:highlight>
+                <a:latin typeface="Cascadia Mono" panose="020B0609020000020004" pitchFamily="49" charset="0"/>
+              </a:rPr>
+              <a:t>GO</a:t>
+            </a:r>
+            <a:endParaRPr lang="en-US" sz="1400" dirty="0"/>
+          </a:p>
+        </p:txBody>
+      </p:sp>
+    </p:spTree>
+    <p:extLst>
+      <p:ext uri="{BB962C8B-B14F-4D97-AF65-F5344CB8AC3E}">
+        <p14:creationId xmlns:p14="http://schemas.microsoft.com/office/powerpoint/2010/main" val="1197025866"/>
+      </p:ext>
+    </p:extLst>
+  </p:cSld>
+  <p:clrMapOvr>
+    <a:masterClrMapping/>
+  </p:clrMapOvr>
+  <p:timing>
+    <p:tnLst>
+      <p:par>
+        <p:cTn id="1" dur="indefinite" restart="never" nodeType="tmRoot">
+          <p:childTnLst>
+            <p:seq concurrent="1" nextAc="seek">
+              <p:cTn id="2" dur="indefinite" nodeType="mainSeq">
+                <p:childTnLst>
+                  <p:par>
+                    <p:cTn id="3" fill="hold">
+                      <p:stCondLst>
+                        <p:cond delay="indefinite"/>
+                      </p:stCondLst>
+                      <p:childTnLst>
+                        <p:par>
+                          <p:cTn id="4" fill="hold">
+                            <p:stCondLst>
+                              <p:cond delay="0"/>
+                            </p:stCondLst>
+                            <p:childTnLst>
+                              <p:par>
+                                <p:cTn id="5" presetID="10" presetClass="entr" presetSubtype="0" fill="hold" grpId="0" nodeType="clickEffect">
+                                  <p:stCondLst>
+                                    <p:cond delay="0"/>
+                                  </p:stCondLst>
+                                  <p:childTnLst>
+                                    <p:set>
+                                      <p:cBhvr>
+                                        <p:cTn id="6" dur="1" fill="hold">
+                                          <p:stCondLst>
+                                            <p:cond delay="0"/>
+                                          </p:stCondLst>
+                                        </p:cTn>
+                                        <p:tgtEl>
+                                          <p:spTgt spid="3">
+                                            <p:txEl>
+                                              <p:pRg st="0" end="0"/>
+                                            </p:txEl>
+                                          </p:spTgt>
+                                        </p:tgtEl>
+                                        <p:attrNameLst>
+                                          <p:attrName>style.visibility</p:attrName>
+                                        </p:attrNameLst>
+                                      </p:cBhvr>
+                                      <p:to>
+                                        <p:strVal val="visible"/>
+                                      </p:to>
+                                    </p:set>
+                                    <p:animEffect transition="in" filter="fade">
+                                      <p:cBhvr>
+                                        <p:cTn id="7" dur="500"/>
+                                        <p:tgtEl>
+                                          <p:spTgt spid="3">
+                                            <p:txEl>
+                                              <p:pRg st="0" end="0"/>
+                                            </p:txEl>
+                                          </p:spTgt>
+                                        </p:tgtEl>
+                                      </p:cBhvr>
+                                    </p:animEffect>
+                                  </p:childTnLst>
+                                </p:cTn>
+                              </p:par>
+                            </p:childTnLst>
+                          </p:cTn>
+                        </p:par>
+                      </p:childTnLst>
+                    </p:cTn>
+                  </p:par>
+                  <p:par>
+                    <p:cTn id="8" fill="hold">
+                      <p:stCondLst>
+                        <p:cond delay="indefinite"/>
+                      </p:stCondLst>
+                      <p:childTnLst>
+                        <p:par>
+                          <p:cTn id="9" fill="hold">
+                            <p:stCondLst>
+                              <p:cond delay="0"/>
+                            </p:stCondLst>
+                            <p:childTnLst>
+                              <p:par>
+                                <p:cTn id="10" presetID="10" presetClass="entr" presetSubtype="0" fill="hold" grpId="0" nodeType="clickEffect">
+                                  <p:stCondLst>
+                                    <p:cond delay="0"/>
+                                  </p:stCondLst>
+                                  <p:childTnLst>
+                                    <p:set>
+                                      <p:cBhvr>
+                                        <p:cTn id="11" dur="1" fill="hold">
+                                          <p:stCondLst>
+                                            <p:cond delay="0"/>
+                                          </p:stCondLst>
+                                        </p:cTn>
+                                        <p:tgtEl>
+                                          <p:spTgt spid="3">
+                                            <p:txEl>
+                                              <p:pRg st="1" end="1"/>
+                                            </p:txEl>
+                                          </p:spTgt>
+                                        </p:tgtEl>
+                                        <p:attrNameLst>
+                                          <p:attrName>style.visibility</p:attrName>
+                                        </p:attrNameLst>
+                                      </p:cBhvr>
+                                      <p:to>
+                                        <p:strVal val="visible"/>
+                                      </p:to>
+                                    </p:set>
+                                    <p:animEffect transition="in" filter="fade">
+                                      <p:cBhvr>
+                                        <p:cTn id="12" dur="500"/>
+                                        <p:tgtEl>
+                                          <p:spTgt spid="3">
+                                            <p:txEl>
+                                              <p:pRg st="1" end="1"/>
+                                            </p:txEl>
+                                          </p:spTgt>
+                                        </p:tgtEl>
+                                      </p:cBhvr>
+                                    </p:animEffect>
+                                  </p:childTnLst>
+                                </p:cTn>
+                              </p:par>
+                            </p:childTnLst>
+                          </p:cTn>
+                        </p:par>
+                      </p:childTnLst>
+                    </p:cTn>
+                  </p:par>
+                  <p:par>
+                    <p:cTn id="13" fill="hold">
+                      <p:stCondLst>
+                        <p:cond delay="indefinite"/>
+                      </p:stCondLst>
+                      <p:childTnLst>
+                        <p:par>
+                          <p:cTn id="14" fill="hold">
+                            <p:stCondLst>
+                              <p:cond delay="0"/>
+                            </p:stCondLst>
+                            <p:childTnLst>
+                              <p:par>
+                                <p:cTn id="15" presetID="10" presetClass="entr" presetSubtype="0" fill="hold" grpId="0" nodeType="clickEffect">
+                                  <p:stCondLst>
+                                    <p:cond delay="0"/>
+                                  </p:stCondLst>
+                                  <p:childTnLst>
+                                    <p:set>
+                                      <p:cBhvr>
+                                        <p:cTn id="16" dur="1" fill="hold">
+                                          <p:stCondLst>
+                                            <p:cond delay="0"/>
+                                          </p:stCondLst>
+                                        </p:cTn>
+                                        <p:tgtEl>
+                                          <p:spTgt spid="3">
+                                            <p:txEl>
+                                              <p:pRg st="2" end="2"/>
+                                            </p:txEl>
+                                          </p:spTgt>
+                                        </p:tgtEl>
+                                        <p:attrNameLst>
+                                          <p:attrName>style.visibility</p:attrName>
+                                        </p:attrNameLst>
+                                      </p:cBhvr>
+                                      <p:to>
+                                        <p:strVal val="visible"/>
+                                      </p:to>
+                                    </p:set>
+                                    <p:animEffect transition="in" filter="fade">
+                                      <p:cBhvr>
+                                        <p:cTn id="17" dur="500"/>
+                                        <p:tgtEl>
+                                          <p:spTgt spid="3">
+                                            <p:txEl>
+                                              <p:pRg st="2" end="2"/>
+                                            </p:txEl>
+                                          </p:spTgt>
+                                        </p:tgtEl>
+                                      </p:cBhvr>
+                                    </p:animEffect>
+                                  </p:childTnLst>
+                                </p:cTn>
+                              </p:par>
+                            </p:childTnLst>
+                          </p:cTn>
+                        </p:par>
+                      </p:childTnLst>
+                    </p:cTn>
+                  </p:par>
+                  <p:par>
+                    <p:cTn id="18" fill="hold">
+                      <p:stCondLst>
+                        <p:cond delay="indefinite"/>
+                      </p:stCondLst>
+                      <p:childTnLst>
+                        <p:par>
+                          <p:cTn id="19" fill="hold">
+                            <p:stCondLst>
+                              <p:cond delay="0"/>
+                            </p:stCondLst>
+                            <p:childTnLst>
+                              <p:par>
+                                <p:cTn id="20" presetID="10" presetClass="entr" presetSubtype="0" fill="hold" grpId="0" nodeType="clickEffect">
+                                  <p:stCondLst>
+                                    <p:cond delay="0"/>
+                                  </p:stCondLst>
+                                  <p:childTnLst>
+                                    <p:set>
+                                      <p:cBhvr>
+                                        <p:cTn id="21" dur="1" fill="hold">
+                                          <p:stCondLst>
+                                            <p:cond delay="0"/>
+                                          </p:stCondLst>
+                                        </p:cTn>
+                                        <p:tgtEl>
+                                          <p:spTgt spid="3">
+                                            <p:txEl>
+                                              <p:pRg st="3" end="3"/>
+                                            </p:txEl>
+                                          </p:spTgt>
+                                        </p:tgtEl>
+                                        <p:attrNameLst>
+                                          <p:attrName>style.visibility</p:attrName>
+                                        </p:attrNameLst>
+                                      </p:cBhvr>
+                                      <p:to>
+                                        <p:strVal val="visible"/>
+                                      </p:to>
+                                    </p:set>
+                                    <p:animEffect transition="in" filter="fade">
+                                      <p:cBhvr>
+                                        <p:cTn id="22" dur="500"/>
+                                        <p:tgtEl>
+                                          <p:spTgt spid="3">
+                                            <p:txEl>
+                                              <p:pRg st="3" end="3"/>
+                                            </p:txEl>
+                                          </p:spTgt>
+                                        </p:tgtEl>
+                                      </p:cBhvr>
+                                    </p:animEffect>
+                                  </p:childTnLst>
+                                </p:cTn>
+                              </p:par>
+                            </p:childTnLst>
+                          </p:cTn>
+                        </p:par>
+                      </p:childTnLst>
+                    </p:cTn>
+                  </p:par>
+                  <p:par>
+                    <p:cTn id="23" fill="hold">
+                      <p:stCondLst>
+                        <p:cond delay="indefinite"/>
+                      </p:stCondLst>
+                      <p:childTnLst>
+                        <p:par>
+                          <p:cTn id="24" fill="hold">
+                            <p:stCondLst>
+                              <p:cond delay="0"/>
+                            </p:stCondLst>
+                            <p:childTnLst>
+                              <p:par>
+                                <p:cTn id="25" presetID="10" presetClass="entr" presetSubtype="0" fill="hold" grpId="0" nodeType="clickEffect">
+                                  <p:stCondLst>
+                                    <p:cond delay="0"/>
+                                  </p:stCondLst>
+                                  <p:childTnLst>
+                                    <p:set>
+                                      <p:cBhvr>
+                                        <p:cTn id="26" dur="1" fill="hold">
+                                          <p:stCondLst>
+                                            <p:cond delay="0"/>
+                                          </p:stCondLst>
+                                        </p:cTn>
+                                        <p:tgtEl>
+                                          <p:spTgt spid="3">
+                                            <p:txEl>
+                                              <p:pRg st="4" end="4"/>
+                                            </p:txEl>
+                                          </p:spTgt>
+                                        </p:tgtEl>
+                                        <p:attrNameLst>
+                                          <p:attrName>style.visibility</p:attrName>
+                                        </p:attrNameLst>
+                                      </p:cBhvr>
+                                      <p:to>
+                                        <p:strVal val="visible"/>
+                                      </p:to>
+                                    </p:set>
+                                    <p:animEffect transition="in" filter="fade">
+                                      <p:cBhvr>
+                                        <p:cTn id="27" dur="500"/>
+                                        <p:tgtEl>
+                                          <p:spTgt spid="3">
+                                            <p:txEl>
+                                              <p:pRg st="4" end="4"/>
+                                            </p:txEl>
+                                          </p:spTgt>
+                                        </p:tgtEl>
+                                      </p:cBhvr>
+                                    </p:animEffect>
+                                  </p:childTnLst>
+                                </p:cTn>
+                              </p:par>
+                            </p:childTnLst>
+                          </p:cTn>
+                        </p:par>
+                      </p:childTnLst>
+                    </p:cTn>
+                  </p:par>
+                  <p:par>
+                    <p:cTn id="28" fill="hold">
+                      <p:stCondLst>
+                        <p:cond delay="indefinite"/>
+                      </p:stCondLst>
+                      <p:childTnLst>
+                        <p:par>
+                          <p:cTn id="29" fill="hold">
+                            <p:stCondLst>
+                              <p:cond delay="0"/>
+                            </p:stCondLst>
+                            <p:childTnLst>
+                              <p:par>
+                                <p:cTn id="30" presetID="10" presetClass="entr" presetSubtype="0" fill="hold" grpId="0" nodeType="clickEffect">
+                                  <p:stCondLst>
+                                    <p:cond delay="0"/>
+                                  </p:stCondLst>
+                                  <p:childTnLst>
+                                    <p:set>
+                                      <p:cBhvr>
+                                        <p:cTn id="31" dur="1" fill="hold">
+                                          <p:stCondLst>
+                                            <p:cond delay="0"/>
+                                          </p:stCondLst>
+                                        </p:cTn>
+                                        <p:tgtEl>
+                                          <p:spTgt spid="3">
+                                            <p:txEl>
+                                              <p:pRg st="5" end="5"/>
+                                            </p:txEl>
+                                          </p:spTgt>
+                                        </p:tgtEl>
+                                        <p:attrNameLst>
+                                          <p:attrName>style.visibility</p:attrName>
+                                        </p:attrNameLst>
+                                      </p:cBhvr>
+                                      <p:to>
+                                        <p:strVal val="visible"/>
+                                      </p:to>
+                                    </p:set>
+                                    <p:animEffect transition="in" filter="fade">
+                                      <p:cBhvr>
+                                        <p:cTn id="32" dur="500"/>
+                                        <p:tgtEl>
+                                          <p:spTgt spid="3">
+                                            <p:txEl>
+                                              <p:pRg st="5" end="5"/>
+                                            </p:txEl>
+                                          </p:spTgt>
+                                        </p:tgtEl>
+                                      </p:cBhvr>
+                                    </p:animEffect>
+                                  </p:childTnLst>
+                                </p:cTn>
+                              </p:par>
+                              <p:par>
+                                <p:cTn id="33" presetID="10" presetClass="entr" presetSubtype="0" fill="hold" grpId="0" nodeType="withEffect">
+                                  <p:stCondLst>
+                                    <p:cond delay="0"/>
+                                  </p:stCondLst>
+                                  <p:childTnLst>
+                                    <p:set>
+                                      <p:cBhvr>
+                                        <p:cTn id="34" dur="1" fill="hold">
+                                          <p:stCondLst>
+                                            <p:cond delay="0"/>
+                                          </p:stCondLst>
+                                        </p:cTn>
+                                        <p:tgtEl>
+                                          <p:spTgt spid="3">
+                                            <p:txEl>
+                                              <p:pRg st="6" end="6"/>
+                                            </p:txEl>
+                                          </p:spTgt>
+                                        </p:tgtEl>
+                                        <p:attrNameLst>
+                                          <p:attrName>style.visibility</p:attrName>
+                                        </p:attrNameLst>
+                                      </p:cBhvr>
+                                      <p:to>
+                                        <p:strVal val="visible"/>
+                                      </p:to>
+                                    </p:set>
+                                    <p:animEffect transition="in" filter="fade">
+                                      <p:cBhvr>
+                                        <p:cTn id="35" dur="500"/>
+                                        <p:tgtEl>
+                                          <p:spTgt spid="3">
+                                            <p:txEl>
+                                              <p:pRg st="6" end="6"/>
+                                            </p:txEl>
+                                          </p:spTgt>
+                                        </p:tgtEl>
+                                      </p:cBhvr>
+                                    </p:animEffect>
+                                  </p:childTnLst>
+                                </p:cTn>
+                              </p:par>
+                            </p:childTnLst>
+                          </p:cTn>
+                        </p:par>
+                      </p:childTnLst>
+                    </p:cTn>
+                  </p:par>
+                  <p:par>
+                    <p:cTn id="36" fill="hold">
+                      <p:stCondLst>
+                        <p:cond delay="indefinite"/>
+                      </p:stCondLst>
+                      <p:childTnLst>
+                        <p:par>
+                          <p:cTn id="37" fill="hold">
+                            <p:stCondLst>
+                              <p:cond delay="0"/>
+                            </p:stCondLst>
+                            <p:childTnLst>
+                              <p:par>
+                                <p:cTn id="38" presetID="10" presetClass="entr" presetSubtype="0" fill="hold" grpId="0" nodeType="clickEffect">
+                                  <p:stCondLst>
+                                    <p:cond delay="0"/>
+                                  </p:stCondLst>
+                                  <p:childTnLst>
+                                    <p:set>
+                                      <p:cBhvr>
+                                        <p:cTn id="39" dur="1" fill="hold">
+                                          <p:stCondLst>
+                                            <p:cond delay="0"/>
+                                          </p:stCondLst>
+                                        </p:cTn>
+                                        <p:tgtEl>
+                                          <p:spTgt spid="3">
+                                            <p:txEl>
+                                              <p:pRg st="7" end="7"/>
+                                            </p:txEl>
+                                          </p:spTgt>
+                                        </p:tgtEl>
+                                        <p:attrNameLst>
+                                          <p:attrName>style.visibility</p:attrName>
+                                        </p:attrNameLst>
+                                      </p:cBhvr>
+                                      <p:to>
+                                        <p:strVal val="visible"/>
+                                      </p:to>
+                                    </p:set>
+                                    <p:animEffect transition="in" filter="fade">
+                                      <p:cBhvr>
+                                        <p:cTn id="40" dur="500"/>
+                                        <p:tgtEl>
+                                          <p:spTgt spid="3">
+                                            <p:txEl>
+                                              <p:pRg st="7" end="7"/>
+                                            </p:txEl>
+                                          </p:spTgt>
+                                        </p:tgtEl>
+                                      </p:cBhvr>
+                                    </p:animEffect>
+                                  </p:childTnLst>
+                                </p:cTn>
+                              </p:par>
+                              <p:par>
+                                <p:cTn id="41" presetID="10" presetClass="entr" presetSubtype="0" fill="hold" grpId="0" nodeType="withEffect">
+                                  <p:stCondLst>
+                                    <p:cond delay="0"/>
+                                  </p:stCondLst>
+                                  <p:childTnLst>
+                                    <p:set>
+                                      <p:cBhvr>
+                                        <p:cTn id="42" dur="1" fill="hold">
+                                          <p:stCondLst>
+                                            <p:cond delay="0"/>
+                                          </p:stCondLst>
+                                        </p:cTn>
+                                        <p:tgtEl>
+                                          <p:spTgt spid="3">
+                                            <p:txEl>
+                                              <p:pRg st="8" end="8"/>
+                                            </p:txEl>
+                                          </p:spTgt>
+                                        </p:tgtEl>
+                                        <p:attrNameLst>
+                                          <p:attrName>style.visibility</p:attrName>
+                                        </p:attrNameLst>
+                                      </p:cBhvr>
+                                      <p:to>
+                                        <p:strVal val="visible"/>
+                                      </p:to>
+                                    </p:set>
+                                    <p:animEffect transition="in" filter="fade">
+                                      <p:cBhvr>
+                                        <p:cTn id="43" dur="500"/>
+                                        <p:tgtEl>
+                                          <p:spTgt spid="3">
+                                            <p:txEl>
+                                              <p:pRg st="8" end="8"/>
+                                            </p:txEl>
+                                          </p:spTgt>
+                                        </p:tgtEl>
+                                      </p:cBhvr>
+                                    </p:animEffect>
+                                  </p:childTnLst>
+                                </p:cTn>
+                              </p:par>
+                            </p:childTnLst>
+                          </p:cTn>
+                        </p:par>
+                      </p:childTnLst>
+                    </p:cTn>
+                  </p:par>
+                  <p:par>
+                    <p:cTn id="44" fill="hold">
+                      <p:stCondLst>
+                        <p:cond delay="indefinite"/>
+                      </p:stCondLst>
+                      <p:childTnLst>
+                        <p:par>
+                          <p:cTn id="45" fill="hold">
+                            <p:stCondLst>
+                              <p:cond delay="0"/>
+                            </p:stCondLst>
+                            <p:childTnLst>
+                              <p:par>
+                                <p:cTn id="46" presetID="10" presetClass="entr" presetSubtype="0" fill="hold" grpId="0" nodeType="clickEffect">
+                                  <p:stCondLst>
+                                    <p:cond delay="0"/>
+                                  </p:stCondLst>
+                                  <p:childTnLst>
+                                    <p:set>
+                                      <p:cBhvr>
+                                        <p:cTn id="47" dur="1" fill="hold">
+                                          <p:stCondLst>
+                                            <p:cond delay="0"/>
+                                          </p:stCondLst>
+                                        </p:cTn>
+                                        <p:tgtEl>
+                                          <p:spTgt spid="3">
+                                            <p:txEl>
+                                              <p:pRg st="9" end="9"/>
+                                            </p:txEl>
+                                          </p:spTgt>
+                                        </p:tgtEl>
+                                        <p:attrNameLst>
+                                          <p:attrName>style.visibility</p:attrName>
+                                        </p:attrNameLst>
+                                      </p:cBhvr>
+                                      <p:to>
+                                        <p:strVal val="visible"/>
+                                      </p:to>
+                                    </p:set>
+                                    <p:animEffect transition="in" filter="fade">
+                                      <p:cBhvr>
+                                        <p:cTn id="48" dur="500"/>
+                                        <p:tgtEl>
+                                          <p:spTgt spid="3">
+                                            <p:txEl>
+                                              <p:pRg st="9" end="9"/>
+                                            </p:txEl>
+                                          </p:spTgt>
+                                        </p:tgtEl>
+                                      </p:cBhvr>
+                                    </p:animEffect>
+                                  </p:childTnLst>
+                                </p:cTn>
+                              </p:par>
+                            </p:childTnLst>
+                          </p:cTn>
+                        </p:par>
+                        <p:par>
+                          <p:cTn id="49" fill="hold">
+                            <p:stCondLst>
+                              <p:cond delay="500"/>
+                            </p:stCondLst>
+                            <p:childTnLst>
+                              <p:par>
+                                <p:cTn id="50" presetID="10" presetClass="entr" presetSubtype="0" fill="hold" grpId="0" nodeType="afterEffect">
+                                  <p:stCondLst>
+                                    <p:cond delay="0"/>
+                                  </p:stCondLst>
+                                  <p:childTnLst>
+                                    <p:set>
+                                      <p:cBhvr>
+                                        <p:cTn id="51" dur="1" fill="hold">
+                                          <p:stCondLst>
+                                            <p:cond delay="0"/>
+                                          </p:stCondLst>
+                                        </p:cTn>
+                                        <p:tgtEl>
+                                          <p:spTgt spid="3">
+                                            <p:txEl>
+                                              <p:pRg st="10" end="10"/>
+                                            </p:txEl>
+                                          </p:spTgt>
+                                        </p:tgtEl>
+                                        <p:attrNameLst>
+                                          <p:attrName>style.visibility</p:attrName>
+                                        </p:attrNameLst>
+                                      </p:cBhvr>
+                                      <p:to>
+                                        <p:strVal val="visible"/>
+                                      </p:to>
+                                    </p:set>
+                                    <p:animEffect transition="in" filter="fade">
+                                      <p:cBhvr>
+                                        <p:cTn id="52" dur="500"/>
+                                        <p:tgtEl>
+                                          <p:spTgt spid="3">
+                                            <p:txEl>
+                                              <p:pRg st="10" end="10"/>
+                                            </p:txEl>
+                                          </p:spTgt>
+                                        </p:tgtEl>
+                                      </p:cBhvr>
+                                    </p:animEffect>
+                                  </p:childTnLst>
+                                </p:cTn>
+                              </p:par>
+                            </p:childTnLst>
+                          </p:cTn>
+                        </p:par>
+                        <p:par>
+                          <p:cTn id="53" fill="hold">
+                            <p:stCondLst>
+                              <p:cond delay="1000"/>
+                            </p:stCondLst>
+                            <p:childTnLst>
+                              <p:par>
+                                <p:cTn id="54" presetID="10" presetClass="entr" presetSubtype="0" fill="hold" grpId="0" nodeType="afterEffect">
+                                  <p:stCondLst>
+                                    <p:cond delay="0"/>
+                                  </p:stCondLst>
+                                  <p:childTnLst>
+                                    <p:set>
+                                      <p:cBhvr>
+                                        <p:cTn id="55" dur="1" fill="hold">
+                                          <p:stCondLst>
+                                            <p:cond delay="0"/>
+                                          </p:stCondLst>
+                                        </p:cTn>
+                                        <p:tgtEl>
+                                          <p:spTgt spid="3">
+                                            <p:txEl>
+                                              <p:pRg st="11" end="11"/>
+                                            </p:txEl>
+                                          </p:spTgt>
+                                        </p:tgtEl>
+                                        <p:attrNameLst>
+                                          <p:attrName>style.visibility</p:attrName>
+                                        </p:attrNameLst>
+                                      </p:cBhvr>
+                                      <p:to>
+                                        <p:strVal val="visible"/>
+                                      </p:to>
+                                    </p:set>
+                                    <p:animEffect transition="in" filter="fade">
+                                      <p:cBhvr>
+                                        <p:cTn id="56" dur="500"/>
+                                        <p:tgtEl>
+                                          <p:spTgt spid="3">
+                                            <p:txEl>
+                                              <p:pRg st="11" end="11"/>
+                                            </p:txEl>
+                                          </p:spTgt>
+                                        </p:tgtEl>
+                                      </p:cBhvr>
+                                    </p:animEffect>
+                                  </p:childTnLst>
+                                </p:cTn>
+                              </p:par>
+                            </p:childTnLst>
+                          </p:cTn>
+                        </p:par>
+                        <p:par>
+                          <p:cTn id="57" fill="hold">
+                            <p:stCondLst>
+                              <p:cond delay="1500"/>
+                            </p:stCondLst>
+                            <p:childTnLst>
+                              <p:par>
+                                <p:cTn id="58" presetID="10" presetClass="entr" presetSubtype="0" fill="hold" grpId="0" nodeType="afterEffect">
+                                  <p:stCondLst>
+                                    <p:cond delay="0"/>
+                                  </p:stCondLst>
+                                  <p:childTnLst>
+                                    <p:set>
+                                      <p:cBhvr>
+                                        <p:cTn id="59" dur="1" fill="hold">
+                                          <p:stCondLst>
+                                            <p:cond delay="0"/>
+                                          </p:stCondLst>
+                                        </p:cTn>
+                                        <p:tgtEl>
+                                          <p:spTgt spid="3">
+                                            <p:txEl>
+                                              <p:pRg st="12" end="12"/>
+                                            </p:txEl>
+                                          </p:spTgt>
+                                        </p:tgtEl>
+                                        <p:attrNameLst>
+                                          <p:attrName>style.visibility</p:attrName>
+                                        </p:attrNameLst>
+                                      </p:cBhvr>
+                                      <p:to>
+                                        <p:strVal val="visible"/>
+                                      </p:to>
+                                    </p:set>
+                                    <p:animEffect transition="in" filter="fade">
+                                      <p:cBhvr>
+                                        <p:cTn id="60" dur="500"/>
+                                        <p:tgtEl>
+                                          <p:spTgt spid="3">
+                                            <p:txEl>
+                                              <p:pRg st="12" end="12"/>
+                                            </p:txEl>
+                                          </p:spTgt>
+                                        </p:tgtEl>
+                                      </p:cBhvr>
+                                    </p:animEffect>
+                                  </p:childTnLst>
+                                </p:cTn>
+                              </p:par>
+                            </p:childTnLst>
+                          </p:cTn>
+                        </p:par>
+                      </p:childTnLst>
+                    </p:cTn>
+                  </p:par>
+                </p:childTnLst>
+              </p:cTn>
+              <p:prevCondLst>
+                <p:cond evt="onPrev" delay="0">
+                  <p:tgtEl>
+                    <p:sldTgt/>
+                  </p:tgtEl>
+                </p:cond>
+              </p:prevCondLst>
+              <p:nextCondLst>
+                <p:cond evt="onNext" delay="0">
+                  <p:tgtEl>
+                    <p:sldTgt/>
+                  </p:tgtEl>
+                </p:cond>
+              </p:nextCondLst>
+            </p:seq>
+          </p:childTnLst>
+        </p:cTn>
+      </p:par>
+    </p:tnLst>
+    <p:bldLst>
+      <p:bldP spid="3" grpId="0" uiExpand="1" build="p"/>
+    </p:bldLst>
+  </p:timing>
+</p:sld>
+</file>
+
+<file path=ppt/slides/slide19.xml><?xml version="1.0" encoding="utf-8"?>
 <p:sld xmlns:a="http://schemas.openxmlformats.org/drawingml/2006/main" xmlns:r="http://schemas.openxmlformats.org/officeDocument/2006/relationships" xmlns:p="http://schemas.openxmlformats.org/presentationml/2006/main">
   <p:cSld>
     <p:spTree>
@@ -12284,336 +16269,6 @@
     <p:extLst>
       <p:ext uri="{BB962C8B-B14F-4D97-AF65-F5344CB8AC3E}">
         <p14:creationId xmlns:p14="http://schemas.microsoft.com/office/powerpoint/2010/main" val="2661701367"/>
-      </p:ext>
-    </p:extLst>
-  </p:cSld>
-  <p:clrMapOvr>
-    <a:masterClrMapping/>
-  </p:clrMapOvr>
-</p:sld>
-</file>
-
-<file path=ppt/slides/slide19.xml><?xml version="1.0" encoding="utf-8"?>
-<p:sld xmlns:a="http://schemas.openxmlformats.org/drawingml/2006/main" xmlns:r="http://schemas.openxmlformats.org/officeDocument/2006/relationships" xmlns:p="http://schemas.openxmlformats.org/presentationml/2006/main">
-  <p:cSld>
-    <p:spTree>
-      <p:nvGrpSpPr>
-        <p:cNvPr id="1" name=""/>
-        <p:cNvGrpSpPr/>
-        <p:nvPr/>
-      </p:nvGrpSpPr>
-      <p:grpSpPr>
-        <a:xfrm>
-          <a:off x="0" y="0"/>
-          <a:ext cx="0" cy="0"/>
-          <a:chOff x="0" y="0"/>
-          <a:chExt cx="0" cy="0"/>
-        </a:xfrm>
-      </p:grpSpPr>
-      <p:sp>
-        <p:nvSpPr>
-          <p:cNvPr id="5" name="Titel 4">
-            <a:extLst>
-              <a:ext uri="{FF2B5EF4-FFF2-40B4-BE49-F238E27FC236}">
-                <a16:creationId xmlns:a16="http://schemas.microsoft.com/office/drawing/2014/main" id="{E5C7DBB9-3C8D-F682-1EEC-850F7523C42E}"/>
-              </a:ext>
-            </a:extLst>
-          </p:cNvPr>
-          <p:cNvSpPr>
-            <a:spLocks noGrp="1"/>
-          </p:cNvSpPr>
-          <p:nvPr>
-            <p:ph type="title"/>
-          </p:nvPr>
-        </p:nvSpPr>
-        <p:spPr>
-          <a:xfrm>
-            <a:off x="334965" y="441326"/>
-            <a:ext cx="9037636" cy="1116015"/>
-          </a:xfrm>
-        </p:spPr>
-        <p:txBody>
-          <a:bodyPr/>
-          <a:lstStyle/>
-          <a:p>
-            <a:r>
-              <a:rPr lang="en-US" dirty="0"/>
-              <a:t>Commutative Law in relational algebra</a:t>
-            </a:r>
-          </a:p>
-        </p:txBody>
-      </p:sp>
-      <p:sp>
-        <p:nvSpPr>
-          <p:cNvPr id="6" name="Inhaltsplatzhalter 5">
-            <a:extLst>
-              <a:ext uri="{FF2B5EF4-FFF2-40B4-BE49-F238E27FC236}">
-                <a16:creationId xmlns:a16="http://schemas.microsoft.com/office/drawing/2014/main" id="{2F1FE022-064C-5BB2-B7DB-E9EC93D4684B}"/>
-              </a:ext>
-            </a:extLst>
-          </p:cNvPr>
-          <p:cNvSpPr>
-            <a:spLocks noGrp="1"/>
-          </p:cNvSpPr>
-          <p:nvPr>
-            <p:ph idx="1"/>
-          </p:nvPr>
-        </p:nvSpPr>
-        <p:spPr>
-          <a:xfrm>
-            <a:off x="334965" y="1665288"/>
-            <a:ext cx="11522075" cy="4572000"/>
-          </a:xfrm>
-        </p:spPr>
-        <p:txBody>
-          <a:bodyPr/>
-          <a:lstStyle/>
-          <a:p>
-            <a:r>
-              <a:rPr lang="en-US" dirty="0"/>
-              <a:t>the order of operands does not affect the result for certain operations.</a:t>
-            </a:r>
-          </a:p>
-          <a:p>
-            <a:pPr lvl="1"/>
-            <a:r>
-              <a:rPr lang="en-US" dirty="0"/>
-              <a:t>UNION (</a:t>
-            </a:r>
-            <a:r>
-              <a:rPr lang="de-DE" b="1" dirty="0"/>
-              <a:t>∪</a:t>
-            </a:r>
-            <a:r>
-              <a:rPr lang="en-US" dirty="0"/>
-              <a:t>)</a:t>
-            </a:r>
-          </a:p>
-          <a:p>
-            <a:pPr lvl="2"/>
-            <a:r>
-              <a:rPr lang="en-US" dirty="0"/>
-              <a:t>(</a:t>
-            </a:r>
-            <a:r>
-              <a:rPr lang="en-US" b="1" dirty="0"/>
-              <a:t>R</a:t>
-            </a:r>
-            <a:r>
-              <a:rPr lang="en-US" dirty="0"/>
-              <a:t> </a:t>
-            </a:r>
-            <a:r>
-              <a:rPr lang="de-DE" dirty="0"/>
-              <a:t>∪ </a:t>
-            </a:r>
-            <a:r>
-              <a:rPr lang="de-DE" b="1" dirty="0"/>
-              <a:t>S</a:t>
-            </a:r>
-            <a:r>
-              <a:rPr lang="de-DE" dirty="0"/>
-              <a:t>) = (</a:t>
-            </a:r>
-            <a:r>
-              <a:rPr lang="de-DE" b="1" dirty="0"/>
-              <a:t>S</a:t>
-            </a:r>
-            <a:r>
-              <a:rPr lang="de-DE" dirty="0"/>
-              <a:t> ∪ </a:t>
-            </a:r>
-            <a:r>
-              <a:rPr lang="de-DE" b="1" dirty="0"/>
-              <a:t>R</a:t>
-            </a:r>
-            <a:r>
-              <a:rPr lang="de-DE" dirty="0"/>
-              <a:t>)</a:t>
-            </a:r>
-          </a:p>
-          <a:p>
-            <a:pPr lvl="1"/>
-            <a:r>
-              <a:rPr lang="de-DE" dirty="0" err="1"/>
-              <a:t>Intersection</a:t>
-            </a:r>
-            <a:r>
-              <a:rPr lang="de-DE" dirty="0"/>
-              <a:t> (</a:t>
-            </a:r>
-            <a:r>
-              <a:rPr lang="de-DE" b="1" dirty="0"/>
-              <a:t>∩</a:t>
-            </a:r>
-            <a:r>
-              <a:rPr lang="de-DE" dirty="0"/>
-              <a:t>)</a:t>
-            </a:r>
-          </a:p>
-          <a:p>
-            <a:pPr lvl="2"/>
-            <a:r>
-              <a:rPr lang="en-US" dirty="0"/>
-              <a:t>(</a:t>
-            </a:r>
-            <a:r>
-              <a:rPr lang="en-US" b="1" dirty="0"/>
-              <a:t>R</a:t>
-            </a:r>
-            <a:r>
-              <a:rPr lang="en-US" dirty="0"/>
-              <a:t> </a:t>
-            </a:r>
-            <a:r>
-              <a:rPr lang="de-DE" b="1" dirty="0"/>
-              <a:t>∩</a:t>
-            </a:r>
-            <a:r>
-              <a:rPr lang="de-DE" dirty="0"/>
-              <a:t> </a:t>
-            </a:r>
-            <a:r>
-              <a:rPr lang="de-DE" b="1" dirty="0"/>
-              <a:t>S</a:t>
-            </a:r>
-            <a:r>
-              <a:rPr lang="de-DE" dirty="0"/>
-              <a:t>) = (</a:t>
-            </a:r>
-            <a:r>
-              <a:rPr lang="de-DE" b="1" dirty="0"/>
-              <a:t>S</a:t>
-            </a:r>
-            <a:r>
-              <a:rPr lang="de-DE" dirty="0"/>
-              <a:t> </a:t>
-            </a:r>
-            <a:r>
-              <a:rPr lang="de-DE" b="1" dirty="0"/>
-              <a:t>∩</a:t>
-            </a:r>
-            <a:r>
-              <a:rPr lang="de-DE" dirty="0"/>
-              <a:t> </a:t>
-            </a:r>
-            <a:r>
-              <a:rPr lang="de-DE" b="1" dirty="0"/>
-              <a:t>R</a:t>
-            </a:r>
-            <a:r>
-              <a:rPr lang="de-DE" dirty="0"/>
-              <a:t>)</a:t>
-            </a:r>
-          </a:p>
-          <a:p>
-            <a:pPr lvl="1"/>
-            <a:r>
-              <a:rPr lang="de-DE" dirty="0"/>
-              <a:t>JOIN (</a:t>
-            </a:r>
-            <a:r>
-              <a:rPr lang="de-DE" b="1" dirty="0"/>
-              <a:t>⋈</a:t>
-            </a:r>
-            <a:r>
-              <a:rPr lang="de-DE" dirty="0"/>
-              <a:t>)</a:t>
-            </a:r>
-          </a:p>
-          <a:p>
-            <a:pPr lvl="2"/>
-            <a:r>
-              <a:rPr lang="en-US" dirty="0"/>
-              <a:t>(</a:t>
-            </a:r>
-            <a:r>
-              <a:rPr lang="en-US" b="1" dirty="0"/>
-              <a:t>R</a:t>
-            </a:r>
-            <a:r>
-              <a:rPr lang="en-US" dirty="0"/>
-              <a:t> </a:t>
-            </a:r>
-            <a:r>
-              <a:rPr lang="de-DE" b="1" dirty="0"/>
-              <a:t>⋈</a:t>
-            </a:r>
-            <a:r>
-              <a:rPr lang="de-DE" dirty="0"/>
-              <a:t> </a:t>
-            </a:r>
-            <a:r>
-              <a:rPr lang="de-DE" b="1" dirty="0"/>
-              <a:t>S</a:t>
-            </a:r>
-            <a:r>
-              <a:rPr lang="de-DE" dirty="0"/>
-              <a:t>) = (</a:t>
-            </a:r>
-            <a:r>
-              <a:rPr lang="de-DE" b="1" dirty="0"/>
-              <a:t>S</a:t>
-            </a:r>
-            <a:r>
-              <a:rPr lang="de-DE" dirty="0"/>
-              <a:t> </a:t>
-            </a:r>
-            <a:r>
-              <a:rPr lang="de-DE" b="1" dirty="0"/>
-              <a:t>⋈</a:t>
-            </a:r>
-            <a:r>
-              <a:rPr lang="de-DE" dirty="0"/>
-              <a:t> </a:t>
-            </a:r>
-            <a:r>
-              <a:rPr lang="de-DE" b="1" dirty="0"/>
-              <a:t>R</a:t>
-            </a:r>
-            <a:r>
-              <a:rPr lang="de-DE" dirty="0"/>
-              <a:t>)</a:t>
-            </a:r>
-            <a:br>
-              <a:rPr lang="de-DE" dirty="0"/>
-            </a:br>
-            <a:r>
-              <a:rPr lang="en-US" sz="1200" b="1" dirty="0">
-                <a:solidFill>
-                  <a:srgbClr val="FF0000"/>
-                </a:solidFill>
-              </a:rPr>
-              <a:t>Only true for natural joins or theta joins with symmetric conditions</a:t>
-            </a:r>
-            <a:endParaRPr lang="de-DE" sz="1200" b="1" dirty="0">
-              <a:solidFill>
-                <a:srgbClr val="FF0000"/>
-              </a:solidFill>
-            </a:endParaRPr>
-          </a:p>
-          <a:p>
-            <a:r>
-              <a:rPr lang="en-US" dirty="0"/>
-              <a:t>enables query optimization: SQL engines can reorder joins or unions for better performance.</a:t>
-            </a:r>
-          </a:p>
-          <a:p>
-            <a:r>
-              <a:rPr lang="en-US"/>
-              <a:t>helps </a:t>
-            </a:r>
-            <a:r>
-              <a:rPr lang="en-US" dirty="0"/>
-              <a:t>in rewriting queries without changing their meaning.</a:t>
-            </a:r>
-          </a:p>
-        </p:txBody>
-      </p:sp>
-    </p:spTree>
-    <p:extLst>
-      <p:ext uri="{BB962C8B-B14F-4D97-AF65-F5344CB8AC3E}">
-        <p14:creationId xmlns:p14="http://schemas.microsoft.com/office/powerpoint/2010/main" val="1678448268"/>
       </p:ext>
     </p:extLst>
   </p:cSld>
@@ -12815,6 +16470,338 @@
 </file>
 
 <file path=ppt/slides/slide20.xml><?xml version="1.0" encoding="utf-8"?>
+<p:sld xmlns:a="http://schemas.openxmlformats.org/drawingml/2006/main" xmlns:r="http://schemas.openxmlformats.org/officeDocument/2006/relationships" xmlns:p="http://schemas.openxmlformats.org/presentationml/2006/main">
+  <p:cSld>
+    <p:spTree>
+      <p:nvGrpSpPr>
+        <p:cNvPr id="1" name=""/>
+        <p:cNvGrpSpPr/>
+        <p:nvPr/>
+      </p:nvGrpSpPr>
+      <p:grpSpPr>
+        <a:xfrm>
+          <a:off x="0" y="0"/>
+          <a:ext cx="0" cy="0"/>
+          <a:chOff x="0" y="0"/>
+          <a:chExt cx="0" cy="0"/>
+        </a:xfrm>
+      </p:grpSpPr>
+      <p:sp>
+        <p:nvSpPr>
+          <p:cNvPr id="5" name="Titel 4">
+            <a:extLst>
+              <a:ext uri="{FF2B5EF4-FFF2-40B4-BE49-F238E27FC236}">
+                <a16:creationId xmlns:a16="http://schemas.microsoft.com/office/drawing/2014/main" id="{E5C7DBB9-3C8D-F682-1EEC-850F7523C42E}"/>
+              </a:ext>
+            </a:extLst>
+          </p:cNvPr>
+          <p:cNvSpPr>
+            <a:spLocks noGrp="1"/>
+          </p:cNvSpPr>
+          <p:nvPr>
+            <p:ph type="title"/>
+          </p:nvPr>
+        </p:nvSpPr>
+        <p:spPr>
+          <a:xfrm>
+            <a:off x="334965" y="441326"/>
+            <a:ext cx="9037636" cy="1116015"/>
+          </a:xfrm>
+        </p:spPr>
+        <p:txBody>
+          <a:bodyPr/>
+          <a:lstStyle/>
+          <a:p>
+            <a:r>
+              <a:rPr lang="en-US" dirty="0"/>
+              <a:t>Commutative Law in relational algebra</a:t>
+            </a:r>
+          </a:p>
+        </p:txBody>
+      </p:sp>
+      <p:sp>
+        <p:nvSpPr>
+          <p:cNvPr id="6" name="Inhaltsplatzhalter 5">
+            <a:extLst>
+              <a:ext uri="{FF2B5EF4-FFF2-40B4-BE49-F238E27FC236}">
+                <a16:creationId xmlns:a16="http://schemas.microsoft.com/office/drawing/2014/main" id="{2F1FE022-064C-5BB2-B7DB-E9EC93D4684B}"/>
+              </a:ext>
+            </a:extLst>
+          </p:cNvPr>
+          <p:cNvSpPr>
+            <a:spLocks noGrp="1"/>
+          </p:cNvSpPr>
+          <p:nvPr>
+            <p:ph idx="1"/>
+          </p:nvPr>
+        </p:nvSpPr>
+        <p:spPr>
+          <a:xfrm>
+            <a:off x="334965" y="1665288"/>
+            <a:ext cx="11522075" cy="4572000"/>
+          </a:xfrm>
+        </p:spPr>
+        <p:txBody>
+          <a:bodyPr/>
+          <a:lstStyle/>
+          <a:p>
+            <a:r>
+              <a:rPr lang="en-US" dirty="0"/>
+              <a:t>The commutative law states: a ∘ b = b ∘ a, where ∘ is a binary operation.</a:t>
+            </a:r>
+          </a:p>
+          <a:p>
+            <a:r>
+              <a:rPr lang="en-US" dirty="0"/>
+              <a:t>The order of operands does not affect the result for certain operations.</a:t>
+            </a:r>
+          </a:p>
+          <a:p>
+            <a:pPr lvl="1"/>
+            <a:r>
+              <a:rPr lang="en-US" dirty="0"/>
+              <a:t>UNION (</a:t>
+            </a:r>
+            <a:r>
+              <a:rPr lang="de-DE" b="1" dirty="0"/>
+              <a:t>∪</a:t>
+            </a:r>
+            <a:r>
+              <a:rPr lang="en-US" dirty="0"/>
+              <a:t>)</a:t>
+            </a:r>
+          </a:p>
+          <a:p>
+            <a:pPr lvl="2"/>
+            <a:r>
+              <a:rPr lang="en-US" dirty="0"/>
+              <a:t>(</a:t>
+            </a:r>
+            <a:r>
+              <a:rPr lang="en-US" b="1" dirty="0"/>
+              <a:t>R</a:t>
+            </a:r>
+            <a:r>
+              <a:rPr lang="en-US" dirty="0"/>
+              <a:t> </a:t>
+            </a:r>
+            <a:r>
+              <a:rPr lang="de-DE" dirty="0"/>
+              <a:t>∪ </a:t>
+            </a:r>
+            <a:r>
+              <a:rPr lang="de-DE" b="1" dirty="0"/>
+              <a:t>S</a:t>
+            </a:r>
+            <a:r>
+              <a:rPr lang="de-DE" dirty="0"/>
+              <a:t>) = (</a:t>
+            </a:r>
+            <a:r>
+              <a:rPr lang="de-DE" b="1" dirty="0"/>
+              <a:t>S</a:t>
+            </a:r>
+            <a:r>
+              <a:rPr lang="de-DE" dirty="0"/>
+              <a:t> ∪ </a:t>
+            </a:r>
+            <a:r>
+              <a:rPr lang="de-DE" b="1" dirty="0"/>
+              <a:t>R</a:t>
+            </a:r>
+            <a:r>
+              <a:rPr lang="de-DE" dirty="0"/>
+              <a:t>)</a:t>
+            </a:r>
+          </a:p>
+          <a:p>
+            <a:pPr lvl="1"/>
+            <a:r>
+              <a:rPr lang="de-DE" dirty="0" err="1"/>
+              <a:t>Intersection</a:t>
+            </a:r>
+            <a:r>
+              <a:rPr lang="de-DE" dirty="0"/>
+              <a:t> (</a:t>
+            </a:r>
+            <a:r>
+              <a:rPr lang="de-DE" b="1" dirty="0"/>
+              <a:t>∩</a:t>
+            </a:r>
+            <a:r>
+              <a:rPr lang="de-DE" dirty="0"/>
+              <a:t>)</a:t>
+            </a:r>
+          </a:p>
+          <a:p>
+            <a:pPr lvl="2"/>
+            <a:r>
+              <a:rPr lang="en-US" dirty="0"/>
+              <a:t>(</a:t>
+            </a:r>
+            <a:r>
+              <a:rPr lang="en-US" b="1" dirty="0"/>
+              <a:t>R</a:t>
+            </a:r>
+            <a:r>
+              <a:rPr lang="en-US" dirty="0"/>
+              <a:t> </a:t>
+            </a:r>
+            <a:r>
+              <a:rPr lang="de-DE" b="1" dirty="0"/>
+              <a:t>∩</a:t>
+            </a:r>
+            <a:r>
+              <a:rPr lang="de-DE" dirty="0"/>
+              <a:t> </a:t>
+            </a:r>
+            <a:r>
+              <a:rPr lang="de-DE" b="1" dirty="0"/>
+              <a:t>S</a:t>
+            </a:r>
+            <a:r>
+              <a:rPr lang="de-DE" dirty="0"/>
+              <a:t>) = (</a:t>
+            </a:r>
+            <a:r>
+              <a:rPr lang="de-DE" b="1" dirty="0"/>
+              <a:t>S</a:t>
+            </a:r>
+            <a:r>
+              <a:rPr lang="de-DE" dirty="0"/>
+              <a:t> </a:t>
+            </a:r>
+            <a:r>
+              <a:rPr lang="de-DE" b="1" dirty="0"/>
+              <a:t>∩</a:t>
+            </a:r>
+            <a:r>
+              <a:rPr lang="de-DE" dirty="0"/>
+              <a:t> </a:t>
+            </a:r>
+            <a:r>
+              <a:rPr lang="de-DE" b="1" dirty="0"/>
+              <a:t>R</a:t>
+            </a:r>
+            <a:r>
+              <a:rPr lang="de-DE" dirty="0"/>
+              <a:t>)</a:t>
+            </a:r>
+          </a:p>
+          <a:p>
+            <a:pPr lvl="1"/>
+            <a:r>
+              <a:rPr lang="de-DE" dirty="0"/>
+              <a:t>JOIN (</a:t>
+            </a:r>
+            <a:r>
+              <a:rPr lang="de-DE" b="1" dirty="0"/>
+              <a:t>⋈</a:t>
+            </a:r>
+            <a:r>
+              <a:rPr lang="de-DE" dirty="0"/>
+              <a:t>)</a:t>
+            </a:r>
+          </a:p>
+          <a:p>
+            <a:pPr lvl="2"/>
+            <a:r>
+              <a:rPr lang="en-US" dirty="0"/>
+              <a:t>(</a:t>
+            </a:r>
+            <a:r>
+              <a:rPr lang="en-US" b="1" dirty="0"/>
+              <a:t>R</a:t>
+            </a:r>
+            <a:r>
+              <a:rPr lang="en-US" dirty="0"/>
+              <a:t> </a:t>
+            </a:r>
+            <a:r>
+              <a:rPr lang="de-DE" b="1" dirty="0"/>
+              <a:t>⋈</a:t>
+            </a:r>
+            <a:r>
+              <a:rPr lang="de-DE" dirty="0"/>
+              <a:t> </a:t>
+            </a:r>
+            <a:r>
+              <a:rPr lang="de-DE" b="1" dirty="0"/>
+              <a:t>S</a:t>
+            </a:r>
+            <a:r>
+              <a:rPr lang="de-DE" dirty="0"/>
+              <a:t>) = (</a:t>
+            </a:r>
+            <a:r>
+              <a:rPr lang="de-DE" b="1" dirty="0"/>
+              <a:t>S</a:t>
+            </a:r>
+            <a:r>
+              <a:rPr lang="de-DE" dirty="0"/>
+              <a:t> </a:t>
+            </a:r>
+            <a:r>
+              <a:rPr lang="de-DE" b="1" dirty="0"/>
+              <a:t>⋈</a:t>
+            </a:r>
+            <a:r>
+              <a:rPr lang="de-DE" dirty="0"/>
+              <a:t> </a:t>
+            </a:r>
+            <a:r>
+              <a:rPr lang="de-DE" b="1" dirty="0"/>
+              <a:t>R</a:t>
+            </a:r>
+            <a:r>
+              <a:rPr lang="de-DE" dirty="0"/>
+              <a:t>)</a:t>
+            </a:r>
+            <a:br>
+              <a:rPr lang="de-DE" dirty="0"/>
+            </a:br>
+            <a:r>
+              <a:rPr lang="en-US" sz="1200" b="1" dirty="0">
+                <a:solidFill>
+                  <a:srgbClr val="FF0000"/>
+                </a:solidFill>
+              </a:rPr>
+              <a:t>Only true for natural joins or theta joins with symmetric conditions</a:t>
+            </a:r>
+            <a:endParaRPr lang="de-DE" sz="1200" b="1" dirty="0">
+              <a:solidFill>
+                <a:srgbClr val="FF0000"/>
+              </a:solidFill>
+            </a:endParaRPr>
+          </a:p>
+          <a:p>
+            <a:r>
+              <a:rPr lang="en-US" dirty="0"/>
+              <a:t>Enables query optimization: SQL engines can reorder joins or unions for better performance.</a:t>
+            </a:r>
+          </a:p>
+          <a:p>
+            <a:r>
+              <a:rPr lang="en-US" dirty="0"/>
+              <a:t>Helps in rewriting queries without changing their meaning.</a:t>
+            </a:r>
+          </a:p>
+        </p:txBody>
+      </p:sp>
+    </p:spTree>
+    <p:extLst>
+      <p:ext uri="{BB962C8B-B14F-4D97-AF65-F5344CB8AC3E}">
+        <p14:creationId xmlns:p14="http://schemas.microsoft.com/office/powerpoint/2010/main" val="1678448268"/>
+      </p:ext>
+    </p:extLst>
+  </p:cSld>
+  <p:clrMapOvr>
+    <a:masterClrMapping/>
+  </p:clrMapOvr>
+</p:sld>
+</file>
+
+<file path=ppt/slides/slide21.xml><?xml version="1.0" encoding="utf-8"?>
 <p:sld xmlns:a="http://schemas.openxmlformats.org/drawingml/2006/main" xmlns:r="http://schemas.openxmlformats.org/officeDocument/2006/relationships" xmlns:p="http://schemas.openxmlformats.org/presentationml/2006/main">
   <p:cSld>
     <p:spTree>
@@ -13063,7 +17050,7 @@
 </p:sld>
 </file>
 
-<file path=ppt/slides/slide21.xml><?xml version="1.0" encoding="utf-8"?>
+<file path=ppt/slides/slide22.xml><?xml version="1.0" encoding="utf-8"?>
 <p:sld xmlns:a="http://schemas.openxmlformats.org/drawingml/2006/main" xmlns:r="http://schemas.openxmlformats.org/officeDocument/2006/relationships" xmlns:p="http://schemas.openxmlformats.org/presentationml/2006/main">
   <p:cSld>
     <p:spTree>
@@ -13176,7 +17163,7 @@
 </p:sld>
 </file>
 
-<file path=ppt/slides/slide22.xml><?xml version="1.0" encoding="utf-8"?>
+<file path=ppt/slides/slide23.xml><?xml version="1.0" encoding="utf-8"?>
 <p:sld xmlns:a="http://schemas.openxmlformats.org/drawingml/2006/main" xmlns:r="http://schemas.openxmlformats.org/officeDocument/2006/relationships" xmlns:p="http://schemas.openxmlformats.org/presentationml/2006/main">
   <p:cSld>
     <p:spTree>
@@ -13259,7 +17246,647 @@
 </p:sld>
 </file>
 
-<file path=ppt/slides/slide23.xml><?xml version="1.0" encoding="utf-8"?>
+<file path=ppt/slides/slide24.xml><?xml version="1.0" encoding="utf-8"?>
+<p:sld xmlns:a="http://schemas.openxmlformats.org/drawingml/2006/main" xmlns:r="http://schemas.openxmlformats.org/officeDocument/2006/relationships" xmlns:p="http://schemas.openxmlformats.org/presentationml/2006/main">
+  <p:cSld>
+    <p:spTree>
+      <p:nvGrpSpPr>
+        <p:cNvPr id="1" name=""/>
+        <p:cNvGrpSpPr/>
+        <p:nvPr/>
+      </p:nvGrpSpPr>
+      <p:grpSpPr>
+        <a:xfrm>
+          <a:off x="0" y="0"/>
+          <a:ext cx="0" cy="0"/>
+          <a:chOff x="0" y="0"/>
+          <a:chExt cx="0" cy="0"/>
+        </a:xfrm>
+      </p:grpSpPr>
+      <p:sp>
+        <p:nvSpPr>
+          <p:cNvPr id="4" name="Titel 3">
+            <a:extLst>
+              <a:ext uri="{FF2B5EF4-FFF2-40B4-BE49-F238E27FC236}">
+                <a16:creationId xmlns:a16="http://schemas.microsoft.com/office/drawing/2014/main" id="{4462BD52-CAA9-3B9C-C68C-ED96D326FCED}"/>
+              </a:ext>
+            </a:extLst>
+          </p:cNvPr>
+          <p:cNvSpPr>
+            <a:spLocks noGrp="1"/>
+          </p:cNvSpPr>
+          <p:nvPr>
+            <p:ph type="title"/>
+          </p:nvPr>
+        </p:nvSpPr>
+        <p:spPr/>
+        <p:txBody>
+          <a:bodyPr/>
+          <a:lstStyle/>
+          <a:p>
+            <a:r>
+              <a:rPr lang="en-US" dirty="0"/>
+              <a:t>What does the expert say about this?</a:t>
+            </a:r>
+          </a:p>
+        </p:txBody>
+      </p:sp>
+      <p:pic>
+        <p:nvPicPr>
+          <p:cNvPr id="6" name="Grafik 5">
+            <a:extLst>
+              <a:ext uri="{FF2B5EF4-FFF2-40B4-BE49-F238E27FC236}">
+                <a16:creationId xmlns:a16="http://schemas.microsoft.com/office/drawing/2014/main" id="{35C40EF7-E4AB-C6F4-7FEC-ABF309954515}"/>
+              </a:ext>
+            </a:extLst>
+          </p:cNvPr>
+          <p:cNvPicPr>
+            <a:picLocks noChangeAspect="1"/>
+          </p:cNvPicPr>
+          <p:nvPr/>
+        </p:nvPicPr>
+        <p:blipFill>
+          <a:blip r:embed="rId2"/>
+          <a:stretch>
+            <a:fillRect/>
+          </a:stretch>
+        </p:blipFill>
+        <p:spPr>
+          <a:xfrm>
+            <a:off x="184912" y="2300129"/>
+            <a:ext cx="11822175" cy="2257740"/>
+          </a:xfrm>
+          <a:prstGeom prst="rect">
+            <a:avLst/>
+          </a:prstGeom>
+        </p:spPr>
+      </p:pic>
+      <p:pic>
+        <p:nvPicPr>
+          <p:cNvPr id="8" name="Grafik 7">
+            <a:extLst>
+              <a:ext uri="{FF2B5EF4-FFF2-40B4-BE49-F238E27FC236}">
+                <a16:creationId xmlns:a16="http://schemas.microsoft.com/office/drawing/2014/main" id="{152C85D4-7375-C582-B3E4-96E46FC025AF}"/>
+              </a:ext>
+            </a:extLst>
+          </p:cNvPr>
+          <p:cNvPicPr>
+            <a:picLocks noChangeAspect="1"/>
+          </p:cNvPicPr>
+          <p:nvPr/>
+        </p:nvPicPr>
+        <p:blipFill>
+          <a:blip r:embed="rId3"/>
+          <a:stretch>
+            <a:fillRect/>
+          </a:stretch>
+        </p:blipFill>
+        <p:spPr>
+          <a:xfrm>
+            <a:off x="0" y="2309973"/>
+            <a:ext cx="12192000" cy="2659355"/>
+          </a:xfrm>
+          <a:prstGeom prst="rect">
+            <a:avLst/>
+          </a:prstGeom>
+        </p:spPr>
+      </p:pic>
+      <p:pic>
+        <p:nvPicPr>
+          <p:cNvPr id="10" name="Grafik 9">
+            <a:extLst>
+              <a:ext uri="{FF2B5EF4-FFF2-40B4-BE49-F238E27FC236}">
+                <a16:creationId xmlns:a16="http://schemas.microsoft.com/office/drawing/2014/main" id="{DC0361DE-C6B4-D23F-7FBB-1BF6946D89E0}"/>
+              </a:ext>
+            </a:extLst>
+          </p:cNvPr>
+          <p:cNvPicPr>
+            <a:picLocks noChangeAspect="1"/>
+          </p:cNvPicPr>
+          <p:nvPr/>
+        </p:nvPicPr>
+        <p:blipFill>
+          <a:blip r:embed="rId4"/>
+          <a:stretch>
+            <a:fillRect/>
+          </a:stretch>
+        </p:blipFill>
+        <p:spPr>
+          <a:xfrm>
+            <a:off x="15329" y="2300128"/>
+            <a:ext cx="11904527" cy="2095516"/>
+          </a:xfrm>
+          <a:prstGeom prst="rect">
+            <a:avLst/>
+          </a:prstGeom>
+        </p:spPr>
+      </p:pic>
+    </p:spTree>
+    <p:extLst>
+      <p:ext uri="{BB962C8B-B14F-4D97-AF65-F5344CB8AC3E}">
+        <p14:creationId xmlns:p14="http://schemas.microsoft.com/office/powerpoint/2010/main" val="1087205414"/>
+      </p:ext>
+    </p:extLst>
+  </p:cSld>
+  <p:clrMapOvr>
+    <a:masterClrMapping/>
+  </p:clrMapOvr>
+  <p:timing>
+    <p:tnLst>
+      <p:par>
+        <p:cTn id="1" dur="indefinite" restart="never" nodeType="tmRoot">
+          <p:childTnLst>
+            <p:seq concurrent="1" nextAc="seek">
+              <p:cTn id="2" dur="indefinite" nodeType="mainSeq">
+                <p:childTnLst>
+                  <p:par>
+                    <p:cTn id="3" fill="hold">
+                      <p:stCondLst>
+                        <p:cond delay="indefinite"/>
+                      </p:stCondLst>
+                      <p:childTnLst>
+                        <p:par>
+                          <p:cTn id="4" fill="hold">
+                            <p:stCondLst>
+                              <p:cond delay="0"/>
+                            </p:stCondLst>
+                            <p:childTnLst>
+                              <p:par>
+                                <p:cTn id="5" presetID="1" presetClass="entr" presetSubtype="0" fill="hold" nodeType="clickEffect">
+                                  <p:stCondLst>
+                                    <p:cond delay="0"/>
+                                  </p:stCondLst>
+                                  <p:childTnLst>
+                                    <p:set>
+                                      <p:cBhvr>
+                                        <p:cTn id="6" dur="1" fill="hold">
+                                          <p:stCondLst>
+                                            <p:cond delay="0"/>
+                                          </p:stCondLst>
+                                        </p:cTn>
+                                        <p:tgtEl>
+                                          <p:spTgt spid="6"/>
+                                        </p:tgtEl>
+                                        <p:attrNameLst>
+                                          <p:attrName>style.visibility</p:attrName>
+                                        </p:attrNameLst>
+                                      </p:cBhvr>
+                                      <p:to>
+                                        <p:strVal val="visible"/>
+                                      </p:to>
+                                    </p:set>
+                                  </p:childTnLst>
+                                </p:cTn>
+                              </p:par>
+                            </p:childTnLst>
+                          </p:cTn>
+                        </p:par>
+                      </p:childTnLst>
+                    </p:cTn>
+                  </p:par>
+                  <p:par>
+                    <p:cTn id="7" fill="hold">
+                      <p:stCondLst>
+                        <p:cond delay="indefinite"/>
+                      </p:stCondLst>
+                      <p:childTnLst>
+                        <p:par>
+                          <p:cTn id="8" fill="hold">
+                            <p:stCondLst>
+                              <p:cond delay="0"/>
+                            </p:stCondLst>
+                            <p:childTnLst>
+                              <p:par>
+                                <p:cTn id="9" presetID="10" presetClass="exit" presetSubtype="0" fill="hold" nodeType="clickEffect">
+                                  <p:stCondLst>
+                                    <p:cond delay="0"/>
+                                  </p:stCondLst>
+                                  <p:childTnLst>
+                                    <p:animEffect transition="out" filter="fade">
+                                      <p:cBhvr>
+                                        <p:cTn id="10" dur="500"/>
+                                        <p:tgtEl>
+                                          <p:spTgt spid="6"/>
+                                        </p:tgtEl>
+                                      </p:cBhvr>
+                                    </p:animEffect>
+                                    <p:set>
+                                      <p:cBhvr>
+                                        <p:cTn id="11" dur="1" fill="hold">
+                                          <p:stCondLst>
+                                            <p:cond delay="499"/>
+                                          </p:stCondLst>
+                                        </p:cTn>
+                                        <p:tgtEl>
+                                          <p:spTgt spid="6"/>
+                                        </p:tgtEl>
+                                        <p:attrNameLst>
+                                          <p:attrName>style.visibility</p:attrName>
+                                        </p:attrNameLst>
+                                      </p:cBhvr>
+                                      <p:to>
+                                        <p:strVal val="hidden"/>
+                                      </p:to>
+                                    </p:set>
+                                  </p:childTnLst>
+                                </p:cTn>
+                              </p:par>
+                              <p:par>
+                                <p:cTn id="12" presetID="10" presetClass="entr" presetSubtype="0" fill="hold" nodeType="withEffect">
+                                  <p:stCondLst>
+                                    <p:cond delay="0"/>
+                                  </p:stCondLst>
+                                  <p:childTnLst>
+                                    <p:set>
+                                      <p:cBhvr>
+                                        <p:cTn id="13" dur="1" fill="hold">
+                                          <p:stCondLst>
+                                            <p:cond delay="0"/>
+                                          </p:stCondLst>
+                                        </p:cTn>
+                                        <p:tgtEl>
+                                          <p:spTgt spid="8"/>
+                                        </p:tgtEl>
+                                        <p:attrNameLst>
+                                          <p:attrName>style.visibility</p:attrName>
+                                        </p:attrNameLst>
+                                      </p:cBhvr>
+                                      <p:to>
+                                        <p:strVal val="visible"/>
+                                      </p:to>
+                                    </p:set>
+                                    <p:animEffect transition="in" filter="fade">
+                                      <p:cBhvr>
+                                        <p:cTn id="14" dur="500"/>
+                                        <p:tgtEl>
+                                          <p:spTgt spid="8"/>
+                                        </p:tgtEl>
+                                      </p:cBhvr>
+                                    </p:animEffect>
+                                  </p:childTnLst>
+                                </p:cTn>
+                              </p:par>
+                            </p:childTnLst>
+                          </p:cTn>
+                        </p:par>
+                      </p:childTnLst>
+                    </p:cTn>
+                  </p:par>
+                  <p:par>
+                    <p:cTn id="15" fill="hold">
+                      <p:stCondLst>
+                        <p:cond delay="indefinite"/>
+                      </p:stCondLst>
+                      <p:childTnLst>
+                        <p:par>
+                          <p:cTn id="16" fill="hold">
+                            <p:stCondLst>
+                              <p:cond delay="0"/>
+                            </p:stCondLst>
+                            <p:childTnLst>
+                              <p:par>
+                                <p:cTn id="17" presetID="10" presetClass="exit" presetSubtype="0" fill="hold" nodeType="clickEffect">
+                                  <p:stCondLst>
+                                    <p:cond delay="0"/>
+                                  </p:stCondLst>
+                                  <p:childTnLst>
+                                    <p:animEffect transition="out" filter="fade">
+                                      <p:cBhvr>
+                                        <p:cTn id="18" dur="500"/>
+                                        <p:tgtEl>
+                                          <p:spTgt spid="8"/>
+                                        </p:tgtEl>
+                                      </p:cBhvr>
+                                    </p:animEffect>
+                                    <p:set>
+                                      <p:cBhvr>
+                                        <p:cTn id="19" dur="1" fill="hold">
+                                          <p:stCondLst>
+                                            <p:cond delay="499"/>
+                                          </p:stCondLst>
+                                        </p:cTn>
+                                        <p:tgtEl>
+                                          <p:spTgt spid="8"/>
+                                        </p:tgtEl>
+                                        <p:attrNameLst>
+                                          <p:attrName>style.visibility</p:attrName>
+                                        </p:attrNameLst>
+                                      </p:cBhvr>
+                                      <p:to>
+                                        <p:strVal val="hidden"/>
+                                      </p:to>
+                                    </p:set>
+                                  </p:childTnLst>
+                                </p:cTn>
+                              </p:par>
+                              <p:par>
+                                <p:cTn id="20" presetID="1" presetClass="entr" presetSubtype="0" fill="hold" nodeType="withEffect">
+                                  <p:stCondLst>
+                                    <p:cond delay="0"/>
+                                  </p:stCondLst>
+                                  <p:childTnLst>
+                                    <p:set>
+                                      <p:cBhvr>
+                                        <p:cTn id="21" dur="1" fill="hold">
+                                          <p:stCondLst>
+                                            <p:cond delay="0"/>
+                                          </p:stCondLst>
+                                        </p:cTn>
+                                        <p:tgtEl>
+                                          <p:spTgt spid="10"/>
+                                        </p:tgtEl>
+                                        <p:attrNameLst>
+                                          <p:attrName>style.visibility</p:attrName>
+                                        </p:attrNameLst>
+                                      </p:cBhvr>
+                                      <p:to>
+                                        <p:strVal val="visible"/>
+                                      </p:to>
+                                    </p:set>
+                                  </p:childTnLst>
+                                </p:cTn>
+                              </p:par>
+                            </p:childTnLst>
+                          </p:cTn>
+                        </p:par>
+                      </p:childTnLst>
+                    </p:cTn>
+                  </p:par>
+                </p:childTnLst>
+              </p:cTn>
+              <p:prevCondLst>
+                <p:cond evt="onPrev" delay="0">
+                  <p:tgtEl>
+                    <p:sldTgt/>
+                  </p:tgtEl>
+                </p:cond>
+              </p:prevCondLst>
+              <p:nextCondLst>
+                <p:cond evt="onNext" delay="0">
+                  <p:tgtEl>
+                    <p:sldTgt/>
+                  </p:tgtEl>
+                </p:cond>
+              </p:nextCondLst>
+            </p:seq>
+          </p:childTnLst>
+        </p:cTn>
+      </p:par>
+    </p:tnLst>
+  </p:timing>
+</p:sld>
+</file>
+
+<file path=ppt/slides/slide25.xml><?xml version="1.0" encoding="utf-8"?>
+<p:sld xmlns:a="http://schemas.openxmlformats.org/drawingml/2006/main" xmlns:r="http://schemas.openxmlformats.org/officeDocument/2006/relationships" xmlns:p="http://schemas.openxmlformats.org/presentationml/2006/main">
+  <p:cSld>
+    <p:spTree>
+      <p:nvGrpSpPr>
+        <p:cNvPr id="1" name="">
+          <a:extLst>
+            <a:ext uri="{FF2B5EF4-FFF2-40B4-BE49-F238E27FC236}">
+              <a16:creationId xmlns:a16="http://schemas.microsoft.com/office/drawing/2014/main" id="{FF95AA4D-E111-452A-C2B4-4F1F183E8230}"/>
+            </a:ext>
+          </a:extLst>
+        </p:cNvPr>
+        <p:cNvGrpSpPr/>
+        <p:nvPr/>
+      </p:nvGrpSpPr>
+      <p:grpSpPr>
+        <a:xfrm>
+          <a:off x="0" y="0"/>
+          <a:ext cx="0" cy="0"/>
+          <a:chOff x="0" y="0"/>
+          <a:chExt cx="0" cy="0"/>
+        </a:xfrm>
+      </p:grpSpPr>
+      <p:sp>
+        <p:nvSpPr>
+          <p:cNvPr id="6" name="Titel 5">
+            <a:extLst>
+              <a:ext uri="{FF2B5EF4-FFF2-40B4-BE49-F238E27FC236}">
+                <a16:creationId xmlns:a16="http://schemas.microsoft.com/office/drawing/2014/main" id="{DD63B2ED-6C91-56DE-537B-00DB65F2A86C}"/>
+              </a:ext>
+            </a:extLst>
+          </p:cNvPr>
+          <p:cNvSpPr>
+            <a:spLocks noGrp="1"/>
+          </p:cNvSpPr>
+          <p:nvPr>
+            <p:ph type="title"/>
+          </p:nvPr>
+        </p:nvSpPr>
+        <p:spPr/>
+        <p:txBody>
+          <a:bodyPr/>
+          <a:lstStyle/>
+          <a:p>
+            <a:r>
+              <a:rPr lang="en-US" dirty="0"/>
+              <a:t>CTEs improve Performance</a:t>
+            </a:r>
+          </a:p>
+        </p:txBody>
+      </p:sp>
+      <p:pic>
+        <p:nvPicPr>
+          <p:cNvPr id="3" name="Grafik 2">
+            <a:extLst>
+              <a:ext uri="{FF2B5EF4-FFF2-40B4-BE49-F238E27FC236}">
+                <a16:creationId xmlns:a16="http://schemas.microsoft.com/office/drawing/2014/main" id="{968B709F-A95A-B724-3159-853EBEBC00C4}"/>
+              </a:ext>
+            </a:extLst>
+          </p:cNvPr>
+          <p:cNvPicPr>
+            <a:picLocks noChangeAspect="1"/>
+          </p:cNvPicPr>
+          <p:nvPr/>
+        </p:nvPicPr>
+        <p:blipFill>
+          <a:blip r:embed="rId2"/>
+          <a:stretch>
+            <a:fillRect/>
+          </a:stretch>
+        </p:blipFill>
+        <p:spPr>
+          <a:xfrm>
+            <a:off x="3863181" y="1700213"/>
+            <a:ext cx="4465637" cy="4465637"/>
+          </a:xfrm>
+          <a:prstGeom prst="rect">
+            <a:avLst/>
+          </a:prstGeom>
+        </p:spPr>
+      </p:pic>
+    </p:spTree>
+    <p:extLst>
+      <p:ext uri="{BB962C8B-B14F-4D97-AF65-F5344CB8AC3E}">
+        <p14:creationId xmlns:p14="http://schemas.microsoft.com/office/powerpoint/2010/main" val="811244060"/>
+      </p:ext>
+    </p:extLst>
+  </p:cSld>
+  <p:clrMapOvr>
+    <a:masterClrMapping/>
+  </p:clrMapOvr>
+  <p:timing>
+    <p:tnLst>
+      <p:par>
+        <p:cTn id="1" dur="indefinite" restart="never" nodeType="tmRoot">
+          <p:childTnLst>
+            <p:seq concurrent="1" nextAc="seek">
+              <p:cTn id="2" dur="indefinite" nodeType="mainSeq">
+                <p:childTnLst>
+                  <p:par>
+                    <p:cTn id="3" fill="hold">
+                      <p:stCondLst>
+                        <p:cond delay="indefinite"/>
+                        <p:cond evt="onBegin" delay="0">
+                          <p:tn val="2"/>
+                        </p:cond>
+                      </p:stCondLst>
+                      <p:childTnLst>
+                        <p:par>
+                          <p:cTn id="4" fill="hold">
+                            <p:stCondLst>
+                              <p:cond delay="0"/>
+                            </p:stCondLst>
+                            <p:childTnLst>
+                              <p:par>
+                                <p:cTn id="5" presetID="31" presetClass="entr" presetSubtype="0" fill="hold" nodeType="withEffect">
+                                  <p:stCondLst>
+                                    <p:cond delay="0"/>
+                                  </p:stCondLst>
+                                  <p:childTnLst>
+                                    <p:set>
+                                      <p:cBhvr>
+                                        <p:cTn id="6" dur="1" fill="hold">
+                                          <p:stCondLst>
+                                            <p:cond delay="0"/>
+                                          </p:stCondLst>
+                                        </p:cTn>
+                                        <p:tgtEl>
+                                          <p:spTgt spid="3"/>
+                                        </p:tgtEl>
+                                        <p:attrNameLst>
+                                          <p:attrName>style.visibility</p:attrName>
+                                        </p:attrNameLst>
+                                      </p:cBhvr>
+                                      <p:to>
+                                        <p:strVal val="visible"/>
+                                      </p:to>
+                                    </p:set>
+                                    <p:anim calcmode="lin" valueType="num">
+                                      <p:cBhvr>
+                                        <p:cTn id="7" dur="1000" fill="hold"/>
+                                        <p:tgtEl>
+                                          <p:spTgt spid="3"/>
+                                        </p:tgtEl>
+                                        <p:attrNameLst>
+                                          <p:attrName>ppt_w</p:attrName>
+                                        </p:attrNameLst>
+                                      </p:cBhvr>
+                                      <p:tavLst>
+                                        <p:tav tm="0">
+                                          <p:val>
+                                            <p:fltVal val="0"/>
+                                          </p:val>
+                                        </p:tav>
+                                        <p:tav tm="100000">
+                                          <p:val>
+                                            <p:strVal val="#ppt_w"/>
+                                          </p:val>
+                                        </p:tav>
+                                      </p:tavLst>
+                                    </p:anim>
+                                    <p:anim calcmode="lin" valueType="num">
+                                      <p:cBhvr>
+                                        <p:cTn id="8" dur="1000" fill="hold"/>
+                                        <p:tgtEl>
+                                          <p:spTgt spid="3"/>
+                                        </p:tgtEl>
+                                        <p:attrNameLst>
+                                          <p:attrName>ppt_h</p:attrName>
+                                        </p:attrNameLst>
+                                      </p:cBhvr>
+                                      <p:tavLst>
+                                        <p:tav tm="0">
+                                          <p:val>
+                                            <p:fltVal val="0"/>
+                                          </p:val>
+                                        </p:tav>
+                                        <p:tav tm="100000">
+                                          <p:val>
+                                            <p:strVal val="#ppt_h"/>
+                                          </p:val>
+                                        </p:tav>
+                                      </p:tavLst>
+                                    </p:anim>
+                                    <p:anim calcmode="lin" valueType="num">
+                                      <p:cBhvr>
+                                        <p:cTn id="9" dur="1000" fill="hold"/>
+                                        <p:tgtEl>
+                                          <p:spTgt spid="3"/>
+                                        </p:tgtEl>
+                                        <p:attrNameLst>
+                                          <p:attrName>style.rotation</p:attrName>
+                                        </p:attrNameLst>
+                                      </p:cBhvr>
+                                      <p:tavLst>
+                                        <p:tav tm="0">
+                                          <p:val>
+                                            <p:fltVal val="90"/>
+                                          </p:val>
+                                        </p:tav>
+                                        <p:tav tm="100000">
+                                          <p:val>
+                                            <p:fltVal val="0"/>
+                                          </p:val>
+                                        </p:tav>
+                                      </p:tavLst>
+                                    </p:anim>
+                                    <p:animEffect transition="in" filter="fade">
+                                      <p:cBhvr>
+                                        <p:cTn id="10" dur="1000"/>
+                                        <p:tgtEl>
+                                          <p:spTgt spid="3"/>
+                                        </p:tgtEl>
+                                      </p:cBhvr>
+                                    </p:animEffect>
+                                  </p:childTnLst>
+                                </p:cTn>
+                              </p:par>
+                            </p:childTnLst>
+                          </p:cTn>
+                        </p:par>
+                      </p:childTnLst>
+                    </p:cTn>
+                  </p:par>
+                </p:childTnLst>
+              </p:cTn>
+              <p:prevCondLst>
+                <p:cond evt="onPrev" delay="0">
+                  <p:tgtEl>
+                    <p:sldTgt/>
+                  </p:tgtEl>
+                </p:cond>
+              </p:prevCondLst>
+              <p:nextCondLst>
+                <p:cond evt="onNext" delay="0">
+                  <p:tgtEl>
+                    <p:sldTgt/>
+                  </p:tgtEl>
+                </p:cond>
+              </p:nextCondLst>
+            </p:seq>
+          </p:childTnLst>
+        </p:cTn>
+      </p:par>
+    </p:tnLst>
+  </p:timing>
+</p:sld>
+</file>
+
+<file path=ppt/slides/slide26.xml><?xml version="1.0" encoding="utf-8"?>
 <p:sld xmlns:a="http://schemas.openxmlformats.org/drawingml/2006/main" xmlns:r="http://schemas.openxmlformats.org/officeDocument/2006/relationships" xmlns:p="http://schemas.openxmlformats.org/presentationml/2006/main">
   <p:cSld>
     <p:spTree>
@@ -13342,7 +17969,7 @@
 </p:sld>
 </file>
 
-<file path=ppt/slides/slide24.xml><?xml version="1.0" encoding="utf-8"?>
+<file path=ppt/slides/slide27.xml><?xml version="1.0" encoding="utf-8"?>
 <p:sld xmlns:a="http://schemas.openxmlformats.org/drawingml/2006/main" xmlns:r="http://schemas.openxmlformats.org/officeDocument/2006/relationships" xmlns:p="http://schemas.openxmlformats.org/presentationml/2006/main">
   <p:cSld>
     <p:spTree>
@@ -13425,7 +18052,7 @@
 </p:sld>
 </file>
 
-<file path=ppt/slides/slide25.xml><?xml version="1.0" encoding="utf-8"?>
+<file path=ppt/slides/slide28.xml><?xml version="1.0" encoding="utf-8"?>
 <p:sld xmlns:a="http://schemas.openxmlformats.org/drawingml/2006/main" xmlns:r="http://schemas.openxmlformats.org/officeDocument/2006/relationships" xmlns:p="http://schemas.openxmlformats.org/presentationml/2006/main">
   <p:cSld>
     <p:spTree>
@@ -13530,6 +18157,287 @@
     <p:extLst>
       <p:ext uri="{BB962C8B-B14F-4D97-AF65-F5344CB8AC3E}">
         <p14:creationId xmlns:p14="http://schemas.microsoft.com/office/powerpoint/2010/main" val="3372702853"/>
+      </p:ext>
+    </p:extLst>
+  </p:cSld>
+  <p:clrMapOvr>
+    <a:masterClrMapping/>
+  </p:clrMapOvr>
+</p:sld>
+</file>
+
+<file path=ppt/slides/slide29.xml><?xml version="1.0" encoding="utf-8"?>
+<p:sld xmlns:a="http://schemas.openxmlformats.org/drawingml/2006/main" xmlns:r="http://schemas.openxmlformats.org/officeDocument/2006/relationships" xmlns:p="http://schemas.openxmlformats.org/presentationml/2006/main">
+  <p:cSld>
+    <p:spTree>
+      <p:nvGrpSpPr>
+        <p:cNvPr id="1" name=""/>
+        <p:cNvGrpSpPr/>
+        <p:nvPr/>
+      </p:nvGrpSpPr>
+      <p:grpSpPr>
+        <a:xfrm>
+          <a:off x="0" y="0"/>
+          <a:ext cx="0" cy="0"/>
+          <a:chOff x="0" y="0"/>
+          <a:chExt cx="0" cy="0"/>
+        </a:xfrm>
+      </p:grpSpPr>
+      <p:pic>
+        <p:nvPicPr>
+          <p:cNvPr id="3" name="Grafik 2" descr="Ein Bild, das Wand, drinnen, Person, essend enthält.&#10;&#10;Automatisch generierte Beschreibung">
+            <a:extLst>
+              <a:ext uri="{FF2B5EF4-FFF2-40B4-BE49-F238E27FC236}">
+                <a16:creationId xmlns:a16="http://schemas.microsoft.com/office/drawing/2014/main" id="{B83979AF-EC4E-A3B7-5E7A-4742A3BCD424}"/>
+              </a:ext>
+            </a:extLst>
+          </p:cNvPr>
+          <p:cNvPicPr>
+            <a:picLocks noChangeAspect="1"/>
+          </p:cNvPicPr>
+          <p:nvPr/>
+        </p:nvPicPr>
+        <p:blipFill>
+          <a:blip r:embed="rId2">
+            <a:extLst>
+              <a:ext uri="{28A0092B-C50C-407E-A947-70E740481C1C}">
+                <a14:useLocalDpi xmlns:a14="http://schemas.microsoft.com/office/drawing/2010/main" val="0"/>
+              </a:ext>
+            </a:extLst>
+          </a:blip>
+          <a:stretch>
+            <a:fillRect/>
+          </a:stretch>
+        </p:blipFill>
+        <p:spPr>
+          <a:xfrm>
+            <a:off x="4391025" y="1196975"/>
+            <a:ext cx="3409950" cy="3429000"/>
+          </a:xfrm>
+          <a:prstGeom prst="rect">
+            <a:avLst/>
+          </a:prstGeom>
+          <a:ln w="57150">
+            <a:solidFill>
+              <a:schemeClr val="tx1"/>
+            </a:solidFill>
+          </a:ln>
+          <a:effectLst>
+            <a:outerShdw blurRad="76200" dist="12700" dir="8100000" sy="-23000" kx="800400" algn="br" rotWithShape="0">
+              <a:prstClr val="black">
+                <a:alpha val="20000"/>
+              </a:prstClr>
+            </a:outerShdw>
+          </a:effectLst>
+        </p:spPr>
+      </p:pic>
+      <p:sp>
+        <p:nvSpPr>
+          <p:cNvPr id="2" name="Untertitel 2">
+            <a:extLst>
+              <a:ext uri="{FF2B5EF4-FFF2-40B4-BE49-F238E27FC236}">
+                <a16:creationId xmlns:a16="http://schemas.microsoft.com/office/drawing/2014/main" id="{C397CE24-1561-012C-8144-0FD46600A04F}"/>
+              </a:ext>
+            </a:extLst>
+          </p:cNvPr>
+          <p:cNvSpPr txBox="1">
+            <a:spLocks/>
+          </p:cNvSpPr>
+          <p:nvPr/>
+        </p:nvSpPr>
+        <p:spPr>
+          <a:xfrm>
+            <a:off x="344245" y="4870174"/>
+            <a:ext cx="11510683" cy="743821"/>
+          </a:xfrm>
+          <a:prstGeom prst="rect">
+            <a:avLst/>
+          </a:prstGeom>
+        </p:spPr>
+        <p:txBody>
+          <a:bodyPr/>
+          <a:lstStyle>
+            <a:lvl1pPr marL="228584" indent="-228584" algn="l" defTabSz="914332" rtl="0" eaLnBrk="1" latinLnBrk="0" hangingPunct="1">
+              <a:lnSpc>
+                <a:spcPct val="90000"/>
+              </a:lnSpc>
+              <a:spcBef>
+                <a:spcPts val="1000"/>
+              </a:spcBef>
+              <a:buFont typeface="Arial" panose="020B0604020202020204" pitchFamily="34" charset="0"/>
+              <a:buChar char="•"/>
+              <a:defRPr sz="2400" kern="1200">
+                <a:solidFill>
+                  <a:schemeClr val="tx1"/>
+                </a:solidFill>
+                <a:latin typeface="+mn-lt"/>
+                <a:ea typeface="+mn-ea"/>
+                <a:cs typeface="+mn-cs"/>
+              </a:defRPr>
+            </a:lvl1pPr>
+            <a:lvl2pPr marL="685750" indent="-228584" algn="l" defTabSz="914332" rtl="0" eaLnBrk="1" latinLnBrk="0" hangingPunct="1">
+              <a:lnSpc>
+                <a:spcPct val="90000"/>
+              </a:lnSpc>
+              <a:spcBef>
+                <a:spcPts val="500"/>
+              </a:spcBef>
+              <a:buFont typeface="Arial" panose="020B0604020202020204" pitchFamily="34" charset="0"/>
+              <a:buChar char="•"/>
+              <a:defRPr sz="2400" kern="1200">
+                <a:solidFill>
+                  <a:schemeClr val="tx1"/>
+                </a:solidFill>
+                <a:latin typeface="+mn-lt"/>
+                <a:ea typeface="+mn-ea"/>
+                <a:cs typeface="+mn-cs"/>
+              </a:defRPr>
+            </a:lvl2pPr>
+            <a:lvl3pPr marL="1142914" indent="-228584" algn="l" defTabSz="914332" rtl="0" eaLnBrk="1" latinLnBrk="0" hangingPunct="1">
+              <a:lnSpc>
+                <a:spcPct val="90000"/>
+              </a:lnSpc>
+              <a:spcBef>
+                <a:spcPts val="500"/>
+              </a:spcBef>
+              <a:buFont typeface="Arial" panose="020B0604020202020204" pitchFamily="34" charset="0"/>
+              <a:buChar char="•"/>
+              <a:defRPr sz="2400" kern="1200">
+                <a:solidFill>
+                  <a:schemeClr val="tx1"/>
+                </a:solidFill>
+                <a:latin typeface="+mn-lt"/>
+                <a:ea typeface="+mn-ea"/>
+                <a:cs typeface="+mn-cs"/>
+              </a:defRPr>
+            </a:lvl3pPr>
+            <a:lvl4pPr marL="1600080" indent="-228584" algn="l" defTabSz="914332" rtl="0" eaLnBrk="1" latinLnBrk="0" hangingPunct="1">
+              <a:lnSpc>
+                <a:spcPct val="90000"/>
+              </a:lnSpc>
+              <a:spcBef>
+                <a:spcPts val="500"/>
+              </a:spcBef>
+              <a:buFont typeface="Arial" panose="020B0604020202020204" pitchFamily="34" charset="0"/>
+              <a:buChar char="•"/>
+              <a:defRPr sz="2400" kern="1200">
+                <a:solidFill>
+                  <a:schemeClr val="tx1"/>
+                </a:solidFill>
+                <a:latin typeface="+mn-lt"/>
+                <a:ea typeface="+mn-ea"/>
+                <a:cs typeface="+mn-cs"/>
+              </a:defRPr>
+            </a:lvl4pPr>
+            <a:lvl5pPr marL="2057247" indent="-228584" algn="l" defTabSz="914332" rtl="0" eaLnBrk="1" latinLnBrk="0" hangingPunct="1">
+              <a:lnSpc>
+                <a:spcPct val="90000"/>
+              </a:lnSpc>
+              <a:spcBef>
+                <a:spcPts val="500"/>
+              </a:spcBef>
+              <a:buFont typeface="Arial" panose="020B0604020202020204" pitchFamily="34" charset="0"/>
+              <a:buChar char="•"/>
+              <a:defRPr sz="2400" kern="1200">
+                <a:solidFill>
+                  <a:schemeClr val="tx1"/>
+                </a:solidFill>
+                <a:latin typeface="+mn-lt"/>
+                <a:ea typeface="+mn-ea"/>
+                <a:cs typeface="+mn-cs"/>
+              </a:defRPr>
+            </a:lvl5pPr>
+            <a:lvl6pPr marL="2514412" indent="-228584" algn="l" defTabSz="914332" rtl="0" eaLnBrk="1" latinLnBrk="0" hangingPunct="1">
+              <a:lnSpc>
+                <a:spcPct val="90000"/>
+              </a:lnSpc>
+              <a:spcBef>
+                <a:spcPts val="500"/>
+              </a:spcBef>
+              <a:buFont typeface="Arial" panose="020B0604020202020204" pitchFamily="34" charset="0"/>
+              <a:buChar char="•"/>
+              <a:defRPr sz="1867" kern="1200">
+                <a:solidFill>
+                  <a:schemeClr val="tx1"/>
+                </a:solidFill>
+                <a:latin typeface="+mn-lt"/>
+                <a:ea typeface="+mn-ea"/>
+                <a:cs typeface="+mn-cs"/>
+              </a:defRPr>
+            </a:lvl6pPr>
+            <a:lvl7pPr marL="2971578" indent="-228584" algn="l" defTabSz="914332" rtl="0" eaLnBrk="1" latinLnBrk="0" hangingPunct="1">
+              <a:lnSpc>
+                <a:spcPct val="90000"/>
+              </a:lnSpc>
+              <a:spcBef>
+                <a:spcPts val="500"/>
+              </a:spcBef>
+              <a:buFont typeface="Arial" panose="020B0604020202020204" pitchFamily="34" charset="0"/>
+              <a:buChar char="•"/>
+              <a:defRPr sz="1867" kern="1200">
+                <a:solidFill>
+                  <a:schemeClr val="tx1"/>
+                </a:solidFill>
+                <a:latin typeface="+mn-lt"/>
+                <a:ea typeface="+mn-ea"/>
+                <a:cs typeface="+mn-cs"/>
+              </a:defRPr>
+            </a:lvl7pPr>
+            <a:lvl8pPr marL="3428744" indent="-228584" algn="l" defTabSz="914332" rtl="0" eaLnBrk="1" latinLnBrk="0" hangingPunct="1">
+              <a:lnSpc>
+                <a:spcPct val="90000"/>
+              </a:lnSpc>
+              <a:spcBef>
+                <a:spcPts val="500"/>
+              </a:spcBef>
+              <a:buFont typeface="Arial" panose="020B0604020202020204" pitchFamily="34" charset="0"/>
+              <a:buChar char="•"/>
+              <a:defRPr sz="1867" kern="1200">
+                <a:solidFill>
+                  <a:schemeClr val="tx1"/>
+                </a:solidFill>
+                <a:latin typeface="+mn-lt"/>
+                <a:ea typeface="+mn-ea"/>
+                <a:cs typeface="+mn-cs"/>
+              </a:defRPr>
+            </a:lvl8pPr>
+            <a:lvl9pPr marL="3885910" indent="-228584" algn="l" defTabSz="914332" rtl="0" eaLnBrk="1" latinLnBrk="0" hangingPunct="1">
+              <a:lnSpc>
+                <a:spcPct val="90000"/>
+              </a:lnSpc>
+              <a:spcBef>
+                <a:spcPts val="500"/>
+              </a:spcBef>
+              <a:buFont typeface="Arial" panose="020B0604020202020204" pitchFamily="34" charset="0"/>
+              <a:buChar char="•"/>
+              <a:defRPr sz="1867" kern="1200">
+                <a:solidFill>
+                  <a:schemeClr val="tx1"/>
+                </a:solidFill>
+                <a:latin typeface="+mn-lt"/>
+                <a:ea typeface="+mn-ea"/>
+                <a:cs typeface="+mn-cs"/>
+              </a:defRPr>
+            </a:lvl9pPr>
+          </a:lstStyle>
+          <a:p>
+            <a:pPr marL="0" indent="0" algn="ctr">
+              <a:buNone/>
+            </a:pPr>
+            <a:r>
+              <a:rPr lang="de-DE" dirty="0">
+                <a:hlinkClick r:id="rId3"/>
+              </a:rPr>
+              <a:t>https://github.com/db-berater/solving-deadlock-scenarios</a:t>
+            </a:r>
+            <a:endParaRPr lang="de-DE" dirty="0"/>
+          </a:p>
+        </p:txBody>
+      </p:sp>
+    </p:spTree>
+    <p:extLst>
+      <p:ext uri="{BB962C8B-B14F-4D97-AF65-F5344CB8AC3E}">
+        <p14:creationId xmlns:p14="http://schemas.microsoft.com/office/powerpoint/2010/main" val="216906354"/>
       </p:ext>
     </p:extLst>
   </p:cSld>
